--- a/presentations/Mobile_Test_Automation_Appium.pptx
+++ b/presentations/Mobile_Test_Automation_Appium.pptx
@@ -2354,6 +2354,160 @@
     <p:bg>
       <p:bgPr>
         <a:solidFill>
+          <a:srgbClr val="0B5FA5"/>
+        </a:solidFill>
+      </p:bgPr>
+    </p:bg>
+    <p:spTree>
+      <p:nvGrpSpPr>
+        <p:cNvPr id="1" name=""/>
+        <p:cNvGrpSpPr/>
+        <p:nvPr/>
+      </p:nvGrpSpPr>
+      <p:grpSpPr>
+        <a:xfrm>
+          <a:off x="0" y="0"/>
+          <a:ext cx="0" cy="0"/>
+          <a:chOff x="0" y="0"/>
+          <a:chExt cx="0" cy="0"/>
+        </a:xfrm>
+      </p:grpSpPr>
+      <p:sp>
+        <p:nvSpPr>
+          <p:cNvPr id="2" name="Text 0"/>
+          <p:cNvSpPr/>
+          <p:nvPr/>
+        </p:nvSpPr>
+        <p:spPr>
+          <a:xfrm>
+            <a:off x="566928" y="2011680"/>
+            <a:ext cx="1828800" cy="914400"/>
+          </a:xfrm>
+          <a:prstGeom prst="rect">
+            <a:avLst/>
+          </a:prstGeom>
+          <a:noFill/>
+          <a:ln/>
+        </p:spPr>
+        <p:txBody>
+          <a:bodyPr wrap="square" rtlCol="0" anchor="ctr"/>
+          <a:lstStyle/>
+          <a:p>
+            <a:pPr indent="0" marL="0">
+              <a:buNone/>
+            </a:pPr>
+            <a:r>
+              <a:rPr lang="en-US" sz="6400" b="1" dirty="0">
+                <a:solidFill>
+                  <a:srgbClr val="FFFFFF">
+                    <a:alpha val="45000"/>
+                  </a:srgbClr>
+                </a:solidFill>
+                <a:latin typeface="Segoe UI" pitchFamily="34" charset="0"/>
+                <a:ea typeface="Segoe UI" pitchFamily="34" charset="-122"/>
+                <a:cs typeface="Segoe UI" pitchFamily="34" charset="-120"/>
+              </a:rPr>
+              <a:t>03</a:t>
+            </a:r>
+            <a:endParaRPr lang="en-US" sz="6400" dirty="0"/>
+          </a:p>
+        </p:txBody>
+      </p:sp>
+      <p:sp>
+        <p:nvSpPr>
+          <p:cNvPr id="3" name="Text 1"/>
+          <p:cNvSpPr/>
+          <p:nvPr/>
+        </p:nvSpPr>
+        <p:spPr>
+          <a:xfrm>
+            <a:off x="566928" y="2926080"/>
+            <a:ext cx="11057839" cy="822960"/>
+          </a:xfrm>
+          <a:prstGeom prst="rect">
+            <a:avLst/>
+          </a:prstGeom>
+          <a:noFill/>
+          <a:ln/>
+        </p:spPr>
+        <p:txBody>
+          <a:bodyPr wrap="square" rtlCol="0" anchor="ctr"/>
+          <a:lstStyle/>
+          <a:p>
+            <a:pPr indent="0" marL="0">
+              <a:buNone/>
+            </a:pPr>
+            <a:r>
+              <a:rPr lang="en-US" sz="3400" b="1" dirty="0">
+                <a:solidFill>
+                  <a:srgbClr val="FFFFFF"/>
+                </a:solidFill>
+                <a:latin typeface="Segoe UI" pitchFamily="34" charset="0"/>
+                <a:ea typeface="Segoe UI" pitchFamily="34" charset="-122"/>
+                <a:cs typeface="Segoe UI" pitchFamily="34" charset="-120"/>
+              </a:rPr>
+              <a:t>How AI changed the effort</a:t>
+            </a:r>
+            <a:endParaRPr lang="en-US" sz="3400" dirty="0"/>
+          </a:p>
+        </p:txBody>
+      </p:sp>
+      <p:sp>
+        <p:nvSpPr>
+          <p:cNvPr id="4" name="Text 2"/>
+          <p:cNvSpPr/>
+          <p:nvPr/>
+        </p:nvSpPr>
+        <p:spPr>
+          <a:xfrm>
+            <a:off x="566928" y="3794760"/>
+            <a:ext cx="9229039" cy="731520"/>
+          </a:xfrm>
+          <a:prstGeom prst="rect">
+            <a:avLst/>
+          </a:prstGeom>
+          <a:noFill/>
+          <a:ln/>
+        </p:spPr>
+        <p:txBody>
+          <a:bodyPr wrap="square" rtlCol="0" anchor="ctr"/>
+          <a:lstStyle/>
+          <a:p>
+            <a:pPr indent="0" marL="0">
+              <a:lnSpc>
+                <a:spcPct val="125000"/>
+              </a:lnSpc>
+              <a:buNone/>
+            </a:pPr>
+            <a:r>
+              <a:rPr lang="en-US" sz="1500" dirty="0">
+                <a:solidFill>
+                  <a:srgbClr val="D8E6F3"/>
+                </a:solidFill>
+                <a:latin typeface="Segoe UI" pitchFamily="34" charset="0"/>
+                <a:ea typeface="Segoe UI" pitchFamily="34" charset="-122"/>
+                <a:cs typeface="Segoe UI" pitchFamily="34" charset="-120"/>
+              </a:rPr>
+              <a:t>Including the diagnosis that unblocked the whole environment.</a:t>
+            </a:r>
+            <a:endParaRPr lang="en-US" sz="1500" dirty="0"/>
+          </a:p>
+        </p:txBody>
+      </p:sp>
+    </p:spTree>
+  </p:cSld>
+  <p:clrMapOvr>
+    <a:masterClrMapping/>
+  </p:clrMapOvr>
+</p:sld>
+</file>
+
+<file path=ppt/slides/slide11.xml><?xml version="1.0" encoding="utf-8"?>
+<p:sld xmlns:a="http://schemas.openxmlformats.org/drawingml/2006/main" xmlns:r="http://schemas.openxmlformats.org/officeDocument/2006/relationships" xmlns:p="http://schemas.openxmlformats.org/presentationml/2006/main">
+  <p:cSld name="Slide 11">
+    <p:bg>
+      <p:bgPr>
+        <a:solidFill>
           <a:srgbClr val="FFFFFF"/>
         </a:solidFill>
       </p:bgPr>
@@ -2405,7 +2559,7 @@
                 <a:ea typeface="Segoe UI" pitchFamily="34" charset="-122"/>
                 <a:cs typeface="Segoe UI" pitchFamily="34" charset="-120"/>
               </a:rPr>
-              <a:t>What the environment cost us</a:t>
+              <a:t>By hand, or with the agent</a:t>
             </a:r>
             <a:endParaRPr lang="en-US" sz="2600" dirty="0"/>
           </a:p>
@@ -2444,7 +2598,7 @@
                 <a:ea typeface="Segoe UI" pitchFamily="34" charset="-122"/>
                 <a:cs typeface="Segoe UI" pitchFamily="34" charset="-120"/>
               </a:rPr>
-              <a:t>The real work was not writing tests - it was making a corporate laptop run a device at all</a:t>
+              <a:t>The same three checks on the same APK - including the OTP login that was written off as impossible</a:t>
             </a:r>
             <a:endParaRPr lang="en-US" sz="1400" dirty="0"/>
           </a:p>
@@ -2479,7 +2633,7 @@
         <p:spPr>
           <a:xfrm>
             <a:off x="566928" y="1627632"/>
-            <a:ext cx="11057839" cy="4023360"/>
+            <a:ext cx="2560320" cy="731520"/>
           </a:xfrm>
           <a:prstGeom prst="rect">
             <a:avLst/>
@@ -2488,18 +2642,11 @@
           <a:ln/>
         </p:spPr>
         <p:txBody>
-          <a:bodyPr wrap="square" rtlCol="0" anchor="t"/>
-          <a:lstStyle/>
-          <a:p>
-            <a:pPr marL="342900" indent="-342900">
-              <a:lnSpc>
-                <a:spcPct val="115000"/>
-              </a:lnSpc>
-              <a:spcAft>
-                <a:spcPts val="200"/>
-              </a:spcAft>
-              <a:buSzPct val="100000"/>
-              <a:buChar char="•"/>
+          <a:bodyPr wrap="square" rtlCol="0" anchor="ctr"/>
+          <a:lstStyle/>
+          <a:p>
+            <a:pPr indent="0" marL="0">
+              <a:buNone/>
             </a:pPr>
             <a:r>
               <a:rPr lang="en-US" sz="1400" b="1" dirty="0">
@@ -2510,174 +2657,10 @@
                 <a:ea typeface="Segoe UI" pitchFamily="34" charset="-122"/>
                 <a:cs typeface="Segoe UI" pitchFamily="34" charset="-120"/>
               </a:rPr>
-              <a:t>The emulator could not resolve DNS</a:t>
+              <a:t>Written by hand</a:t>
             </a:r>
             <a:endParaRPr lang="en-US" sz="1400" dirty="0"/>
           </a:p>
-          <a:p>
-            <a:pPr lvl="1" indent="0" marL="0">
-              <a:lnSpc>
-                <a:spcPct val="115000"/>
-              </a:lnSpc>
-              <a:spcAft>
-                <a:spcPts val="1000"/>
-              </a:spcAft>
-              <a:buNone/>
-            </a:pPr>
-            <a:r>
-              <a:rPr lang="en-US" sz="1150" dirty="0">
-                <a:solidFill>
-                  <a:srgbClr val="3F3F46"/>
-                </a:solidFill>
-                <a:latin typeface="Segoe UI" pitchFamily="34" charset="0"/>
-                <a:ea typeface="Segoe UI" pitchFamily="34" charset="-122"/>
-                <a:cs typeface="Segoe UI" pitchFamily="34" charset="-120"/>
-              </a:rPr>
-              <a:t>Every call failed with UnknownHostException. The network was fine - Wi-Fi up, gateway reachable, raw TCP to 443 working. Only DNS over UDP 53 through QEMU’s forwarder was blocked</a:t>
-            </a:r>
-            <a:endParaRPr lang="en-US" sz="1400" dirty="0"/>
-          </a:p>
-          <a:p>
-            <a:pPr marL="342900" indent="-342900">
-              <a:lnSpc>
-                <a:spcPct val="115000"/>
-              </a:lnSpc>
-              <a:spcAft>
-                <a:spcPts val="200"/>
-              </a:spcAft>
-              <a:buSzPct val="100000"/>
-              <a:buChar char="•"/>
-            </a:pPr>
-            <a:r>
-              <a:rPr lang="en-US" sz="1400" b="1" dirty="0">
-                <a:solidFill>
-                  <a:srgbClr val="1A1A1E"/>
-                </a:solidFill>
-                <a:latin typeface="Segoe UI" pitchFamily="34" charset="0"/>
-                <a:ea typeface="Segoe UI" pitchFamily="34" charset="-122"/>
-                <a:cs typeface="Segoe UI" pitchFamily="34" charset="-120"/>
-              </a:rPr>
-              <a:t>ping proved nothing and sent us the wrong way</a:t>
-            </a:r>
-            <a:endParaRPr lang="en-US" sz="1400" dirty="0"/>
-          </a:p>
-          <a:p>
-            <a:pPr lvl="1" indent="0" marL="0">
-              <a:lnSpc>
-                <a:spcPct val="115000"/>
-              </a:lnSpc>
-              <a:spcAft>
-                <a:spcPts val="1000"/>
-              </a:spcAft>
-              <a:buNone/>
-            </a:pPr>
-            <a:r>
-              <a:rPr lang="en-US" sz="1150" dirty="0">
-                <a:solidFill>
-                  <a:srgbClr val="3F3F46"/>
-                </a:solidFill>
-                <a:latin typeface="Segoe UI" pitchFamily="34" charset="0"/>
-                <a:ea typeface="Segoe UI" pitchFamily="34" charset="-122"/>
-                <a:cs typeface="Segoe UI" pitchFamily="34" charset="-120"/>
-              </a:rPr>
-              <a:t>QEMU’s user-mode networking does not forward ICMP at all, so "Network is unreachable" was a red herring; Android also hides the default route in a per-network table</a:t>
-            </a:r>
-            <a:endParaRPr lang="en-US" sz="1400" dirty="0"/>
-          </a:p>
-          <a:p>
-            <a:pPr marL="342900" indent="-342900">
-              <a:lnSpc>
-                <a:spcPct val="115000"/>
-              </a:lnSpc>
-              <a:spcAft>
-                <a:spcPts val="200"/>
-              </a:spcAft>
-              <a:buSzPct val="100000"/>
-              <a:buChar char="•"/>
-            </a:pPr>
-            <a:r>
-              <a:rPr lang="en-US" sz="1400" b="1" dirty="0">
-                <a:solidFill>
-                  <a:srgbClr val="1A1A1E"/>
-                </a:solidFill>
-                <a:latin typeface="Segoe UI" pitchFamily="34" charset="0"/>
-                <a:ea typeface="Segoe UI" pitchFamily="34" charset="-122"/>
-                <a:cs typeface="Segoe UI" pitchFamily="34" charset="-120"/>
-              </a:rPr>
-              <a:t>Fix: resolve names on the host instead</a:t>
-            </a:r>
-            <a:endParaRPr lang="en-US" sz="1400" dirty="0"/>
-          </a:p>
-          <a:p>
-            <a:pPr lvl="1" indent="0" marL="0">
-              <a:lnSpc>
-                <a:spcPct val="115000"/>
-              </a:lnSpc>
-              <a:spcAft>
-                <a:spcPts val="1000"/>
-              </a:spcAft>
-              <a:buNone/>
-            </a:pPr>
-            <a:r>
-              <a:rPr lang="en-US" sz="1150" dirty="0">
-                <a:solidFill>
-                  <a:srgbClr val="3F3F46"/>
-                </a:solidFill>
-                <a:latin typeface="Segoe UI" pitchFamily="34" charset="0"/>
-                <a:ea typeface="Segoe UI" pitchFamily="34" charset="-122"/>
-                <a:cs typeface="Segoe UI" pitchFamily="34" charset="-120"/>
-              </a:rPr>
-              <a:t>A 40-line proxy on the laptop plus one setting on the device. No root, no image swap, no physical handset</a:t>
-            </a:r>
-            <a:endParaRPr lang="en-US" sz="1400" dirty="0"/>
-          </a:p>
-          <a:p>
-            <a:pPr marL="342900" indent="-342900">
-              <a:lnSpc>
-                <a:spcPct val="115000"/>
-              </a:lnSpc>
-              <a:spcAft>
-                <a:spcPts val="200"/>
-              </a:spcAft>
-              <a:buSzPct val="100000"/>
-              <a:buChar char="•"/>
-            </a:pPr>
-            <a:r>
-              <a:rPr lang="en-US" sz="1400" b="1" dirty="0">
-                <a:solidFill>
-                  <a:srgbClr val="1A1A1E"/>
-                </a:solidFill>
-                <a:latin typeface="Segoe UI" pitchFamily="34" charset="0"/>
-                <a:ea typeface="Segoe UI" pitchFamily="34" charset="-122"/>
-                <a:cs typeface="Segoe UI" pitchFamily="34" charset="-120"/>
-              </a:rPr>
-              <a:t>Android’s captive-portal check hijacked the run</a:t>
-            </a:r>
-            <a:endParaRPr lang="en-US" sz="1400" dirty="0"/>
-          </a:p>
-          <a:p>
-            <a:pPr lvl="1" indent="0" marL="0">
-              <a:lnSpc>
-                <a:spcPct val="115000"/>
-              </a:lnSpc>
-              <a:spcAft>
-                <a:spcPts val="1000"/>
-              </a:spcAft>
-              <a:buNone/>
-            </a:pPr>
-            <a:r>
-              <a:rPr lang="en-US" sz="1150" dirty="0">
-                <a:solidFill>
-                  <a:srgbClr val="3F3F46"/>
-                </a:solidFill>
-                <a:latin typeface="Segoe UI" pitchFamily="34" charset="0"/>
-                <a:ea typeface="Segoe UI" pitchFamily="34" charset="-122"/>
-                <a:cs typeface="Segoe UI" pitchFamily="34" charset="-120"/>
-              </a:rPr>
-              <a:t>It opened Chrome over the proxy, hit a certificate error and covered the app mid-test - now disabled on the emulator</a:t>
-            </a:r>
-            <a:endParaRPr lang="en-US" sz="1400" dirty="0"/>
-          </a:p>
         </p:txBody>
       </p:sp>
       <p:sp>
@@ -2688,20 +2671,20 @@
         </p:nvSpPr>
         <p:spPr>
           <a:xfrm>
-            <a:off x="566928" y="4873752"/>
-            <a:ext cx="11057839" cy="868680"/>
+            <a:off x="3310128" y="1627632"/>
+            <a:ext cx="6211519" cy="731520"/>
           </a:xfrm>
           <a:prstGeom prst="roundRect">
             <a:avLst>
-              <a:gd name="adj" fmla="val 6316"/>
+              <a:gd name="adj" fmla="val 6250"/>
             </a:avLst>
           </a:prstGeom>
           <a:solidFill>
-            <a:srgbClr val="1E1E24"/>
+            <a:srgbClr val="F1F2F4"/>
           </a:solidFill>
           <a:ln w="12700">
             <a:solidFill>
-              <a:srgbClr val="1E1E24"/>
+              <a:srgbClr val="F1F2F4"/>
             </a:solidFill>
             <a:prstDash val="solid"/>
           </a:ln>
@@ -2709,14 +2692,41 @@
       </p:sp>
       <p:sp>
         <p:nvSpPr>
-          <p:cNvPr id="7" name="Text 5"/>
-          <p:cNvSpPr/>
-          <p:nvPr/>
-        </p:nvSpPr>
-        <p:spPr>
-          <a:xfrm>
-            <a:off x="768096" y="5020056"/>
-            <a:ext cx="10655503" cy="576072"/>
+          <p:cNvPr id="7" name="Shape 5"/>
+          <p:cNvSpPr/>
+          <p:nvPr/>
+        </p:nvSpPr>
+        <p:spPr>
+          <a:xfrm>
+            <a:off x="3310128" y="1627632"/>
+            <a:ext cx="6211519" cy="731520"/>
+          </a:xfrm>
+          <a:prstGeom prst="roundRect">
+            <a:avLst>
+              <a:gd name="adj" fmla="val 6250"/>
+            </a:avLst>
+          </a:prstGeom>
+          <a:solidFill>
+            <a:srgbClr val="B91C1C"/>
+          </a:solidFill>
+          <a:ln w="12700">
+            <a:solidFill>
+              <a:srgbClr val="B91C1C"/>
+            </a:solidFill>
+            <a:prstDash val="solid"/>
+          </a:ln>
+        </p:spPr>
+      </p:sp>
+      <p:sp>
+        <p:nvSpPr>
+          <p:cNvPr id="8" name="Text 6"/>
+          <p:cNvSpPr/>
+          <p:nvPr/>
+        </p:nvSpPr>
+        <p:spPr>
+          <a:xfrm>
+            <a:off x="9704527" y="1627632"/>
+            <a:ext cx="1737360" cy="731520"/>
           </a:xfrm>
           <a:prstGeom prst="rect">
             <a:avLst/>
@@ -2725,60 +2735,37 @@
           <a:ln/>
         </p:spPr>
         <p:txBody>
-          <a:bodyPr wrap="square" rtlCol="0" anchor="t"/>
+          <a:bodyPr wrap="square" rtlCol="0" anchor="ctr"/>
           <a:lstStyle/>
           <a:p>
             <a:pPr indent="0" marL="0">
-              <a:lnSpc>
-                <a:spcPct val="112000"/>
-              </a:lnSpc>
               <a:buNone/>
             </a:pPr>
             <a:r>
-              <a:rPr lang="en-US" sz="1200" dirty="0">
-                <a:solidFill>
-                  <a:srgbClr val="E8E8EC"/>
-                </a:solidFill>
-                <a:latin typeface="Consolas" pitchFamily="34" charset="0"/>
-                <a:ea typeface="Consolas" pitchFamily="34" charset="-122"/>
-                <a:cs typeface="Consolas" pitchFamily="34" charset="-120"/>
-              </a:rPr>
-              <a:t>npm run proxy                                           # on the laptop</a:t>
-            </a:r>
-            <a:endParaRPr lang="en-US" sz="1200" dirty="0"/>
-          </a:p>
-          <a:p>
-            <a:pPr indent="0" marL="0">
-              <a:lnSpc>
-                <a:spcPct val="112000"/>
-              </a:lnSpc>
-              <a:buNone/>
-            </a:pPr>
-            <a:r>
-              <a:rPr lang="en-US" sz="1200" dirty="0">
-                <a:solidFill>
-                  <a:srgbClr val="E8E8EC"/>
-                </a:solidFill>
-                <a:latin typeface="Consolas" pitchFamily="34" charset="0"/>
-                <a:ea typeface="Consolas" pitchFamily="34" charset="-122"/>
-                <a:cs typeface="Consolas" pitchFamily="34" charset="-120"/>
-              </a:rPr>
-              <a:t>adb shell settings put global http_proxy 10.0.2.2:8888  # on the device</a:t>
-            </a:r>
-            <a:endParaRPr lang="en-US" sz="1200" dirty="0"/>
-          </a:p>
-        </p:txBody>
-      </p:sp>
-      <p:sp>
-        <p:nvSpPr>
-          <p:cNvPr id="8" name="Text 6"/>
-          <p:cNvSpPr/>
-          <p:nvPr/>
-        </p:nvSpPr>
-        <p:spPr>
-          <a:xfrm>
-            <a:off x="566928" y="5797296"/>
-            <a:ext cx="11057839" cy="274320"/>
+              <a:rPr lang="en-US" sz="1700" b="1" dirty="0">
+                <a:solidFill>
+                  <a:srgbClr val="B91C1C"/>
+                </a:solidFill>
+                <a:latin typeface="Segoe UI" pitchFamily="34" charset="0"/>
+                <a:ea typeface="Segoe UI" pitchFamily="34" charset="-122"/>
+                <a:cs typeface="Segoe UI" pitchFamily="34" charset="-120"/>
+              </a:rPr>
+              <a:t>~5 days</a:t>
+            </a:r>
+            <a:endParaRPr lang="en-US" sz="1700" dirty="0"/>
+          </a:p>
+        </p:txBody>
+      </p:sp>
+      <p:sp>
+        <p:nvSpPr>
+          <p:cNvPr id="9" name="Text 7"/>
+          <p:cNvSpPr/>
+          <p:nvPr/>
+        </p:nvSpPr>
+        <p:spPr>
+          <a:xfrm>
+            <a:off x="566928" y="2724912"/>
+            <a:ext cx="2560320" cy="731520"/>
           </a:xfrm>
           <a:prstGeom prst="rect">
             <a:avLst/>
@@ -2794,62 +2781,84 @@
               <a:buNone/>
             </a:pPr>
             <a:r>
-              <a:rPr lang="en-US" sz="1100" i="1" dirty="0">
-                <a:solidFill>
-                  <a:srgbClr val="71717A"/>
-                </a:solidFill>
-                <a:latin typeface="Segoe UI" pitchFamily="34" charset="0"/>
-                <a:ea typeface="Segoe UI" pitchFamily="34" charset="-122"/>
-                <a:cs typeface="Segoe UI" pitchFamily="34" charset="-120"/>
-              </a:rPr>
-              <a:t>Worth knowing before the workshop: budget setup time for any new machine.</a:t>
-            </a:r>
-            <a:endParaRPr lang="en-US" sz="1100" dirty="0"/>
-          </a:p>
-        </p:txBody>
-      </p:sp>
-    </p:spTree>
-  </p:cSld>
-  <p:clrMapOvr>
-    <a:masterClrMapping/>
-  </p:clrMapOvr>
-</p:sld>
-</file>
-
-<file path=ppt/slides/slide11.xml><?xml version="1.0" encoding="utf-8"?>
-<p:sld xmlns:a="http://schemas.openxmlformats.org/drawingml/2006/main" xmlns:r="http://schemas.openxmlformats.org/officeDocument/2006/relationships" xmlns:p="http://schemas.openxmlformats.org/presentationml/2006/main">
-  <p:cSld name="Slide 11">
-    <p:bg>
-      <p:bgPr>
-        <a:solidFill>
-          <a:srgbClr val="0B5FA5"/>
-        </a:solidFill>
-      </p:bgPr>
-    </p:bg>
-    <p:spTree>
-      <p:nvGrpSpPr>
-        <p:cNvPr id="1" name=""/>
-        <p:cNvGrpSpPr/>
-        <p:nvPr/>
-      </p:nvGrpSpPr>
-      <p:grpSpPr>
-        <a:xfrm>
-          <a:off x="0" y="0"/>
-          <a:ext cx="0" cy="0"/>
-          <a:chOff x="0" y="0"/>
-          <a:chExt cx="0" cy="0"/>
-        </a:xfrm>
-      </p:grpSpPr>
-      <p:sp>
-        <p:nvSpPr>
-          <p:cNvPr id="2" name="Text 0"/>
-          <p:cNvSpPr/>
-          <p:nvPr/>
-        </p:nvSpPr>
-        <p:spPr>
-          <a:xfrm>
-            <a:off x="566928" y="2011680"/>
-            <a:ext cx="1828800" cy="914400"/>
+              <a:rPr lang="en-US" sz="1400" b="1" dirty="0">
+                <a:solidFill>
+                  <a:srgbClr val="1A1A1E"/>
+                </a:solidFill>
+                <a:latin typeface="Segoe UI" pitchFamily="34" charset="0"/>
+                <a:ea typeface="Segoe UI" pitchFamily="34" charset="-122"/>
+                <a:cs typeface="Segoe UI" pitchFamily="34" charset="-120"/>
+              </a:rPr>
+              <a:t>With the agent</a:t>
+            </a:r>
+            <a:endParaRPr lang="en-US" sz="1400" dirty="0"/>
+          </a:p>
+        </p:txBody>
+      </p:sp>
+      <p:sp>
+        <p:nvSpPr>
+          <p:cNvPr id="10" name="Shape 8"/>
+          <p:cNvSpPr/>
+          <p:nvPr/>
+        </p:nvSpPr>
+        <p:spPr>
+          <a:xfrm>
+            <a:off x="3310128" y="2724912"/>
+            <a:ext cx="6211519" cy="731520"/>
+          </a:xfrm>
+          <a:prstGeom prst="roundRect">
+            <a:avLst>
+              <a:gd name="adj" fmla="val 6250"/>
+            </a:avLst>
+          </a:prstGeom>
+          <a:solidFill>
+            <a:srgbClr val="F1F2F4"/>
+          </a:solidFill>
+          <a:ln w="12700">
+            <a:solidFill>
+              <a:srgbClr val="F1F2F4"/>
+            </a:solidFill>
+            <a:prstDash val="solid"/>
+          </a:ln>
+        </p:spPr>
+      </p:sp>
+      <p:sp>
+        <p:nvSpPr>
+          <p:cNvPr id="11" name="Shape 9"/>
+          <p:cNvSpPr/>
+          <p:nvPr/>
+        </p:nvSpPr>
+        <p:spPr>
+          <a:xfrm>
+            <a:off x="3310128" y="2724912"/>
+            <a:ext cx="621152" cy="731520"/>
+          </a:xfrm>
+          <a:prstGeom prst="roundRect">
+            <a:avLst>
+              <a:gd name="adj" fmla="val 7361"/>
+            </a:avLst>
+          </a:prstGeom>
+          <a:solidFill>
+            <a:srgbClr val="15803D"/>
+          </a:solidFill>
+          <a:ln w="12700">
+            <a:solidFill>
+              <a:srgbClr val="15803D"/>
+            </a:solidFill>
+            <a:prstDash val="solid"/>
+          </a:ln>
+        </p:spPr>
+      </p:sp>
+      <p:sp>
+        <p:nvSpPr>
+          <p:cNvPr id="12" name="Text 10"/>
+          <p:cNvSpPr/>
+          <p:nvPr/>
+        </p:nvSpPr>
+        <p:spPr>
+          <a:xfrm>
+            <a:off x="9704527" y="2724912"/>
+            <a:ext cx="1737360" cy="731520"/>
           </a:xfrm>
           <a:prstGeom prst="rect">
             <a:avLst/>
@@ -2865,32 +2874,1297 @@
               <a:buNone/>
             </a:pPr>
             <a:r>
-              <a:rPr lang="en-US" sz="6400" b="1" dirty="0">
-                <a:solidFill>
-                  <a:srgbClr val="FFFFFF">
-                    <a:alpha val="45000"/>
-                  </a:srgbClr>
-                </a:solidFill>
-                <a:latin typeface="Segoe UI" pitchFamily="34" charset="0"/>
-                <a:ea typeface="Segoe UI" pitchFamily="34" charset="-122"/>
-                <a:cs typeface="Segoe UI" pitchFamily="34" charset="-120"/>
-              </a:rPr>
-              <a:t>03</a:t>
-            </a:r>
-            <a:endParaRPr lang="en-US" sz="6400" dirty="0"/>
-          </a:p>
-        </p:txBody>
-      </p:sp>
-      <p:sp>
-        <p:nvSpPr>
-          <p:cNvPr id="3" name="Text 1"/>
-          <p:cNvSpPr/>
-          <p:nvPr/>
-        </p:nvSpPr>
-        <p:spPr>
-          <a:xfrm>
-            <a:off x="566928" y="2926080"/>
-            <a:ext cx="11057839" cy="822960"/>
+              <a:rPr lang="en-US" sz="1700" b="1" dirty="0">
+                <a:solidFill>
+                  <a:srgbClr val="15803D"/>
+                </a:solidFill>
+                <a:latin typeface="Segoe UI" pitchFamily="34" charset="0"/>
+                <a:ea typeface="Segoe UI" pitchFamily="34" charset="-122"/>
+                <a:cs typeface="Segoe UI" pitchFamily="34" charset="-120"/>
+              </a:rPr>
+              <a:t>~4 hours</a:t>
+            </a:r>
+            <a:endParaRPr lang="en-US" sz="1700" dirty="0"/>
+          </a:p>
+        </p:txBody>
+      </p:sp>
+      <p:graphicFrame>
+        <p:nvGraphicFramePr>
+          <p:cNvPr id="12" name="Table 0"/>
+          <p:cNvGraphicFramePr>
+            <a:graphicFrameLocks noGrp="1"/>
+          </p:cNvGraphicFramePr>
+          <p:nvPr>
+            <p:extLst>
+              <p:ext uri="{D42A27DB-BD31-4B8C-83A1-F6EECF244321}">
+                <p14:modId xmlns:p14="http://schemas.microsoft.com/office/powerpoint/2010/main" val="1579011935"/>
+              </p:ext>
+            </p:extLst>
+          </p:nvPr>
+        </p:nvGraphicFramePr>
+        <p:xfrm>
+          <a:off x="566928" y="3639312"/>
+          <a:ext cx="11055096" cy="914400"/>
+        </p:xfrm>
+        <a:graphic>
+          <a:graphicData uri="http://schemas.openxmlformats.org/drawingml/2006/table">
+            <a:tbl>
+              <a:tblPr/>
+              <a:tblGrid>
+                <a:gridCol w="5760720"/>
+                <a:gridCol w="2651760"/>
+                <a:gridCol w="2642616"/>
+              </a:tblGrid>
+              <a:tr h="329184">
+                <a:tc>
+                  <a:txBody>
+                    <a:bodyPr/>
+                    <a:lstStyle/>
+                    <a:p>
+                      <a:pPr indent="0" marL="0">
+                        <a:buNone/>
+                      </a:pPr>
+                      <a:r>
+                        <a:rPr lang="en-US" sz="1250" b="1" dirty="0">
+                          <a:solidFill>
+                            <a:srgbClr val="FFFFFF"/>
+                          </a:solidFill>
+                          <a:latin typeface="Segoe UI" pitchFamily="34" charset="0"/>
+                          <a:ea typeface="Segoe UI" pitchFamily="34" charset="-122"/>
+                          <a:cs typeface="Segoe UI" pitchFamily="34" charset="-120"/>
+                        </a:rPr>
+                        <a:t>The same job, step by step</a:t>
+                      </a:r>
+                      <a:endParaRPr lang="en-US" sz="1250" dirty="0">
+                        <a:latin typeface="Segoe UI" charset="0"/>
+                        <a:ea typeface="Segoe UI" charset="0"/>
+                        <a:cs typeface="Segoe UI" charset="0"/>
+                      </a:endParaRPr>
+                    </a:p>
+                  </a:txBody>
+                  <a:tcPr marL="73152" marR="73152" marT="73152" marB="73152" anchor="ctr">
+                    <a:lnL w="6350" cap="flat" cmpd="sng" algn="ctr">
+                      <a:solidFill>
+                        <a:srgbClr val="D9D9DE"/>
+                      </a:solidFill>
+                      <a:prstDash val="solid"/>
+                      <a:round/>
+                      <a:headEnd type="none" w="med" len="med"/>
+                      <a:tailEnd type="none" w="med" len="med"/>
+                    </a:lnL>
+                    <a:lnR w="6350" cap="flat" cmpd="sng" algn="ctr">
+                      <a:solidFill>
+                        <a:srgbClr val="D9D9DE"/>
+                      </a:solidFill>
+                      <a:prstDash val="solid"/>
+                      <a:round/>
+                      <a:headEnd type="none" w="med" len="med"/>
+                      <a:tailEnd type="none" w="med" len="med"/>
+                    </a:lnR>
+                    <a:lnT w="6350" cap="flat" cmpd="sng" algn="ctr">
+                      <a:solidFill>
+                        <a:srgbClr val="D9D9DE"/>
+                      </a:solidFill>
+                      <a:prstDash val="solid"/>
+                      <a:round/>
+                      <a:headEnd type="none" w="med" len="med"/>
+                      <a:tailEnd type="none" w="med" len="med"/>
+                    </a:lnT>
+                    <a:lnB w="6350" cap="flat" cmpd="sng" algn="ctr">
+                      <a:solidFill>
+                        <a:srgbClr val="D9D9DE"/>
+                      </a:solidFill>
+                      <a:prstDash val="solid"/>
+                      <a:round/>
+                      <a:headEnd type="none" w="med" len="med"/>
+                      <a:tailEnd type="none" w="med" len="med"/>
+                    </a:lnB>
+                    <a:solidFill>
+                      <a:srgbClr val="0B5FA5"/>
+                    </a:solidFill>
+                  </a:tcPr>
+                </a:tc>
+                <a:tc>
+                  <a:txBody>
+                    <a:bodyPr/>
+                    <a:lstStyle/>
+                    <a:p>
+                      <a:pPr indent="0" marL="0">
+                        <a:buNone/>
+                      </a:pPr>
+                      <a:r>
+                        <a:rPr lang="en-US" sz="1250" b="1" dirty="0">
+                          <a:solidFill>
+                            <a:srgbClr val="FFFFFF"/>
+                          </a:solidFill>
+                          <a:latin typeface="Segoe UI" pitchFamily="34" charset="0"/>
+                          <a:ea typeface="Segoe UI" pitchFamily="34" charset="-122"/>
+                          <a:cs typeface="Segoe UI" pitchFamily="34" charset="-120"/>
+                        </a:rPr>
+                        <a:t>By hand</a:t>
+                      </a:r>
+                      <a:endParaRPr lang="en-US" sz="1250" dirty="0">
+                        <a:latin typeface="Segoe UI" charset="0"/>
+                        <a:ea typeface="Segoe UI" charset="0"/>
+                        <a:cs typeface="Segoe UI" charset="0"/>
+                      </a:endParaRPr>
+                    </a:p>
+                  </a:txBody>
+                  <a:tcPr marL="73152" marR="73152" marT="73152" marB="73152" anchor="ctr">
+                    <a:lnL w="6350" cap="flat" cmpd="sng" algn="ctr">
+                      <a:solidFill>
+                        <a:srgbClr val="D9D9DE"/>
+                      </a:solidFill>
+                      <a:prstDash val="solid"/>
+                      <a:round/>
+                      <a:headEnd type="none" w="med" len="med"/>
+                      <a:tailEnd type="none" w="med" len="med"/>
+                    </a:lnL>
+                    <a:lnR w="6350" cap="flat" cmpd="sng" algn="ctr">
+                      <a:solidFill>
+                        <a:srgbClr val="D9D9DE"/>
+                      </a:solidFill>
+                      <a:prstDash val="solid"/>
+                      <a:round/>
+                      <a:headEnd type="none" w="med" len="med"/>
+                      <a:tailEnd type="none" w="med" len="med"/>
+                    </a:lnR>
+                    <a:lnT w="6350" cap="flat" cmpd="sng" algn="ctr">
+                      <a:solidFill>
+                        <a:srgbClr val="D9D9DE"/>
+                      </a:solidFill>
+                      <a:prstDash val="solid"/>
+                      <a:round/>
+                      <a:headEnd type="none" w="med" len="med"/>
+                      <a:tailEnd type="none" w="med" len="med"/>
+                    </a:lnT>
+                    <a:lnB w="6350" cap="flat" cmpd="sng" algn="ctr">
+                      <a:solidFill>
+                        <a:srgbClr val="D9D9DE"/>
+                      </a:solidFill>
+                      <a:prstDash val="solid"/>
+                      <a:round/>
+                      <a:headEnd type="none" w="med" len="med"/>
+                      <a:tailEnd type="none" w="med" len="med"/>
+                    </a:lnB>
+                    <a:solidFill>
+                      <a:srgbClr val="0B5FA5"/>
+                    </a:solidFill>
+                  </a:tcPr>
+                </a:tc>
+                <a:tc>
+                  <a:txBody>
+                    <a:bodyPr/>
+                    <a:lstStyle/>
+                    <a:p>
+                      <a:pPr indent="0" marL="0">
+                        <a:buNone/>
+                      </a:pPr>
+                      <a:r>
+                        <a:rPr lang="en-US" sz="1250" b="1" dirty="0">
+                          <a:solidFill>
+                            <a:srgbClr val="FFFFFF"/>
+                          </a:solidFill>
+                          <a:latin typeface="Segoe UI" pitchFamily="34" charset="0"/>
+                          <a:ea typeface="Segoe UI" pitchFamily="34" charset="-122"/>
+                          <a:cs typeface="Segoe UI" pitchFamily="34" charset="-120"/>
+                        </a:rPr>
+                        <a:t>With the agent</a:t>
+                      </a:r>
+                      <a:endParaRPr lang="en-US" sz="1250" dirty="0">
+                        <a:latin typeface="Segoe UI" charset="0"/>
+                        <a:ea typeface="Segoe UI" charset="0"/>
+                        <a:cs typeface="Segoe UI" charset="0"/>
+                      </a:endParaRPr>
+                    </a:p>
+                  </a:txBody>
+                  <a:tcPr marL="73152" marR="73152" marT="73152" marB="73152" anchor="ctr">
+                    <a:lnL w="6350" cap="flat" cmpd="sng" algn="ctr">
+                      <a:solidFill>
+                        <a:srgbClr val="D9D9DE"/>
+                      </a:solidFill>
+                      <a:prstDash val="solid"/>
+                      <a:round/>
+                      <a:headEnd type="none" w="med" len="med"/>
+                      <a:tailEnd type="none" w="med" len="med"/>
+                    </a:lnL>
+                    <a:lnR w="6350" cap="flat" cmpd="sng" algn="ctr">
+                      <a:solidFill>
+                        <a:srgbClr val="D9D9DE"/>
+                      </a:solidFill>
+                      <a:prstDash val="solid"/>
+                      <a:round/>
+                      <a:headEnd type="none" w="med" len="med"/>
+                      <a:tailEnd type="none" w="med" len="med"/>
+                    </a:lnR>
+                    <a:lnT w="6350" cap="flat" cmpd="sng" algn="ctr">
+                      <a:solidFill>
+                        <a:srgbClr val="D9D9DE"/>
+                      </a:solidFill>
+                      <a:prstDash val="solid"/>
+                      <a:round/>
+                      <a:headEnd type="none" w="med" len="med"/>
+                      <a:tailEnd type="none" w="med" len="med"/>
+                    </a:lnT>
+                    <a:lnB w="6350" cap="flat" cmpd="sng" algn="ctr">
+                      <a:solidFill>
+                        <a:srgbClr val="D9D9DE"/>
+                      </a:solidFill>
+                      <a:prstDash val="solid"/>
+                      <a:round/>
+                      <a:headEnd type="none" w="med" len="med"/>
+                      <a:tailEnd type="none" w="med" len="med"/>
+                    </a:lnB>
+                    <a:solidFill>
+                      <a:srgbClr val="0B5FA5"/>
+                    </a:solidFill>
+                  </a:tcPr>
+                </a:tc>
+              </a:tr>
+              <a:tr h="329184">
+                <a:tc>
+                  <a:txBody>
+                    <a:bodyPr/>
+                    <a:lstStyle/>
+                    <a:p>
+                      <a:pPr indent="0" marL="0">
+                        <a:buNone/>
+                      </a:pPr>
+                      <a:r>
+                        <a:rPr lang="en-US" sz="1250" dirty="0">
+                          <a:solidFill>
+                            <a:srgbClr val="1A1A1E"/>
+                          </a:solidFill>
+                          <a:latin typeface="Segoe UI" pitchFamily="34" charset="0"/>
+                          <a:ea typeface="Segoe UI" pitchFamily="34" charset="-122"/>
+                          <a:cs typeface="Segoe UI" pitchFamily="34" charset="-120"/>
+                        </a:rPr>
+                        <a:t>Get the tooling driving the app at all</a:t>
+                      </a:r>
+                      <a:endParaRPr lang="en-US" sz="1250" dirty="0">
+                        <a:latin typeface="Segoe UI" charset="0"/>
+                        <a:ea typeface="Segoe UI" charset="0"/>
+                        <a:cs typeface="Segoe UI" charset="0"/>
+                      </a:endParaRPr>
+                    </a:p>
+                  </a:txBody>
+                  <a:tcPr marL="73152" marR="73152" marT="73152" marB="73152" anchor="ctr">
+                    <a:lnL w="6350" cap="flat" cmpd="sng" algn="ctr">
+                      <a:solidFill>
+                        <a:srgbClr val="D9D9DE"/>
+                      </a:solidFill>
+                      <a:prstDash val="solid"/>
+                      <a:round/>
+                      <a:headEnd type="none" w="med" len="med"/>
+                      <a:tailEnd type="none" w="med" len="med"/>
+                    </a:lnL>
+                    <a:lnR w="6350" cap="flat" cmpd="sng" algn="ctr">
+                      <a:solidFill>
+                        <a:srgbClr val="D9D9DE"/>
+                      </a:solidFill>
+                      <a:prstDash val="solid"/>
+                      <a:round/>
+                      <a:headEnd type="none" w="med" len="med"/>
+                      <a:tailEnd type="none" w="med" len="med"/>
+                    </a:lnR>
+                    <a:lnT w="6350" cap="flat" cmpd="sng" algn="ctr">
+                      <a:solidFill>
+                        <a:srgbClr val="D9D9DE"/>
+                      </a:solidFill>
+                      <a:prstDash val="solid"/>
+                      <a:round/>
+                      <a:headEnd type="none" w="med" len="med"/>
+                      <a:tailEnd type="none" w="med" len="med"/>
+                    </a:lnT>
+                    <a:lnB w="6350" cap="flat" cmpd="sng" algn="ctr">
+                      <a:solidFill>
+                        <a:srgbClr val="D9D9DE"/>
+                      </a:solidFill>
+                      <a:prstDash val="solid"/>
+                      <a:round/>
+                      <a:headEnd type="none" w="med" len="med"/>
+                      <a:tailEnd type="none" w="med" len="med"/>
+                    </a:lnB>
+                    <a:solidFill>
+                      <a:srgbClr val="FFFFFF"/>
+                    </a:solidFill>
+                  </a:tcPr>
+                </a:tc>
+                <a:tc>
+                  <a:txBody>
+                    <a:bodyPr/>
+                    <a:lstStyle/>
+                    <a:p>
+                      <a:pPr indent="0" marL="0">
+                        <a:buNone/>
+                      </a:pPr>
+                      <a:r>
+                        <a:rPr lang="en-US" sz="1250" dirty="0">
+                          <a:solidFill>
+                            <a:srgbClr val="1A1A1E"/>
+                          </a:solidFill>
+                          <a:latin typeface="Segoe UI" pitchFamily="34" charset="0"/>
+                          <a:ea typeface="Segoe UI" pitchFamily="34" charset="-122"/>
+                          <a:cs typeface="Segoe UI" pitchFamily="34" charset="-120"/>
+                        </a:rPr>
+                        <a:t>~1 day</a:t>
+                      </a:r>
+                      <a:endParaRPr lang="en-US" sz="1250" dirty="0">
+                        <a:latin typeface="Segoe UI" charset="0"/>
+                        <a:ea typeface="Segoe UI" charset="0"/>
+                        <a:cs typeface="Segoe UI" charset="0"/>
+                      </a:endParaRPr>
+                    </a:p>
+                  </a:txBody>
+                  <a:tcPr marL="73152" marR="73152" marT="73152" marB="73152" anchor="ctr">
+                    <a:lnL w="6350" cap="flat" cmpd="sng" algn="ctr">
+                      <a:solidFill>
+                        <a:srgbClr val="D9D9DE"/>
+                      </a:solidFill>
+                      <a:prstDash val="solid"/>
+                      <a:round/>
+                      <a:headEnd type="none" w="med" len="med"/>
+                      <a:tailEnd type="none" w="med" len="med"/>
+                    </a:lnL>
+                    <a:lnR w="6350" cap="flat" cmpd="sng" algn="ctr">
+                      <a:solidFill>
+                        <a:srgbClr val="D9D9DE"/>
+                      </a:solidFill>
+                      <a:prstDash val="solid"/>
+                      <a:round/>
+                      <a:headEnd type="none" w="med" len="med"/>
+                      <a:tailEnd type="none" w="med" len="med"/>
+                    </a:lnR>
+                    <a:lnT w="6350" cap="flat" cmpd="sng" algn="ctr">
+                      <a:solidFill>
+                        <a:srgbClr val="D9D9DE"/>
+                      </a:solidFill>
+                      <a:prstDash val="solid"/>
+                      <a:round/>
+                      <a:headEnd type="none" w="med" len="med"/>
+                      <a:tailEnd type="none" w="med" len="med"/>
+                    </a:lnT>
+                    <a:lnB w="6350" cap="flat" cmpd="sng" algn="ctr">
+                      <a:solidFill>
+                        <a:srgbClr val="D9D9DE"/>
+                      </a:solidFill>
+                      <a:prstDash val="solid"/>
+                      <a:round/>
+                      <a:headEnd type="none" w="med" len="med"/>
+                      <a:tailEnd type="none" w="med" len="med"/>
+                    </a:lnB>
+                    <a:solidFill>
+                      <a:srgbClr val="FFFFFF"/>
+                    </a:solidFill>
+                  </a:tcPr>
+                </a:tc>
+                <a:tc>
+                  <a:txBody>
+                    <a:bodyPr/>
+                    <a:lstStyle/>
+                    <a:p>
+                      <a:pPr indent="0" marL="0">
+                        <a:buNone/>
+                      </a:pPr>
+                      <a:r>
+                        <a:rPr lang="en-US" sz="1250" dirty="0">
+                          <a:solidFill>
+                            <a:srgbClr val="1A1A1E"/>
+                          </a:solidFill>
+                          <a:latin typeface="Segoe UI" pitchFamily="34" charset="0"/>
+                          <a:ea typeface="Segoe UI" pitchFamily="34" charset="-122"/>
+                          <a:cs typeface="Segoe UI" pitchFamily="34" charset="-120"/>
+                        </a:rPr>
+                        <a:t>~30 min</a:t>
+                      </a:r>
+                      <a:endParaRPr lang="en-US" sz="1250" dirty="0">
+                        <a:latin typeface="Segoe UI" charset="0"/>
+                        <a:ea typeface="Segoe UI" charset="0"/>
+                        <a:cs typeface="Segoe UI" charset="0"/>
+                      </a:endParaRPr>
+                    </a:p>
+                  </a:txBody>
+                  <a:tcPr marL="73152" marR="73152" marT="73152" marB="73152" anchor="ctr">
+                    <a:lnL w="6350" cap="flat" cmpd="sng" algn="ctr">
+                      <a:solidFill>
+                        <a:srgbClr val="D9D9DE"/>
+                      </a:solidFill>
+                      <a:prstDash val="solid"/>
+                      <a:round/>
+                      <a:headEnd type="none" w="med" len="med"/>
+                      <a:tailEnd type="none" w="med" len="med"/>
+                    </a:lnL>
+                    <a:lnR w="6350" cap="flat" cmpd="sng" algn="ctr">
+                      <a:solidFill>
+                        <a:srgbClr val="D9D9DE"/>
+                      </a:solidFill>
+                      <a:prstDash val="solid"/>
+                      <a:round/>
+                      <a:headEnd type="none" w="med" len="med"/>
+                      <a:tailEnd type="none" w="med" len="med"/>
+                    </a:lnR>
+                    <a:lnT w="6350" cap="flat" cmpd="sng" algn="ctr">
+                      <a:solidFill>
+                        <a:srgbClr val="D9D9DE"/>
+                      </a:solidFill>
+                      <a:prstDash val="solid"/>
+                      <a:round/>
+                      <a:headEnd type="none" w="med" len="med"/>
+                      <a:tailEnd type="none" w="med" len="med"/>
+                    </a:lnT>
+                    <a:lnB w="6350" cap="flat" cmpd="sng" algn="ctr">
+                      <a:solidFill>
+                        <a:srgbClr val="D9D9DE"/>
+                      </a:solidFill>
+                      <a:prstDash val="solid"/>
+                      <a:round/>
+                      <a:headEnd type="none" w="med" len="med"/>
+                      <a:tailEnd type="none" w="med" len="med"/>
+                    </a:lnB>
+                    <a:solidFill>
+                      <a:srgbClr val="FFFFFF"/>
+                    </a:solidFill>
+                  </a:tcPr>
+                </a:tc>
+              </a:tr>
+              <a:tr h="329184">
+                <a:tc>
+                  <a:txBody>
+                    <a:bodyPr/>
+                    <a:lstStyle/>
+                    <a:p>
+                      <a:pPr indent="0" marL="0">
+                        <a:buNone/>
+                      </a:pPr>
+                      <a:r>
+                        <a:rPr lang="en-US" sz="1250" dirty="0">
+                          <a:solidFill>
+                            <a:srgbClr val="1A1A1E"/>
+                          </a:solidFill>
+                          <a:latin typeface="Segoe UI" pitchFamily="34" charset="0"/>
+                          <a:ea typeface="Segoe UI" pitchFamily="34" charset="-122"/>
+                          <a:cs typeface="Segoe UI" pitchFamily="34" charset="-120"/>
+                        </a:rPr>
+                        <a:t>Work out how to identify each field</a:t>
+                      </a:r>
+                      <a:endParaRPr lang="en-US" sz="1250" dirty="0">
+                        <a:latin typeface="Segoe UI" charset="0"/>
+                        <a:ea typeface="Segoe UI" charset="0"/>
+                        <a:cs typeface="Segoe UI" charset="0"/>
+                      </a:endParaRPr>
+                    </a:p>
+                  </a:txBody>
+                  <a:tcPr marL="73152" marR="73152" marT="73152" marB="73152" anchor="ctr">
+                    <a:lnL w="6350" cap="flat" cmpd="sng" algn="ctr">
+                      <a:solidFill>
+                        <a:srgbClr val="D9D9DE"/>
+                      </a:solidFill>
+                      <a:prstDash val="solid"/>
+                      <a:round/>
+                      <a:headEnd type="none" w="med" len="med"/>
+                      <a:tailEnd type="none" w="med" len="med"/>
+                    </a:lnL>
+                    <a:lnR w="6350" cap="flat" cmpd="sng" algn="ctr">
+                      <a:solidFill>
+                        <a:srgbClr val="D9D9DE"/>
+                      </a:solidFill>
+                      <a:prstDash val="solid"/>
+                      <a:round/>
+                      <a:headEnd type="none" w="med" len="med"/>
+                      <a:tailEnd type="none" w="med" len="med"/>
+                    </a:lnR>
+                    <a:lnT w="6350" cap="flat" cmpd="sng" algn="ctr">
+                      <a:solidFill>
+                        <a:srgbClr val="D9D9DE"/>
+                      </a:solidFill>
+                      <a:prstDash val="solid"/>
+                      <a:round/>
+                      <a:headEnd type="none" w="med" len="med"/>
+                      <a:tailEnd type="none" w="med" len="med"/>
+                    </a:lnT>
+                    <a:lnB w="6350" cap="flat" cmpd="sng" algn="ctr">
+                      <a:solidFill>
+                        <a:srgbClr val="D9D9DE"/>
+                      </a:solidFill>
+                      <a:prstDash val="solid"/>
+                      <a:round/>
+                      <a:headEnd type="none" w="med" len="med"/>
+                      <a:tailEnd type="none" w="med" len="med"/>
+                    </a:lnB>
+                    <a:solidFill>
+                      <a:srgbClr val="F6F7F9"/>
+                    </a:solidFill>
+                  </a:tcPr>
+                </a:tc>
+                <a:tc>
+                  <a:txBody>
+                    <a:bodyPr/>
+                    <a:lstStyle/>
+                    <a:p>
+                      <a:pPr indent="0" marL="0">
+                        <a:buNone/>
+                      </a:pPr>
+                      <a:r>
+                        <a:rPr lang="en-US" sz="1250" dirty="0">
+                          <a:solidFill>
+                            <a:srgbClr val="1A1A1E"/>
+                          </a:solidFill>
+                          <a:latin typeface="Segoe UI" pitchFamily="34" charset="0"/>
+                          <a:ea typeface="Segoe UI" pitchFamily="34" charset="-122"/>
+                          <a:cs typeface="Segoe UI" pitchFamily="34" charset="-120"/>
+                        </a:rPr>
+                        <a:t>~1 day</a:t>
+                      </a:r>
+                      <a:endParaRPr lang="en-US" sz="1250" dirty="0">
+                        <a:latin typeface="Segoe UI" charset="0"/>
+                        <a:ea typeface="Segoe UI" charset="0"/>
+                        <a:cs typeface="Segoe UI" charset="0"/>
+                      </a:endParaRPr>
+                    </a:p>
+                  </a:txBody>
+                  <a:tcPr marL="73152" marR="73152" marT="73152" marB="73152" anchor="ctr">
+                    <a:lnL w="6350" cap="flat" cmpd="sng" algn="ctr">
+                      <a:solidFill>
+                        <a:srgbClr val="D9D9DE"/>
+                      </a:solidFill>
+                      <a:prstDash val="solid"/>
+                      <a:round/>
+                      <a:headEnd type="none" w="med" len="med"/>
+                      <a:tailEnd type="none" w="med" len="med"/>
+                    </a:lnL>
+                    <a:lnR w="6350" cap="flat" cmpd="sng" algn="ctr">
+                      <a:solidFill>
+                        <a:srgbClr val="D9D9DE"/>
+                      </a:solidFill>
+                      <a:prstDash val="solid"/>
+                      <a:round/>
+                      <a:headEnd type="none" w="med" len="med"/>
+                      <a:tailEnd type="none" w="med" len="med"/>
+                    </a:lnR>
+                    <a:lnT w="6350" cap="flat" cmpd="sng" algn="ctr">
+                      <a:solidFill>
+                        <a:srgbClr val="D9D9DE"/>
+                      </a:solidFill>
+                      <a:prstDash val="solid"/>
+                      <a:round/>
+                      <a:headEnd type="none" w="med" len="med"/>
+                      <a:tailEnd type="none" w="med" len="med"/>
+                    </a:lnT>
+                    <a:lnB w="6350" cap="flat" cmpd="sng" algn="ctr">
+                      <a:solidFill>
+                        <a:srgbClr val="D9D9DE"/>
+                      </a:solidFill>
+                      <a:prstDash val="solid"/>
+                      <a:round/>
+                      <a:headEnd type="none" w="med" len="med"/>
+                      <a:tailEnd type="none" w="med" len="med"/>
+                    </a:lnB>
+                    <a:solidFill>
+                      <a:srgbClr val="F6F7F9"/>
+                    </a:solidFill>
+                  </a:tcPr>
+                </a:tc>
+                <a:tc>
+                  <a:txBody>
+                    <a:bodyPr/>
+                    <a:lstStyle/>
+                    <a:p>
+                      <a:pPr indent="0" marL="0">
+                        <a:buNone/>
+                      </a:pPr>
+                      <a:r>
+                        <a:rPr lang="en-US" sz="1250" dirty="0">
+                          <a:solidFill>
+                            <a:srgbClr val="1A1A1E"/>
+                          </a:solidFill>
+                          <a:latin typeface="Segoe UI" pitchFamily="34" charset="0"/>
+                          <a:ea typeface="Segoe UI" pitchFamily="34" charset="-122"/>
+                          <a:cs typeface="Segoe UI" pitchFamily="34" charset="-120"/>
+                        </a:rPr>
+                        <a:t>minutes - it read the app</a:t>
+                      </a:r>
+                      <a:endParaRPr lang="en-US" sz="1250" dirty="0">
+                        <a:latin typeface="Segoe UI" charset="0"/>
+                        <a:ea typeface="Segoe UI" charset="0"/>
+                        <a:cs typeface="Segoe UI" charset="0"/>
+                      </a:endParaRPr>
+                    </a:p>
+                  </a:txBody>
+                  <a:tcPr marL="73152" marR="73152" marT="73152" marB="73152" anchor="ctr">
+                    <a:lnL w="6350" cap="flat" cmpd="sng" algn="ctr">
+                      <a:solidFill>
+                        <a:srgbClr val="D9D9DE"/>
+                      </a:solidFill>
+                      <a:prstDash val="solid"/>
+                      <a:round/>
+                      <a:headEnd type="none" w="med" len="med"/>
+                      <a:tailEnd type="none" w="med" len="med"/>
+                    </a:lnL>
+                    <a:lnR w="6350" cap="flat" cmpd="sng" algn="ctr">
+                      <a:solidFill>
+                        <a:srgbClr val="D9D9DE"/>
+                      </a:solidFill>
+                      <a:prstDash val="solid"/>
+                      <a:round/>
+                      <a:headEnd type="none" w="med" len="med"/>
+                      <a:tailEnd type="none" w="med" len="med"/>
+                    </a:lnR>
+                    <a:lnT w="6350" cap="flat" cmpd="sng" algn="ctr">
+                      <a:solidFill>
+                        <a:srgbClr val="D9D9DE"/>
+                      </a:solidFill>
+                      <a:prstDash val="solid"/>
+                      <a:round/>
+                      <a:headEnd type="none" w="med" len="med"/>
+                      <a:tailEnd type="none" w="med" len="med"/>
+                    </a:lnT>
+                    <a:lnB w="6350" cap="flat" cmpd="sng" algn="ctr">
+                      <a:solidFill>
+                        <a:srgbClr val="D9D9DE"/>
+                      </a:solidFill>
+                      <a:prstDash val="solid"/>
+                      <a:round/>
+                      <a:headEnd type="none" w="med" len="med"/>
+                      <a:tailEnd type="none" w="med" len="med"/>
+                    </a:lnB>
+                    <a:solidFill>
+                      <a:srgbClr val="F6F7F9"/>
+                    </a:solidFill>
+                  </a:tcPr>
+                </a:tc>
+              </a:tr>
+              <a:tr h="329184">
+                <a:tc>
+                  <a:txBody>
+                    <a:bodyPr/>
+                    <a:lstStyle/>
+                    <a:p>
+                      <a:pPr indent="0" marL="0">
+                        <a:buNone/>
+                      </a:pPr>
+                      <a:r>
+                        <a:rPr lang="en-US" sz="1250" dirty="0">
+                          <a:solidFill>
+                            <a:srgbClr val="1A1A1E"/>
+                          </a:solidFill>
+                          <a:latin typeface="Segoe UI" pitchFamily="34" charset="0"/>
+                          <a:ea typeface="Segoe UI" pitchFamily="34" charset="-122"/>
+                          <a:cs typeface="Segoe UI" pitchFamily="34" charset="-120"/>
+                        </a:rPr>
+                        <a:t>Make the OTP login automatable</a:t>
+                      </a:r>
+                      <a:endParaRPr lang="en-US" sz="1250" dirty="0">
+                        <a:latin typeface="Segoe UI" charset="0"/>
+                        <a:ea typeface="Segoe UI" charset="0"/>
+                        <a:cs typeface="Segoe UI" charset="0"/>
+                      </a:endParaRPr>
+                    </a:p>
+                  </a:txBody>
+                  <a:tcPr marL="73152" marR="73152" marT="73152" marB="73152" anchor="ctr">
+                    <a:lnL w="6350" cap="flat" cmpd="sng" algn="ctr">
+                      <a:solidFill>
+                        <a:srgbClr val="D9D9DE"/>
+                      </a:solidFill>
+                      <a:prstDash val="solid"/>
+                      <a:round/>
+                      <a:headEnd type="none" w="med" len="med"/>
+                      <a:tailEnd type="none" w="med" len="med"/>
+                    </a:lnL>
+                    <a:lnR w="6350" cap="flat" cmpd="sng" algn="ctr">
+                      <a:solidFill>
+                        <a:srgbClr val="D9D9DE"/>
+                      </a:solidFill>
+                      <a:prstDash val="solid"/>
+                      <a:round/>
+                      <a:headEnd type="none" w="med" len="med"/>
+                      <a:tailEnd type="none" w="med" len="med"/>
+                    </a:lnR>
+                    <a:lnT w="6350" cap="flat" cmpd="sng" algn="ctr">
+                      <a:solidFill>
+                        <a:srgbClr val="D9D9DE"/>
+                      </a:solidFill>
+                      <a:prstDash val="solid"/>
+                      <a:round/>
+                      <a:headEnd type="none" w="med" len="med"/>
+                      <a:tailEnd type="none" w="med" len="med"/>
+                    </a:lnT>
+                    <a:lnB w="6350" cap="flat" cmpd="sng" algn="ctr">
+                      <a:solidFill>
+                        <a:srgbClr val="D9D9DE"/>
+                      </a:solidFill>
+                      <a:prstDash val="solid"/>
+                      <a:round/>
+                      <a:headEnd type="none" w="med" len="med"/>
+                      <a:tailEnd type="none" w="med" len="med"/>
+                    </a:lnB>
+                    <a:solidFill>
+                      <a:srgbClr val="FFFFFF"/>
+                    </a:solidFill>
+                  </a:tcPr>
+                </a:tc>
+                <a:tc>
+                  <a:txBody>
+                    <a:bodyPr/>
+                    <a:lstStyle/>
+                    <a:p>
+                      <a:pPr indent="0" marL="0">
+                        <a:buNone/>
+                      </a:pPr>
+                      <a:r>
+                        <a:rPr lang="en-US" sz="1250" dirty="0">
+                          <a:solidFill>
+                            <a:srgbClr val="1A1A1E"/>
+                          </a:solidFill>
+                          <a:latin typeface="Segoe UI" pitchFamily="34" charset="0"/>
+                          <a:ea typeface="Segoe UI" pitchFamily="34" charset="-122"/>
+                          <a:cs typeface="Segoe UI" pitchFamily="34" charset="-120"/>
+                        </a:rPr>
+                        <a:t>~2 days</a:t>
+                      </a:r>
+                      <a:endParaRPr lang="en-US" sz="1250" dirty="0">
+                        <a:latin typeface="Segoe UI" charset="0"/>
+                        <a:ea typeface="Segoe UI" charset="0"/>
+                        <a:cs typeface="Segoe UI" charset="0"/>
+                      </a:endParaRPr>
+                    </a:p>
+                  </a:txBody>
+                  <a:tcPr marL="73152" marR="73152" marT="73152" marB="73152" anchor="ctr">
+                    <a:lnL w="6350" cap="flat" cmpd="sng" algn="ctr">
+                      <a:solidFill>
+                        <a:srgbClr val="D9D9DE"/>
+                      </a:solidFill>
+                      <a:prstDash val="solid"/>
+                      <a:round/>
+                      <a:headEnd type="none" w="med" len="med"/>
+                      <a:tailEnd type="none" w="med" len="med"/>
+                    </a:lnL>
+                    <a:lnR w="6350" cap="flat" cmpd="sng" algn="ctr">
+                      <a:solidFill>
+                        <a:srgbClr val="D9D9DE"/>
+                      </a:solidFill>
+                      <a:prstDash val="solid"/>
+                      <a:round/>
+                      <a:headEnd type="none" w="med" len="med"/>
+                      <a:tailEnd type="none" w="med" len="med"/>
+                    </a:lnR>
+                    <a:lnT w="6350" cap="flat" cmpd="sng" algn="ctr">
+                      <a:solidFill>
+                        <a:srgbClr val="D9D9DE"/>
+                      </a:solidFill>
+                      <a:prstDash val="solid"/>
+                      <a:round/>
+                      <a:headEnd type="none" w="med" len="med"/>
+                      <a:tailEnd type="none" w="med" len="med"/>
+                    </a:lnT>
+                    <a:lnB w="6350" cap="flat" cmpd="sng" algn="ctr">
+                      <a:solidFill>
+                        <a:srgbClr val="D9D9DE"/>
+                      </a:solidFill>
+                      <a:prstDash val="solid"/>
+                      <a:round/>
+                      <a:headEnd type="none" w="med" len="med"/>
+                      <a:tailEnd type="none" w="med" len="med"/>
+                    </a:lnB>
+                    <a:solidFill>
+                      <a:srgbClr val="FFFFFF"/>
+                    </a:solidFill>
+                  </a:tcPr>
+                </a:tc>
+                <a:tc>
+                  <a:txBody>
+                    <a:bodyPr/>
+                    <a:lstStyle/>
+                    <a:p>
+                      <a:pPr indent="0" marL="0">
+                        <a:buNone/>
+                      </a:pPr>
+                      <a:r>
+                        <a:rPr lang="en-US" sz="1250" dirty="0">
+                          <a:solidFill>
+                            <a:srgbClr val="1A1A1E"/>
+                          </a:solidFill>
+                          <a:latin typeface="Segoe UI" pitchFamily="34" charset="0"/>
+                          <a:ea typeface="Segoe UI" pitchFamily="34" charset="-122"/>
+                          <a:cs typeface="Segoe UI" pitchFamily="34" charset="-120"/>
+                        </a:rPr>
+                        <a:t>~1 hour</a:t>
+                      </a:r>
+                      <a:endParaRPr lang="en-US" sz="1250" dirty="0">
+                        <a:latin typeface="Segoe UI" charset="0"/>
+                        <a:ea typeface="Segoe UI" charset="0"/>
+                        <a:cs typeface="Segoe UI" charset="0"/>
+                      </a:endParaRPr>
+                    </a:p>
+                  </a:txBody>
+                  <a:tcPr marL="73152" marR="73152" marT="73152" marB="73152" anchor="ctr">
+                    <a:lnL w="6350" cap="flat" cmpd="sng" algn="ctr">
+                      <a:solidFill>
+                        <a:srgbClr val="D9D9DE"/>
+                      </a:solidFill>
+                      <a:prstDash val="solid"/>
+                      <a:round/>
+                      <a:headEnd type="none" w="med" len="med"/>
+                      <a:tailEnd type="none" w="med" len="med"/>
+                    </a:lnL>
+                    <a:lnR w="6350" cap="flat" cmpd="sng" algn="ctr">
+                      <a:solidFill>
+                        <a:srgbClr val="D9D9DE"/>
+                      </a:solidFill>
+                      <a:prstDash val="solid"/>
+                      <a:round/>
+                      <a:headEnd type="none" w="med" len="med"/>
+                      <a:tailEnd type="none" w="med" len="med"/>
+                    </a:lnR>
+                    <a:lnT w="6350" cap="flat" cmpd="sng" algn="ctr">
+                      <a:solidFill>
+                        <a:srgbClr val="D9D9DE"/>
+                      </a:solidFill>
+                      <a:prstDash val="solid"/>
+                      <a:round/>
+                      <a:headEnd type="none" w="med" len="med"/>
+                      <a:tailEnd type="none" w="med" len="med"/>
+                    </a:lnT>
+                    <a:lnB w="6350" cap="flat" cmpd="sng" algn="ctr">
+                      <a:solidFill>
+                        <a:srgbClr val="D9D9DE"/>
+                      </a:solidFill>
+                      <a:prstDash val="solid"/>
+                      <a:round/>
+                      <a:headEnd type="none" w="med" len="med"/>
+                      <a:tailEnd type="none" w="med" len="med"/>
+                    </a:lnB>
+                    <a:solidFill>
+                      <a:srgbClr val="FFFFFF"/>
+                    </a:solidFill>
+                  </a:tcPr>
+                </a:tc>
+              </a:tr>
+              <a:tr h="329184">
+                <a:tc>
+                  <a:txBody>
+                    <a:bodyPr/>
+                    <a:lstStyle/>
+                    <a:p>
+                      <a:pPr indent="0" marL="0">
+                        <a:buNone/>
+                      </a:pPr>
+                      <a:r>
+                        <a:rPr lang="en-US" sz="1250" dirty="0">
+                          <a:solidFill>
+                            <a:srgbClr val="1A1A1E"/>
+                          </a:solidFill>
+                          <a:latin typeface="Segoe UI" pitchFamily="34" charset="0"/>
+                          <a:ea typeface="Segoe UI" pitchFamily="34" charset="-122"/>
+                          <a:cs typeface="Segoe UI" pitchFamily="34" charset="-120"/>
+                        </a:rPr>
+                        <a:t>Get the emulator onto the network</a:t>
+                      </a:r>
+                      <a:endParaRPr lang="en-US" sz="1250" dirty="0">
+                        <a:latin typeface="Segoe UI" charset="0"/>
+                        <a:ea typeface="Segoe UI" charset="0"/>
+                        <a:cs typeface="Segoe UI" charset="0"/>
+                      </a:endParaRPr>
+                    </a:p>
+                  </a:txBody>
+                  <a:tcPr marL="73152" marR="73152" marT="73152" marB="73152" anchor="ctr">
+                    <a:lnL w="6350" cap="flat" cmpd="sng" algn="ctr">
+                      <a:solidFill>
+                        <a:srgbClr val="D9D9DE"/>
+                      </a:solidFill>
+                      <a:prstDash val="solid"/>
+                      <a:round/>
+                      <a:headEnd type="none" w="med" len="med"/>
+                      <a:tailEnd type="none" w="med" len="med"/>
+                    </a:lnL>
+                    <a:lnR w="6350" cap="flat" cmpd="sng" algn="ctr">
+                      <a:solidFill>
+                        <a:srgbClr val="D9D9DE"/>
+                      </a:solidFill>
+                      <a:prstDash val="solid"/>
+                      <a:round/>
+                      <a:headEnd type="none" w="med" len="med"/>
+                      <a:tailEnd type="none" w="med" len="med"/>
+                    </a:lnR>
+                    <a:lnT w="6350" cap="flat" cmpd="sng" algn="ctr">
+                      <a:solidFill>
+                        <a:srgbClr val="D9D9DE"/>
+                      </a:solidFill>
+                      <a:prstDash val="solid"/>
+                      <a:round/>
+                      <a:headEnd type="none" w="med" len="med"/>
+                      <a:tailEnd type="none" w="med" len="med"/>
+                    </a:lnT>
+                    <a:lnB w="6350" cap="flat" cmpd="sng" algn="ctr">
+                      <a:solidFill>
+                        <a:srgbClr val="D9D9DE"/>
+                      </a:solidFill>
+                      <a:prstDash val="solid"/>
+                      <a:round/>
+                      <a:headEnd type="none" w="med" len="med"/>
+                      <a:tailEnd type="none" w="med" len="med"/>
+                    </a:lnB>
+                    <a:solidFill>
+                      <a:srgbClr val="F6F7F9"/>
+                    </a:solidFill>
+                  </a:tcPr>
+                </a:tc>
+                <a:tc>
+                  <a:txBody>
+                    <a:bodyPr/>
+                    <a:lstStyle/>
+                    <a:p>
+                      <a:pPr indent="0" marL="0">
+                        <a:buNone/>
+                      </a:pPr>
+                      <a:r>
+                        <a:rPr lang="en-US" sz="1250" dirty="0">
+                          <a:solidFill>
+                            <a:srgbClr val="1A1A1E"/>
+                          </a:solidFill>
+                          <a:latin typeface="Segoe UI" pitchFamily="34" charset="0"/>
+                          <a:ea typeface="Segoe UI" pitchFamily="34" charset="-122"/>
+                          <a:cs typeface="Segoe UI" pitchFamily="34" charset="-120"/>
+                        </a:rPr>
+                        <a:t>~1 day</a:t>
+                      </a:r>
+                      <a:endParaRPr lang="en-US" sz="1250" dirty="0">
+                        <a:latin typeface="Segoe UI" charset="0"/>
+                        <a:ea typeface="Segoe UI" charset="0"/>
+                        <a:cs typeface="Segoe UI" charset="0"/>
+                      </a:endParaRPr>
+                    </a:p>
+                  </a:txBody>
+                  <a:tcPr marL="73152" marR="73152" marT="73152" marB="73152" anchor="ctr">
+                    <a:lnL w="6350" cap="flat" cmpd="sng" algn="ctr">
+                      <a:solidFill>
+                        <a:srgbClr val="D9D9DE"/>
+                      </a:solidFill>
+                      <a:prstDash val="solid"/>
+                      <a:round/>
+                      <a:headEnd type="none" w="med" len="med"/>
+                      <a:tailEnd type="none" w="med" len="med"/>
+                    </a:lnL>
+                    <a:lnR w="6350" cap="flat" cmpd="sng" algn="ctr">
+                      <a:solidFill>
+                        <a:srgbClr val="D9D9DE"/>
+                      </a:solidFill>
+                      <a:prstDash val="solid"/>
+                      <a:round/>
+                      <a:headEnd type="none" w="med" len="med"/>
+                      <a:tailEnd type="none" w="med" len="med"/>
+                    </a:lnR>
+                    <a:lnT w="6350" cap="flat" cmpd="sng" algn="ctr">
+                      <a:solidFill>
+                        <a:srgbClr val="D9D9DE"/>
+                      </a:solidFill>
+                      <a:prstDash val="solid"/>
+                      <a:round/>
+                      <a:headEnd type="none" w="med" len="med"/>
+                      <a:tailEnd type="none" w="med" len="med"/>
+                    </a:lnT>
+                    <a:lnB w="6350" cap="flat" cmpd="sng" algn="ctr">
+                      <a:solidFill>
+                        <a:srgbClr val="D9D9DE"/>
+                      </a:solidFill>
+                      <a:prstDash val="solid"/>
+                      <a:round/>
+                      <a:headEnd type="none" w="med" len="med"/>
+                      <a:tailEnd type="none" w="med" len="med"/>
+                    </a:lnB>
+                    <a:solidFill>
+                      <a:srgbClr val="F6F7F9"/>
+                    </a:solidFill>
+                  </a:tcPr>
+                </a:tc>
+                <a:tc>
+                  <a:txBody>
+                    <a:bodyPr/>
+                    <a:lstStyle/>
+                    <a:p>
+                      <a:pPr indent="0" marL="0">
+                        <a:buNone/>
+                      </a:pPr>
+                      <a:r>
+                        <a:rPr lang="en-US" sz="1250" dirty="0">
+                          <a:solidFill>
+                            <a:srgbClr val="1A1A1E"/>
+                          </a:solidFill>
+                          <a:latin typeface="Segoe UI" pitchFamily="34" charset="0"/>
+                          <a:ea typeface="Segoe UI" pitchFamily="34" charset="-122"/>
+                          <a:cs typeface="Segoe UI" pitchFamily="34" charset="-120"/>
+                        </a:rPr>
+                        <a:t>~45 min</a:t>
+                      </a:r>
+                      <a:endParaRPr lang="en-US" sz="1250" dirty="0">
+                        <a:latin typeface="Segoe UI" charset="0"/>
+                        <a:ea typeface="Segoe UI" charset="0"/>
+                        <a:cs typeface="Segoe UI" charset="0"/>
+                      </a:endParaRPr>
+                    </a:p>
+                  </a:txBody>
+                  <a:tcPr marL="73152" marR="73152" marT="73152" marB="73152" anchor="ctr">
+                    <a:lnL w="6350" cap="flat" cmpd="sng" algn="ctr">
+                      <a:solidFill>
+                        <a:srgbClr val="D9D9DE"/>
+                      </a:solidFill>
+                      <a:prstDash val="solid"/>
+                      <a:round/>
+                      <a:headEnd type="none" w="med" len="med"/>
+                      <a:tailEnd type="none" w="med" len="med"/>
+                    </a:lnL>
+                    <a:lnR w="6350" cap="flat" cmpd="sng" algn="ctr">
+                      <a:solidFill>
+                        <a:srgbClr val="D9D9DE"/>
+                      </a:solidFill>
+                      <a:prstDash val="solid"/>
+                      <a:round/>
+                      <a:headEnd type="none" w="med" len="med"/>
+                      <a:tailEnd type="none" w="med" len="med"/>
+                    </a:lnR>
+                    <a:lnT w="6350" cap="flat" cmpd="sng" algn="ctr">
+                      <a:solidFill>
+                        <a:srgbClr val="D9D9DE"/>
+                      </a:solidFill>
+                      <a:prstDash val="solid"/>
+                      <a:round/>
+                      <a:headEnd type="none" w="med" len="med"/>
+                      <a:tailEnd type="none" w="med" len="med"/>
+                    </a:lnT>
+                    <a:lnB w="6350" cap="flat" cmpd="sng" algn="ctr">
+                      <a:solidFill>
+                        <a:srgbClr val="D9D9DE"/>
+                      </a:solidFill>
+                      <a:prstDash val="solid"/>
+                      <a:round/>
+                      <a:headEnd type="none" w="med" len="med"/>
+                      <a:tailEnd type="none" w="med" len="med"/>
+                    </a:lnB>
+                    <a:solidFill>
+                      <a:srgbClr val="F6F7F9"/>
+                    </a:solidFill>
+                  </a:tcPr>
+                </a:tc>
+              </a:tr>
+              <a:tr h="329184">
+                <a:tc>
+                  <a:txBody>
+                    <a:bodyPr/>
+                    <a:lstStyle/>
+                    <a:p>
+                      <a:pPr indent="0" marL="0">
+                        <a:buNone/>
+                      </a:pPr>
+                      <a:r>
+                        <a:rPr lang="en-US" sz="1250" dirty="0">
+                          <a:solidFill>
+                            <a:srgbClr val="1A1A1E"/>
+                          </a:solidFill>
+                          <a:latin typeface="Segoe UI" pitchFamily="34" charset="0"/>
+                          <a:ea typeface="Segoe UI" pitchFamily="34" charset="-122"/>
+                          <a:cs typeface="Segoe UI" pitchFamily="34" charset="-120"/>
+                        </a:rPr>
+                        <a:t>Write the checks</a:t>
+                      </a:r>
+                      <a:endParaRPr lang="en-US" sz="1250" dirty="0">
+                        <a:latin typeface="Segoe UI" charset="0"/>
+                        <a:ea typeface="Segoe UI" charset="0"/>
+                        <a:cs typeface="Segoe UI" charset="0"/>
+                      </a:endParaRPr>
+                    </a:p>
+                  </a:txBody>
+                  <a:tcPr marL="73152" marR="73152" marT="73152" marB="73152" anchor="ctr">
+                    <a:lnL w="6350" cap="flat" cmpd="sng" algn="ctr">
+                      <a:solidFill>
+                        <a:srgbClr val="D9D9DE"/>
+                      </a:solidFill>
+                      <a:prstDash val="solid"/>
+                      <a:round/>
+                      <a:headEnd type="none" w="med" len="med"/>
+                      <a:tailEnd type="none" w="med" len="med"/>
+                    </a:lnL>
+                    <a:lnR w="6350" cap="flat" cmpd="sng" algn="ctr">
+                      <a:solidFill>
+                        <a:srgbClr val="D9D9DE"/>
+                      </a:solidFill>
+                      <a:prstDash val="solid"/>
+                      <a:round/>
+                      <a:headEnd type="none" w="med" len="med"/>
+                      <a:tailEnd type="none" w="med" len="med"/>
+                    </a:lnR>
+                    <a:lnT w="6350" cap="flat" cmpd="sng" algn="ctr">
+                      <a:solidFill>
+                        <a:srgbClr val="D9D9DE"/>
+                      </a:solidFill>
+                      <a:prstDash val="solid"/>
+                      <a:round/>
+                      <a:headEnd type="none" w="med" len="med"/>
+                      <a:tailEnd type="none" w="med" len="med"/>
+                    </a:lnT>
+                    <a:lnB w="6350" cap="flat" cmpd="sng" algn="ctr">
+                      <a:solidFill>
+                        <a:srgbClr val="D9D9DE"/>
+                      </a:solidFill>
+                      <a:prstDash val="solid"/>
+                      <a:round/>
+                      <a:headEnd type="none" w="med" len="med"/>
+                      <a:tailEnd type="none" w="med" len="med"/>
+                    </a:lnB>
+                    <a:solidFill>
+                      <a:srgbClr val="FFFFFF"/>
+                    </a:solidFill>
+                  </a:tcPr>
+                </a:tc>
+                <a:tc>
+                  <a:txBody>
+                    <a:bodyPr/>
+                    <a:lstStyle/>
+                    <a:p>
+                      <a:pPr indent="0" marL="0">
+                        <a:buNone/>
+                      </a:pPr>
+                      <a:r>
+                        <a:rPr lang="en-US" sz="1250" dirty="0">
+                          <a:solidFill>
+                            <a:srgbClr val="1A1A1E"/>
+                          </a:solidFill>
+                          <a:latin typeface="Segoe UI" pitchFamily="34" charset="0"/>
+                          <a:ea typeface="Segoe UI" pitchFamily="34" charset="-122"/>
+                          <a:cs typeface="Segoe UI" pitchFamily="34" charset="-120"/>
+                        </a:rPr>
+                        <a:t>half a day</a:t>
+                      </a:r>
+                      <a:endParaRPr lang="en-US" sz="1250" dirty="0">
+                        <a:latin typeface="Segoe UI" charset="0"/>
+                        <a:ea typeface="Segoe UI" charset="0"/>
+                        <a:cs typeface="Segoe UI" charset="0"/>
+                      </a:endParaRPr>
+                    </a:p>
+                  </a:txBody>
+                  <a:tcPr marL="73152" marR="73152" marT="73152" marB="73152" anchor="ctr">
+                    <a:lnL w="6350" cap="flat" cmpd="sng" algn="ctr">
+                      <a:solidFill>
+                        <a:srgbClr val="D9D9DE"/>
+                      </a:solidFill>
+                      <a:prstDash val="solid"/>
+                      <a:round/>
+                      <a:headEnd type="none" w="med" len="med"/>
+                      <a:tailEnd type="none" w="med" len="med"/>
+                    </a:lnL>
+                    <a:lnR w="6350" cap="flat" cmpd="sng" algn="ctr">
+                      <a:solidFill>
+                        <a:srgbClr val="D9D9DE"/>
+                      </a:solidFill>
+                      <a:prstDash val="solid"/>
+                      <a:round/>
+                      <a:headEnd type="none" w="med" len="med"/>
+                      <a:tailEnd type="none" w="med" len="med"/>
+                    </a:lnR>
+                    <a:lnT w="6350" cap="flat" cmpd="sng" algn="ctr">
+                      <a:solidFill>
+                        <a:srgbClr val="D9D9DE"/>
+                      </a:solidFill>
+                      <a:prstDash val="solid"/>
+                      <a:round/>
+                      <a:headEnd type="none" w="med" len="med"/>
+                      <a:tailEnd type="none" w="med" len="med"/>
+                    </a:lnT>
+                    <a:lnB w="6350" cap="flat" cmpd="sng" algn="ctr">
+                      <a:solidFill>
+                        <a:srgbClr val="D9D9DE"/>
+                      </a:solidFill>
+                      <a:prstDash val="solid"/>
+                      <a:round/>
+                      <a:headEnd type="none" w="med" len="med"/>
+                      <a:tailEnd type="none" w="med" len="med"/>
+                    </a:lnB>
+                    <a:solidFill>
+                      <a:srgbClr val="FFFFFF"/>
+                    </a:solidFill>
+                  </a:tcPr>
+                </a:tc>
+                <a:tc>
+                  <a:txBody>
+                    <a:bodyPr/>
+                    <a:lstStyle/>
+                    <a:p>
+                      <a:pPr indent="0" marL="0">
+                        <a:buNone/>
+                      </a:pPr>
+                      <a:r>
+                        <a:rPr lang="en-US" sz="1250" dirty="0">
+                          <a:solidFill>
+                            <a:srgbClr val="1A1A1E"/>
+                          </a:solidFill>
+                          <a:latin typeface="Segoe UI" pitchFamily="34" charset="0"/>
+                          <a:ea typeface="Segoe UI" pitchFamily="34" charset="-122"/>
+                          <a:cs typeface="Segoe UI" pitchFamily="34" charset="-120"/>
+                        </a:rPr>
+                        <a:t>~30 min</a:t>
+                      </a:r>
+                      <a:endParaRPr lang="en-US" sz="1250" dirty="0">
+                        <a:latin typeface="Segoe UI" charset="0"/>
+                        <a:ea typeface="Segoe UI" charset="0"/>
+                        <a:cs typeface="Segoe UI" charset="0"/>
+                      </a:endParaRPr>
+                    </a:p>
+                  </a:txBody>
+                  <a:tcPr marL="73152" marR="73152" marT="73152" marB="73152" anchor="ctr">
+                    <a:lnL w="6350" cap="flat" cmpd="sng" algn="ctr">
+                      <a:solidFill>
+                        <a:srgbClr val="D9D9DE"/>
+                      </a:solidFill>
+                      <a:prstDash val="solid"/>
+                      <a:round/>
+                      <a:headEnd type="none" w="med" len="med"/>
+                      <a:tailEnd type="none" w="med" len="med"/>
+                    </a:lnL>
+                    <a:lnR w="6350" cap="flat" cmpd="sng" algn="ctr">
+                      <a:solidFill>
+                        <a:srgbClr val="D9D9DE"/>
+                      </a:solidFill>
+                      <a:prstDash val="solid"/>
+                      <a:round/>
+                      <a:headEnd type="none" w="med" len="med"/>
+                      <a:tailEnd type="none" w="med" len="med"/>
+                    </a:lnR>
+                    <a:lnT w="6350" cap="flat" cmpd="sng" algn="ctr">
+                      <a:solidFill>
+                        <a:srgbClr val="D9D9DE"/>
+                      </a:solidFill>
+                      <a:prstDash val="solid"/>
+                      <a:round/>
+                      <a:headEnd type="none" w="med" len="med"/>
+                      <a:tailEnd type="none" w="med" len="med"/>
+                    </a:lnT>
+                    <a:lnB w="6350" cap="flat" cmpd="sng" algn="ctr">
+                      <a:solidFill>
+                        <a:srgbClr val="D9D9DE"/>
+                      </a:solidFill>
+                      <a:prstDash val="solid"/>
+                      <a:round/>
+                      <a:headEnd type="none" w="med" len="med"/>
+                      <a:tailEnd type="none" w="med" len="med"/>
+                    </a:lnB>
+                    <a:solidFill>
+                      <a:srgbClr val="FFFFFF"/>
+                    </a:solidFill>
+                  </a:tcPr>
+                </a:tc>
+              </a:tr>
+            </a:tbl>
+          </a:graphicData>
+        </a:graphic>
+      </p:graphicFrame>
+      <p:sp>
+        <p:nvSpPr>
+          <p:cNvPr id="14" name="Text 11"/>
+          <p:cNvSpPr/>
+          <p:nvPr/>
+        </p:nvSpPr>
+        <p:spPr>
+          <a:xfrm>
+            <a:off x="566928" y="5925312"/>
+            <a:ext cx="11057839" cy="274320"/>
           </a:xfrm>
           <a:prstGeom prst="rect">
             <a:avLst/>
@@ -2906,59 +4180,17 @@
               <a:buNone/>
             </a:pPr>
             <a:r>
-              <a:rPr lang="en-US" sz="3400" b="1" dirty="0">
-                <a:solidFill>
-                  <a:srgbClr val="FFFFFF"/>
-                </a:solidFill>
-                <a:latin typeface="Segoe UI" pitchFamily="34" charset="0"/>
-                <a:ea typeface="Segoe UI" pitchFamily="34" charset="-122"/>
-                <a:cs typeface="Segoe UI" pitchFamily="34" charset="-120"/>
-              </a:rPr>
-              <a:t>How AI changed the effort</a:t>
-            </a:r>
-            <a:endParaRPr lang="en-US" sz="3400" dirty="0"/>
-          </a:p>
-        </p:txBody>
-      </p:sp>
-      <p:sp>
-        <p:nvSpPr>
-          <p:cNvPr id="4" name="Text 2"/>
-          <p:cNvSpPr/>
-          <p:nvPr/>
-        </p:nvSpPr>
-        <p:spPr>
-          <a:xfrm>
-            <a:off x="566928" y="3794760"/>
-            <a:ext cx="9229039" cy="731520"/>
-          </a:xfrm>
-          <a:prstGeom prst="rect">
-            <a:avLst/>
-          </a:prstGeom>
-          <a:noFill/>
-          <a:ln/>
-        </p:spPr>
-        <p:txBody>
-          <a:bodyPr wrap="square" rtlCol="0" anchor="ctr"/>
-          <a:lstStyle/>
-          <a:p>
-            <a:pPr indent="0" marL="0">
-              <a:lnSpc>
-                <a:spcPct val="125000"/>
-              </a:lnSpc>
-              <a:buNone/>
-            </a:pPr>
-            <a:r>
-              <a:rPr lang="en-US" sz="1500" dirty="0">
-                <a:solidFill>
-                  <a:srgbClr val="D8E6F3"/>
-                </a:solidFill>
-                <a:latin typeface="Segoe UI" pitchFamily="34" charset="0"/>
-                <a:ea typeface="Segoe UI" pitchFamily="34" charset="-122"/>
-                <a:cs typeface="Segoe UI" pitchFamily="34" charset="-120"/>
-              </a:rPr>
-              <a:t>Including the diagnosis that unblocked the whole environment.</a:t>
-            </a:r>
-            <a:endParaRPr lang="en-US" sz="1500" dirty="0"/>
+              <a:rPr lang="en-US" sz="1150" i="1" dirty="0">
+                <a:solidFill>
+                  <a:srgbClr val="71717A"/>
+                </a:solidFill>
+                <a:latin typeface="Segoe UI" pitchFamily="34" charset="0"/>
+                <a:ea typeface="Segoe UI" pitchFamily="34" charset="-122"/>
+                <a:cs typeface="Segoe UI" pitchFamily="34" charset="-120"/>
+              </a:rPr>
+              <a:t>"By hand" is an estimate built from those five lines. "With the agent" was measured during the session.</a:t>
+            </a:r>
+            <a:endParaRPr lang="en-US" sz="1150" dirty="0"/>
           </a:p>
         </p:txBody>
       </p:sp>
@@ -3027,7 +4259,7 @@
                 <a:ea typeface="Segoe UI" pitchFamily="34" charset="-122"/>
                 <a:cs typeface="Segoe UI" pitchFamily="34" charset="-120"/>
               </a:rPr>
-              <a:t>Building it with an AI agent</a:t>
+              <a:t>Why it is faster - four reasons</a:t>
             </a:r>
             <a:endParaRPr lang="en-US" sz="2600" dirty="0"/>
           </a:p>
@@ -3066,7 +4298,7 @@
                 <a:ea typeface="Segoe UI" pitchFamily="34" charset="-122"/>
                 <a:cs typeface="Segoe UI" pitchFamily="34" charset="-120"/>
               </a:rPr>
-              <a:t>Same agent, same day, as the web suite - a different kind of problem</a:t>
+              <a:t>None of them is "it types quickly"</a:t>
             </a:r>
             <a:endParaRPr lang="en-US" sz="1400" dirty="0"/>
           </a:p>
@@ -3094,14 +4326,66 @@
       </p:sp>
       <p:sp>
         <p:nvSpPr>
-          <p:cNvPr id="5" name="Text 3"/>
+          <p:cNvPr id="5" name="Shape 3"/>
           <p:cNvSpPr/>
           <p:nvPr/>
         </p:nvSpPr>
         <p:spPr>
           <a:xfrm>
             <a:off x="566928" y="1627632"/>
-            <a:ext cx="11057839" cy="4023360"/>
+            <a:ext cx="2572436" cy="3703320"/>
+          </a:xfrm>
+          <a:prstGeom prst="roundRect">
+            <a:avLst>
+              <a:gd name="adj" fmla="val 2844"/>
+            </a:avLst>
+          </a:prstGeom>
+          <a:solidFill>
+            <a:srgbClr val="F6F7F9"/>
+          </a:solidFill>
+          <a:ln w="12700">
+            <a:solidFill>
+              <a:srgbClr val="D9D9DE"/>
+            </a:solidFill>
+            <a:prstDash val="solid"/>
+          </a:ln>
+        </p:spPr>
+      </p:sp>
+      <p:sp>
+        <p:nvSpPr>
+          <p:cNvPr id="6" name="Shape 4"/>
+          <p:cNvSpPr/>
+          <p:nvPr/>
+        </p:nvSpPr>
+        <p:spPr>
+          <a:xfrm>
+            <a:off x="566928" y="1627632"/>
+            <a:ext cx="2572436" cy="54864"/>
+          </a:xfrm>
+          <a:prstGeom prst="rect">
+            <a:avLst/>
+          </a:prstGeom>
+          <a:solidFill>
+            <a:srgbClr val="0B5FA5"/>
+          </a:solidFill>
+          <a:ln w="12700">
+            <a:solidFill>
+              <a:srgbClr val="0B5FA5"/>
+            </a:solidFill>
+            <a:prstDash val="solid"/>
+          </a:ln>
+        </p:spPr>
+      </p:sp>
+      <p:sp>
+        <p:nvSpPr>
+          <p:cNvPr id="7" name="Text 5"/>
+          <p:cNvSpPr/>
+          <p:nvPr/>
+        </p:nvSpPr>
+        <p:spPr>
+          <a:xfrm>
+            <a:off x="768096" y="1792224"/>
+            <a:ext cx="2170100" cy="475488"/>
           </a:xfrm>
           <a:prstGeom prst="rect">
             <a:avLst/>
@@ -3113,112 +4397,226 @@
           <a:bodyPr wrap="square" rtlCol="0" anchor="t"/>
           <a:lstStyle/>
           <a:p>
+            <a:pPr indent="0" marL="0">
+              <a:buNone/>
+            </a:pPr>
+            <a:r>
+              <a:rPr lang="en-US" sz="1450" b="1" dirty="0">
+                <a:solidFill>
+                  <a:srgbClr val="1A1A1E"/>
+                </a:solidFill>
+                <a:latin typeface="Segoe UI" pitchFamily="34" charset="0"/>
+                <a:ea typeface="Segoe UI" pitchFamily="34" charset="-122"/>
+                <a:cs typeface="Segoe UI" pitchFamily="34" charset="-120"/>
+              </a:rPr>
+              <a:t>1. It read the app to find the truth</a:t>
+            </a:r>
+            <a:endParaRPr lang="en-US" sz="1450" dirty="0"/>
+          </a:p>
+        </p:txBody>
+      </p:sp>
+      <p:sp>
+        <p:nvSpPr>
+          <p:cNvPr id="8" name="Text 6"/>
+          <p:cNvSpPr/>
+          <p:nvPr/>
+        </p:nvSpPr>
+        <p:spPr>
+          <a:xfrm>
+            <a:off x="768096" y="2322576"/>
+            <a:ext cx="2170100" cy="731520"/>
+          </a:xfrm>
+          <a:prstGeom prst="rect">
+            <a:avLst/>
+          </a:prstGeom>
+          <a:noFill/>
+          <a:ln/>
+        </p:spPr>
+        <p:txBody>
+          <a:bodyPr wrap="square" rtlCol="0" anchor="t"/>
+          <a:lstStyle/>
+          <a:p>
+            <a:pPr indent="0" marL="0">
+              <a:buNone/>
+            </a:pPr>
+            <a:r>
+              <a:rPr lang="en-US" sz="1200" i="1" dirty="0">
+                <a:solidFill>
+                  <a:srgbClr val="71717A"/>
+                </a:solidFill>
+                <a:latin typeface="Segoe UI" pitchFamily="34" charset="0"/>
+                <a:ea typeface="Segoe UI" pitchFamily="34" charset="-122"/>
+                <a:cs typeface="Segoe UI" pitchFamily="34" charset="-120"/>
+              </a:rPr>
+              <a:t>Not trial and error.</a:t>
+            </a:r>
+            <a:endParaRPr lang="en-US" sz="1200" dirty="0"/>
+          </a:p>
+        </p:txBody>
+      </p:sp>
+      <p:sp>
+        <p:nvSpPr>
+          <p:cNvPr id="9" name="Text 7"/>
+          <p:cNvSpPr/>
+          <p:nvPr/>
+        </p:nvSpPr>
+        <p:spPr>
+          <a:xfrm>
+            <a:off x="768096" y="3090672"/>
+            <a:ext cx="2170100" cy="2103120"/>
+          </a:xfrm>
+          <a:prstGeom prst="rect">
+            <a:avLst/>
+          </a:prstGeom>
+          <a:noFill/>
+          <a:ln/>
+        </p:spPr>
+        <p:txBody>
+          <a:bodyPr wrap="square" rtlCol="0" anchor="t"/>
+          <a:lstStyle/>
+          <a:p>
             <a:pPr marL="342900" indent="-342900">
-              <a:lnSpc>
-                <a:spcPct val="115000"/>
-              </a:lnSpc>
               <a:spcAft>
-                <a:spcPts val="200"/>
+                <a:spcPts val="600"/>
               </a:spcAft>
               <a:buSzPct val="100000"/>
               <a:buChar char="•"/>
             </a:pPr>
             <a:r>
-              <a:rPr lang="en-US" sz="1400" b="1" dirty="0">
-                <a:solidFill>
-                  <a:srgbClr val="1A1A1E"/>
-                </a:solidFill>
-                <a:latin typeface="Segoe UI" pitchFamily="34" charset="0"/>
-                <a:ea typeface="Segoe UI" pitchFamily="34" charset="-122"/>
-                <a:cs typeface="Segoe UI" pitchFamily="34" charset="-120"/>
-              </a:rPr>
-              <a:t>It read the app source to find the truth</a:t>
-            </a:r>
-            <a:endParaRPr lang="en-US" sz="1400" dirty="0"/>
-          </a:p>
-          <a:p>
-            <a:pPr lvl="1" indent="0" marL="0">
-              <a:lnSpc>
-                <a:spcPct val="115000"/>
-              </a:lnSpc>
+              <a:rPr lang="en-US" sz="1200" dirty="0">
+                <a:solidFill>
+                  <a:srgbClr val="3F3F46"/>
+                </a:solidFill>
+                <a:latin typeface="Segoe UI" pitchFamily="34" charset="0"/>
+                <a:ea typeface="Segoe UI" pitchFamily="34" charset="-122"/>
+                <a:cs typeface="Segoe UI" pitchFamily="34" charset="-120"/>
+              </a:rPr>
+              <a:t>The phone number must be exactly 10 digits - a rule buried in the app’s code</a:t>
+            </a:r>
+            <a:endParaRPr lang="en-US" sz="1200" dirty="0"/>
+          </a:p>
+          <a:p>
+            <a:pPr marL="342900" indent="-342900">
               <a:spcAft>
-                <a:spcPts val="1000"/>
-              </a:spcAft>
-              <a:buNone/>
-            </a:pPr>
-            <a:r>
-              <a:rPr lang="en-US" sz="1150" dirty="0">
-                <a:solidFill>
-                  <a:srgbClr val="3F3F46"/>
-                </a:solidFill>
-                <a:latin typeface="Segoe UI" pitchFamily="34" charset="0"/>
-                <a:ea typeface="Segoe UI" pitchFamily="34" charset="-122"/>
-                <a:cs typeface="Segoe UI" pitchFamily="34" charset="-120"/>
-              </a:rPr>
-              <a:t>The OTP screen’s two states and the exact rule isValidPhone - length == 10 - came from OtpViewModel.kt, not from trial and error</a:t>
-            </a:r>
-            <a:endParaRPr lang="en-US" sz="1400" dirty="0"/>
-          </a:p>
-          <a:p>
-            <a:pPr marL="342900" indent="-342900">
-              <a:lnSpc>
-                <a:spcPct val="115000"/>
-              </a:lnSpc>
-              <a:spcAft>
-                <a:spcPts val="200"/>
+                <a:spcPts val="600"/>
               </a:spcAft>
               <a:buSzPct val="100000"/>
               <a:buChar char="•"/>
             </a:pPr>
             <a:r>
-              <a:rPr lang="en-US" sz="1400" b="1" dirty="0">
-                <a:solidFill>
-                  <a:srgbClr val="1A1A1E"/>
-                </a:solidFill>
-                <a:latin typeface="Segoe UI" pitchFamily="34" charset="0"/>
-                <a:ea typeface="Segoe UI" pitchFamily="34" charset="-122"/>
-                <a:cs typeface="Segoe UI" pitchFamily="34" charset="-120"/>
-              </a:rPr>
-              <a:t>It diagnosed the environment instead of guessing</a:t>
-            </a:r>
-            <a:endParaRPr lang="en-US" sz="1400" dirty="0"/>
-          </a:p>
-          <a:p>
-            <a:pPr lvl="1" indent="0" marL="0">
-              <a:lnSpc>
-                <a:spcPct val="115000"/>
-              </a:lnSpc>
+              <a:rPr lang="en-US" sz="1200" dirty="0">
+                <a:solidFill>
+                  <a:srgbClr val="3F3F46"/>
+                </a:solidFill>
+                <a:latin typeface="Segoe UI" pitchFamily="34" charset="0"/>
+                <a:ea typeface="Segoe UI" pitchFamily="34" charset="-122"/>
+                <a:cs typeface="Segoe UI" pitchFamily="34" charset="-120"/>
+              </a:rPr>
+              <a:t>Get it wrong and the button silently does nothing, which is a long afternoon of confusion</a:t>
+            </a:r>
+            <a:endParaRPr lang="en-US" sz="1200" dirty="0"/>
+          </a:p>
+          <a:p>
+            <a:pPr marL="342900" indent="-342900">
               <a:spcAft>
-                <a:spcPts val="1000"/>
-              </a:spcAft>
-              <a:buNone/>
-            </a:pPr>
-            <a:r>
-              <a:rPr lang="en-US" sz="1150" dirty="0">
-                <a:solidFill>
-                  <a:srgbClr val="3F3F46"/>
-                </a:solidFill>
-                <a:latin typeface="Segoe UI" pitchFamily="34" charset="0"/>
-                <a:ea typeface="Segoe UI" pitchFamily="34" charset="-122"/>
-                <a:cs typeface="Segoe UI" pitchFamily="34" charset="-120"/>
-              </a:rPr>
-              <a:t>Wi-Fi state, routing tables, raw TCP - it proved DNS was the only failure and built the proxy that fixed it</a:t>
-            </a:r>
-            <a:endParaRPr lang="en-US" sz="1400" dirty="0"/>
-          </a:p>
-          <a:p>
-            <a:pPr marL="342900" indent="-342900">
-              <a:lnSpc>
-                <a:spcPct val="115000"/>
-              </a:lnSpc>
-              <a:spcAft>
-                <a:spcPts val="200"/>
+                <a:spcPts val="600"/>
               </a:spcAft>
               <a:buSzPct val="100000"/>
               <a:buChar char="•"/>
             </a:pPr>
             <a:r>
-              <a:rPr lang="en-US" sz="1400" b="1" dirty="0">
+              <a:rPr lang="en-US" sz="1200" dirty="0">
+                <a:solidFill>
+                  <a:srgbClr val="3F3F46"/>
+                </a:solidFill>
+                <a:latin typeface="Segoe UI" pitchFamily="34" charset="0"/>
+                <a:ea typeface="Segoe UI" pitchFamily="34" charset="-122"/>
+                <a:cs typeface="Segoe UI" pitchFamily="34" charset="-120"/>
+              </a:rPr>
+              <a:t>It found the rule, and made the test say so out loud</a:t>
+            </a:r>
+            <a:endParaRPr lang="en-US" sz="1200" dirty="0"/>
+          </a:p>
+        </p:txBody>
+      </p:sp>
+      <p:sp>
+        <p:nvSpPr>
+          <p:cNvPr id="10" name="Shape 8"/>
+          <p:cNvSpPr/>
+          <p:nvPr/>
+        </p:nvSpPr>
+        <p:spPr>
+          <a:xfrm>
+            <a:off x="3395396" y="1627632"/>
+            <a:ext cx="2572436" cy="3703320"/>
+          </a:xfrm>
+          <a:prstGeom prst="roundRect">
+            <a:avLst>
+              <a:gd name="adj" fmla="val 2844"/>
+            </a:avLst>
+          </a:prstGeom>
+          <a:solidFill>
+            <a:srgbClr val="F6F7F9"/>
+          </a:solidFill>
+          <a:ln w="12700">
+            <a:solidFill>
+              <a:srgbClr val="D9D9DE"/>
+            </a:solidFill>
+            <a:prstDash val="solid"/>
+          </a:ln>
+        </p:spPr>
+      </p:sp>
+      <p:sp>
+        <p:nvSpPr>
+          <p:cNvPr id="11" name="Shape 9"/>
+          <p:cNvSpPr/>
+          <p:nvPr/>
+        </p:nvSpPr>
+        <p:spPr>
+          <a:xfrm>
+            <a:off x="3395396" y="1627632"/>
+            <a:ext cx="2572436" cy="54864"/>
+          </a:xfrm>
+          <a:prstGeom prst="rect">
+            <a:avLst/>
+          </a:prstGeom>
+          <a:solidFill>
+            <a:srgbClr val="15803D"/>
+          </a:solidFill>
+          <a:ln w="12700">
+            <a:solidFill>
+              <a:srgbClr val="15803D"/>
+            </a:solidFill>
+            <a:prstDash val="solid"/>
+          </a:ln>
+        </p:spPr>
+      </p:sp>
+      <p:sp>
+        <p:nvSpPr>
+          <p:cNvPr id="12" name="Text 10"/>
+          <p:cNvSpPr/>
+          <p:nvPr/>
+        </p:nvSpPr>
+        <p:spPr>
+          <a:xfrm>
+            <a:off x="3596564" y="1792224"/>
+            <a:ext cx="2170100" cy="475488"/>
+          </a:xfrm>
+          <a:prstGeom prst="rect">
+            <a:avLst/>
+          </a:prstGeom>
+          <a:noFill/>
+          <a:ln/>
+        </p:spPr>
+        <p:txBody>
+          <a:bodyPr wrap="square" rtlCol="0" anchor="t"/>
+          <a:lstStyle/>
+          <a:p>
+            <a:pPr indent="0" marL="0">
+              <a:buNone/>
+            </a:pPr>
+            <a:r>
+              <a:rPr lang="en-US" sz="1450" b="1" dirty="0">
                 <a:solidFill>
                   <a:srgbClr val="1A1A1E"/>
                 </a:solidFill>
@@ -3226,69 +4624,102 @@
                 <a:ea typeface="Segoe UI" pitchFamily="34" charset="-122"/>
                 <a:cs typeface="Segoe UI" pitchFamily="34" charset="-120"/>
               </a:rPr>
-              <a:t>It found the bug the green test was hiding</a:t>
-            </a:r>
-            <a:endParaRPr lang="en-US" sz="1400" dirty="0"/>
-          </a:p>
-          <a:p>
-            <a:pPr lvl="1" indent="0" marL="0">
-              <a:lnSpc>
-                <a:spcPct val="115000"/>
-              </a:lnSpc>
+              <a:t>2. It worked across three systems at once</a:t>
+            </a:r>
+            <a:endParaRPr lang="en-US" sz="1450" dirty="0"/>
+          </a:p>
+        </p:txBody>
+      </p:sp>
+      <p:sp>
+        <p:nvSpPr>
+          <p:cNvPr id="13" name="Text 11"/>
+          <p:cNvSpPr/>
+          <p:nvPr/>
+        </p:nvSpPr>
+        <p:spPr>
+          <a:xfrm>
+            <a:off x="3596564" y="2322576"/>
+            <a:ext cx="2170100" cy="731520"/>
+          </a:xfrm>
+          <a:prstGeom prst="rect">
+            <a:avLst/>
+          </a:prstGeom>
+          <a:noFill/>
+          <a:ln/>
+        </p:spPr>
+        <p:txBody>
+          <a:bodyPr wrap="square" rtlCol="0" anchor="t"/>
+          <a:lstStyle/>
+          <a:p>
+            <a:pPr indent="0" marL="0">
+              <a:buNone/>
+            </a:pPr>
+            <a:r>
+              <a:rPr lang="en-US" sz="1200" i="1" dirty="0">
+                <a:solidFill>
+                  <a:srgbClr val="71717A"/>
+                </a:solidFill>
+                <a:latin typeface="Segoe UI" pitchFamily="34" charset="0"/>
+                <a:ea typeface="Segoe UI" pitchFamily="34" charset="-122"/>
+                <a:cs typeface="Segoe UI" pitchFamily="34" charset="-120"/>
+              </a:rPr>
+              <a:t>App, backend and test suite together.</a:t>
+            </a:r>
+            <a:endParaRPr lang="en-US" sz="1200" dirty="0"/>
+          </a:p>
+        </p:txBody>
+      </p:sp>
+      <p:sp>
+        <p:nvSpPr>
+          <p:cNvPr id="14" name="Text 12"/>
+          <p:cNvSpPr/>
+          <p:nvPr/>
+        </p:nvSpPr>
+        <p:spPr>
+          <a:xfrm>
+            <a:off x="3596564" y="3090672"/>
+            <a:ext cx="2170100" cy="2103120"/>
+          </a:xfrm>
+          <a:prstGeom prst="rect">
+            <a:avLst/>
+          </a:prstGeom>
+          <a:noFill/>
+          <a:ln/>
+        </p:spPr>
+        <p:txBody>
+          <a:bodyPr wrap="square" rtlCol="0" anchor="t"/>
+          <a:lstStyle/>
+          <a:p>
+            <a:pPr marL="342900" indent="-342900">
               <a:spcAft>
-                <a:spcPts val="1000"/>
-              </a:spcAft>
-              <a:buNone/>
-            </a:pPr>
-            <a:r>
-              <a:rPr lang="en-US" sz="1150" dirty="0">
-                <a:solidFill>
-                  <a:srgbClr val="3F3F46"/>
-                </a:solidFill>
-                <a:latin typeface="Segoe UI" pitchFamily="34" charset="0"/>
-                <a:ea typeface="Segoe UI" pitchFamily="34" charset="-122"/>
-                <a:cs typeface="Segoe UI" pitchFamily="34" charset="-120"/>
-              </a:rPr>
-              <a:t>Once login succeeded, the app remembered the session and the second test never saw the login screen - clearApp now runs before each test</a:t>
-            </a:r>
-            <a:endParaRPr lang="en-US" sz="1400" dirty="0"/>
-          </a:p>
-          <a:p>
-            <a:pPr marL="342900" indent="-342900">
-              <a:lnSpc>
-                <a:spcPct val="115000"/>
-              </a:lnSpc>
-              <a:spcAft>
-                <a:spcPts val="200"/>
+                <a:spcPts val="600"/>
               </a:spcAft>
               <a:buSzPct val="100000"/>
               <a:buChar char="•"/>
             </a:pPr>
             <a:r>
-              <a:rPr lang="en-US" sz="1400" b="1" dirty="0">
-                <a:solidFill>
-                  <a:srgbClr val="1A1A1E"/>
-                </a:solidFill>
-                <a:latin typeface="Segoe UI" pitchFamily="34" charset="0"/>
-                <a:ea typeface="Segoe UI" pitchFamily="34" charset="-122"/>
-                <a:cs typeface="Segoe UI" pitchFamily="34" charset="-120"/>
-              </a:rPr>
-              <a:t>It designed the OTP read-back end to end</a:t>
-            </a:r>
-            <a:endParaRPr lang="en-US" sz="1400" dirty="0"/>
-          </a:p>
-          <a:p>
-            <a:pPr lvl="1" indent="0" marL="0">
-              <a:lnSpc>
-                <a:spcPct val="115000"/>
-              </a:lnSpc>
+              <a:rPr lang="en-US" sz="1200" dirty="0">
+                <a:solidFill>
+                  <a:srgbClr val="3F3F46"/>
+                </a:solidFill>
+                <a:latin typeface="Segoe UI" pitchFamily="34" charset="0"/>
+                <a:ea typeface="Segoe UI" pitchFamily="34" charset="-122"/>
+                <a:cs typeface="Segoe UI" pitchFamily="34" charset="-120"/>
+              </a:rPr>
+              <a:t>The OTP fix needed a change in the RoadSide backend, a deploy, and a helper in the test</a:t>
+            </a:r>
+            <a:endParaRPr lang="en-US" sz="1200" dirty="0"/>
+          </a:p>
+          <a:p>
+            <a:pPr marL="342900" indent="-342900">
               <a:spcAft>
-                <a:spcPts val="1000"/>
+                <a:spcPts val="600"/>
               </a:spcAft>
-              <a:buNone/>
-            </a:pPr>
-            <a:r>
-              <a:rPr lang="en-US" sz="1150" dirty="0">
+              <a:buSzPct val="100000"/>
+              <a:buChar char="•"/>
+            </a:pPr>
+            <a:r>
+              <a:rPr lang="en-US" sz="1200" dirty="0">
                 <a:solidFill>
                   <a:srgbClr val="3F3F46"/>
                 </a:solidFill>
@@ -3296,34 +4727,34 @@
                 <a:ea typeface="Segoe UI" pitchFamily="34" charset="-122"/>
                 <a:cs typeface="Segoe UI" pitchFamily="34" charset="-120"/>
               </a:rPr>
-              <a:t>New API in ABMB, config flag, deploy check on UAT, client helper with a stale-code guard - and wrote down why each piece exists</a:t>
-            </a:r>
-            <a:endParaRPr lang="en-US" sz="1400" dirty="0"/>
-          </a:p>
-        </p:txBody>
-      </p:sp>
-      <p:sp>
-        <p:nvSpPr>
-          <p:cNvPr id="6" name="Shape 4"/>
-          <p:cNvSpPr/>
-          <p:nvPr/>
-        </p:nvSpPr>
-        <p:spPr>
-          <a:xfrm>
-            <a:off x="566928" y="5010912"/>
-            <a:ext cx="2627300" cy="1143000"/>
+              <a:t>Normally three people, three tickets and a week of waiting on each other</a:t>
+            </a:r>
+            <a:endParaRPr lang="en-US" sz="1200" dirty="0"/>
+          </a:p>
+        </p:txBody>
+      </p:sp>
+      <p:sp>
+        <p:nvSpPr>
+          <p:cNvPr id="15" name="Shape 13"/>
+          <p:cNvSpPr/>
+          <p:nvPr/>
+        </p:nvSpPr>
+        <p:spPr>
+          <a:xfrm>
+            <a:off x="6223864" y="1627632"/>
+            <a:ext cx="2572436" cy="3703320"/>
           </a:xfrm>
           <a:prstGeom prst="roundRect">
             <a:avLst>
-              <a:gd name="adj" fmla="val 6400"/>
+              <a:gd name="adj" fmla="val 2844"/>
             </a:avLst>
           </a:prstGeom>
           <a:solidFill>
-            <a:srgbClr val="E8F0F8"/>
+            <a:srgbClr val="F6F7F9"/>
           </a:solidFill>
           <a:ln w="12700">
             <a:solidFill>
-              <a:srgbClr val="E8F0F8"/>
+              <a:srgbClr val="D9D9DE"/>
             </a:solidFill>
             <a:prstDash val="solid"/>
           </a:ln>
@@ -3331,104 +4762,24 @@
       </p:sp>
       <p:sp>
         <p:nvSpPr>
-          <p:cNvPr id="7" name="Text 5"/>
-          <p:cNvSpPr/>
-          <p:nvPr/>
-        </p:nvSpPr>
-        <p:spPr>
-          <a:xfrm>
-            <a:off x="566928" y="5138928"/>
-            <a:ext cx="2627300" cy="548640"/>
+          <p:cNvPr id="16" name="Shape 14"/>
+          <p:cNvSpPr/>
+          <p:nvPr/>
+        </p:nvSpPr>
+        <p:spPr>
+          <a:xfrm>
+            <a:off x="6223864" y="1627632"/>
+            <a:ext cx="2572436" cy="54864"/>
           </a:xfrm>
           <a:prstGeom prst="rect">
             <a:avLst/>
           </a:prstGeom>
-          <a:noFill/>
-          <a:ln/>
-        </p:spPr>
-        <p:txBody>
-          <a:bodyPr wrap="square" rtlCol="0" anchor="ctr"/>
-          <a:lstStyle/>
-          <a:p>
-            <a:pPr algn="ctr" indent="0" marL="0">
-              <a:buNone/>
-            </a:pPr>
-            <a:r>
-              <a:rPr lang="en-US" sz="3000" b="1" dirty="0">
-                <a:solidFill>
-                  <a:srgbClr val="0B5FA5"/>
-                </a:solidFill>
-                <a:latin typeface="Segoe UI" pitchFamily="34" charset="0"/>
-                <a:ea typeface="Segoe UI" pitchFamily="34" charset="-122"/>
-                <a:cs typeface="Segoe UI" pitchFamily="34" charset="-120"/>
-              </a:rPr>
-              <a:t>~4 h</a:t>
-            </a:r>
-            <a:endParaRPr lang="en-US" sz="3000" dirty="0"/>
-          </a:p>
-        </p:txBody>
-      </p:sp>
-      <p:sp>
-        <p:nvSpPr>
-          <p:cNvPr id="8" name="Text 6"/>
-          <p:cNvSpPr/>
-          <p:nvPr/>
-        </p:nvSpPr>
-        <p:spPr>
-          <a:xfrm>
-            <a:off x="658368" y="5687568"/>
-            <a:ext cx="2444420" cy="384048"/>
-          </a:xfrm>
-          <a:prstGeom prst="rect">
-            <a:avLst/>
-          </a:prstGeom>
-          <a:noFill/>
-          <a:ln/>
-        </p:spPr>
-        <p:txBody>
-          <a:bodyPr wrap="square" rtlCol="0" anchor="ctr"/>
-          <a:lstStyle/>
-          <a:p>
-            <a:pPr algn="ctr" indent="0" marL="0">
-              <a:buNone/>
-            </a:pPr>
-            <a:r>
-              <a:rPr lang="en-US" sz="1150" dirty="0">
-                <a:solidFill>
-                  <a:srgbClr val="3F3F46"/>
-                </a:solidFill>
-                <a:latin typeface="Segoe UI" pitchFamily="34" charset="0"/>
-                <a:ea typeface="Segoe UI" pitchFamily="34" charset="-122"/>
-                <a:cs typeface="Segoe UI" pitchFamily="34" charset="-120"/>
-              </a:rPr>
-              <a:t>zero to a full OTP login, including the environment fight</a:t>
-            </a:r>
-            <a:endParaRPr lang="en-US" sz="1150" dirty="0"/>
-          </a:p>
-        </p:txBody>
-      </p:sp>
-      <p:sp>
-        <p:nvSpPr>
-          <p:cNvPr id="9" name="Shape 7"/>
-          <p:cNvSpPr/>
-          <p:nvPr/>
-        </p:nvSpPr>
-        <p:spPr>
-          <a:xfrm>
-            <a:off x="3377108" y="5010912"/>
-            <a:ext cx="2627300" cy="1143000"/>
-          </a:xfrm>
-          <a:prstGeom prst="roundRect">
-            <a:avLst>
-              <a:gd name="adj" fmla="val 6400"/>
-            </a:avLst>
-          </a:prstGeom>
           <a:solidFill>
-            <a:srgbClr val="E8F0F8"/>
+            <a:srgbClr val="B45309"/>
           </a:solidFill>
           <a:ln w="12700">
             <a:solidFill>
-              <a:srgbClr val="E8F0F8"/>
+              <a:srgbClr val="B45309"/>
             </a:solidFill>
             <a:prstDash val="solid"/>
           </a:ln>
@@ -3436,14 +4787,14 @@
       </p:sp>
       <p:sp>
         <p:nvSpPr>
-          <p:cNvPr id="10" name="Text 8"/>
-          <p:cNvSpPr/>
-          <p:nvPr/>
-        </p:nvSpPr>
-        <p:spPr>
-          <a:xfrm>
-            <a:off x="3377108" y="5138928"/>
-            <a:ext cx="2627300" cy="548640"/>
+          <p:cNvPr id="17" name="Text 15"/>
+          <p:cNvSpPr/>
+          <p:nvPr/>
+        </p:nvSpPr>
+        <p:spPr>
+          <a:xfrm>
+            <a:off x="6425032" y="1792224"/>
+            <a:ext cx="2170100" cy="475488"/>
           </a:xfrm>
           <a:prstGeom prst="rect">
             <a:avLst/>
@@ -3452,37 +4803,37 @@
           <a:ln/>
         </p:spPr>
         <p:txBody>
-          <a:bodyPr wrap="square" rtlCol="0" anchor="ctr"/>
-          <a:lstStyle/>
-          <a:p>
-            <a:pPr algn="ctr" indent="0" marL="0">
+          <a:bodyPr wrap="square" rtlCol="0" anchor="t"/>
+          <a:lstStyle/>
+          <a:p>
+            <a:pPr indent="0" marL="0">
               <a:buNone/>
             </a:pPr>
             <a:r>
-              <a:rPr lang="en-US" sz="3000" b="1" dirty="0">
-                <a:solidFill>
-                  <a:srgbClr val="0B5FA5"/>
-                </a:solidFill>
-                <a:latin typeface="Segoe UI" pitchFamily="34" charset="0"/>
-                <a:ea typeface="Segoe UI" pitchFamily="34" charset="-122"/>
-                <a:cs typeface="Segoe UI" pitchFamily="34" charset="-120"/>
-              </a:rPr>
-              <a:t>3</a:t>
-            </a:r>
-            <a:endParaRPr lang="en-US" sz="3000" dirty="0"/>
-          </a:p>
-        </p:txBody>
-      </p:sp>
-      <p:sp>
-        <p:nvSpPr>
-          <p:cNvPr id="11" name="Text 9"/>
-          <p:cNvSpPr/>
-          <p:nvPr/>
-        </p:nvSpPr>
-        <p:spPr>
-          <a:xfrm>
-            <a:off x="3468548" y="5687568"/>
-            <a:ext cx="2444420" cy="384048"/>
+              <a:rPr lang="en-US" sz="1450" b="1" dirty="0">
+                <a:solidFill>
+                  <a:srgbClr val="1A1A1E"/>
+                </a:solidFill>
+                <a:latin typeface="Segoe UI" pitchFamily="34" charset="0"/>
+                <a:ea typeface="Segoe UI" pitchFamily="34" charset="-122"/>
+                <a:cs typeface="Segoe UI" pitchFamily="34" charset="-120"/>
+              </a:rPr>
+              <a:t>3. It debugged what looked hopeless</a:t>
+            </a:r>
+            <a:endParaRPr lang="en-US" sz="1450" dirty="0"/>
+          </a:p>
+        </p:txBody>
+      </p:sp>
+      <p:sp>
+        <p:nvSpPr>
+          <p:cNvPr id="18" name="Text 16"/>
+          <p:cNvSpPr/>
+          <p:nvPr/>
+        </p:nvSpPr>
+        <p:spPr>
+          <a:xfrm>
+            <a:off x="6425032" y="2322576"/>
+            <a:ext cx="2170100" cy="731520"/>
           </a:xfrm>
           <a:prstGeom prst="rect">
             <a:avLst/>
@@ -3491,14 +4842,57 @@
           <a:ln/>
         </p:spPr>
         <p:txBody>
-          <a:bodyPr wrap="square" rtlCol="0" anchor="ctr"/>
-          <a:lstStyle/>
-          <a:p>
-            <a:pPr algn="ctr" indent="0" marL="0">
+          <a:bodyPr wrap="square" rtlCol="0" anchor="t"/>
+          <a:lstStyle/>
+          <a:p>
+            <a:pPr indent="0" marL="0">
               <a:buNone/>
             </a:pPr>
             <a:r>
-              <a:rPr lang="en-US" sz="1150" dirty="0">
+              <a:rPr lang="en-US" sz="1200" i="1" dirty="0">
+                <a:solidFill>
+                  <a:srgbClr val="71717A"/>
+                </a:solidFill>
+                <a:latin typeface="Segoe UI" pitchFamily="34" charset="0"/>
+                <a:ea typeface="Segoe UI" pitchFamily="34" charset="-122"/>
+                <a:cs typeface="Segoe UI" pitchFamily="34" charset="-120"/>
+              </a:rPr>
+              <a:t>"The emulator has no internet."</a:t>
+            </a:r>
+            <a:endParaRPr lang="en-US" sz="1200" dirty="0"/>
+          </a:p>
+        </p:txBody>
+      </p:sp>
+      <p:sp>
+        <p:nvSpPr>
+          <p:cNvPr id="19" name="Text 17"/>
+          <p:cNvSpPr/>
+          <p:nvPr/>
+        </p:nvSpPr>
+        <p:spPr>
+          <a:xfrm>
+            <a:off x="6425032" y="3090672"/>
+            <a:ext cx="2170100" cy="2103120"/>
+          </a:xfrm>
+          <a:prstGeom prst="rect">
+            <a:avLst/>
+          </a:prstGeom>
+          <a:noFill/>
+          <a:ln/>
+        </p:spPr>
+        <p:txBody>
+          <a:bodyPr wrap="square" rtlCol="0" anchor="t"/>
+          <a:lstStyle/>
+          <a:p>
+            <a:pPr marL="342900" indent="-342900">
+              <a:spcAft>
+                <a:spcPts val="600"/>
+              </a:spcAft>
+              <a:buSzPct val="100000"/>
+              <a:buChar char="•"/>
+            </a:pPr>
+            <a:r>
+              <a:rPr lang="en-US" sz="1200" dirty="0">
                 <a:solidFill>
                   <a:srgbClr val="3F3F46"/>
                 </a:solidFill>
@@ -3506,34 +4900,55 @@
                 <a:ea typeface="Segoe UI" pitchFamily="34" charset="-122"/>
                 <a:cs typeface="Segoe UI" pitchFamily="34" charset="-120"/>
               </a:rPr>
-              <a:t>green checks on the real APK</a:t>
-            </a:r>
-            <a:endParaRPr lang="en-US" sz="1150" dirty="0"/>
-          </a:p>
-        </p:txBody>
-      </p:sp>
-      <p:sp>
-        <p:nvSpPr>
-          <p:cNvPr id="12" name="Shape 10"/>
-          <p:cNvSpPr/>
-          <p:nvPr/>
-        </p:nvSpPr>
-        <p:spPr>
-          <a:xfrm>
-            <a:off x="6187288" y="5010912"/>
-            <a:ext cx="2627300" cy="1143000"/>
+              <a:t>It checked what actually worked and what did not, and proved only name lookup was blocked</a:t>
+            </a:r>
+            <a:endParaRPr lang="en-US" sz="1200" dirty="0"/>
+          </a:p>
+          <a:p>
+            <a:pPr marL="342900" indent="-342900">
+              <a:spcAft>
+                <a:spcPts val="600"/>
+              </a:spcAft>
+              <a:buSzPct val="100000"/>
+              <a:buChar char="•"/>
+            </a:pPr>
+            <a:r>
+              <a:rPr lang="en-US" sz="1200" dirty="0">
+                <a:solidFill>
+                  <a:srgbClr val="3F3F46"/>
+                </a:solidFill>
+                <a:latin typeface="Segoe UI" pitchFamily="34" charset="0"/>
+                <a:ea typeface="Segoe UI" pitchFamily="34" charset="-122"/>
+                <a:cs typeface="Segoe UI" pitchFamily="34" charset="-120"/>
+              </a:rPr>
+              <a:t>Then it built the small workaround that fixed it - about an hour, instead of giving up and buying handsets</a:t>
+            </a:r>
+            <a:endParaRPr lang="en-US" sz="1200" dirty="0"/>
+          </a:p>
+        </p:txBody>
+      </p:sp>
+      <p:sp>
+        <p:nvSpPr>
+          <p:cNvPr id="20" name="Shape 18"/>
+          <p:cNvSpPr/>
+          <p:nvPr/>
+        </p:nvSpPr>
+        <p:spPr>
+          <a:xfrm>
+            <a:off x="9052331" y="1627632"/>
+            <a:ext cx="2572436" cy="3703320"/>
           </a:xfrm>
           <a:prstGeom prst="roundRect">
             <a:avLst>
-              <a:gd name="adj" fmla="val 6400"/>
+              <a:gd name="adj" fmla="val 2844"/>
             </a:avLst>
           </a:prstGeom>
           <a:solidFill>
-            <a:srgbClr val="E8F0F8"/>
+            <a:srgbClr val="F6F7F9"/>
           </a:solidFill>
           <a:ln w="12700">
             <a:solidFill>
-              <a:srgbClr val="E8F0F8"/>
+              <a:srgbClr val="D9D9DE"/>
             </a:solidFill>
             <a:prstDash val="solid"/>
           </a:ln>
@@ -3541,104 +4956,24 @@
       </p:sp>
       <p:sp>
         <p:nvSpPr>
-          <p:cNvPr id="13" name="Text 11"/>
-          <p:cNvSpPr/>
-          <p:nvPr/>
-        </p:nvSpPr>
-        <p:spPr>
-          <a:xfrm>
-            <a:off x="6187288" y="5138928"/>
-            <a:ext cx="2627300" cy="548640"/>
+          <p:cNvPr id="21" name="Shape 19"/>
+          <p:cNvSpPr/>
+          <p:nvPr/>
+        </p:nvSpPr>
+        <p:spPr>
+          <a:xfrm>
+            <a:off x="9052331" y="1627632"/>
+            <a:ext cx="2572436" cy="54864"/>
           </a:xfrm>
           <a:prstGeom prst="rect">
             <a:avLst/>
           </a:prstGeom>
-          <a:noFill/>
-          <a:ln/>
-        </p:spPr>
-        <p:txBody>
-          <a:bodyPr wrap="square" rtlCol="0" anchor="ctr"/>
-          <a:lstStyle/>
-          <a:p>
-            <a:pPr algn="ctr" indent="0" marL="0">
-              <a:buNone/>
-            </a:pPr>
-            <a:r>
-              <a:rPr lang="en-US" sz="3000" b="1" dirty="0">
-                <a:solidFill>
-                  <a:srgbClr val="0B5FA5"/>
-                </a:solidFill>
-                <a:latin typeface="Segoe UI" pitchFamily="34" charset="0"/>
-                <a:ea typeface="Segoe UI" pitchFamily="34" charset="-122"/>
-                <a:cs typeface="Segoe UI" pitchFamily="34" charset="-120"/>
-              </a:rPr>
-              <a:t>1</a:t>
-            </a:r>
-            <a:endParaRPr lang="en-US" sz="3000" dirty="0"/>
-          </a:p>
-        </p:txBody>
-      </p:sp>
-      <p:sp>
-        <p:nvSpPr>
-          <p:cNvPr id="14" name="Text 12"/>
-          <p:cNvSpPr/>
-          <p:nvPr/>
-        </p:nvSpPr>
-        <p:spPr>
-          <a:xfrm>
-            <a:off x="6278728" y="5687568"/>
-            <a:ext cx="2444420" cy="384048"/>
-          </a:xfrm>
-          <a:prstGeom prst="rect">
-            <a:avLst/>
-          </a:prstGeom>
-          <a:noFill/>
-          <a:ln/>
-        </p:spPr>
-        <p:txBody>
-          <a:bodyPr wrap="square" rtlCol="0" anchor="ctr"/>
-          <a:lstStyle/>
-          <a:p>
-            <a:pPr algn="ctr" indent="0" marL="0">
-              <a:buNone/>
-            </a:pPr>
-            <a:r>
-              <a:rPr lang="en-US" sz="1150" dirty="0">
-                <a:solidFill>
-                  <a:srgbClr val="3F3F46"/>
-                </a:solidFill>
-                <a:latin typeface="Segoe UI" pitchFamily="34" charset="0"/>
-                <a:ea typeface="Segoe UI" pitchFamily="34" charset="-122"/>
-                <a:cs typeface="Segoe UI" pitchFamily="34" charset="-120"/>
-              </a:rPr>
-              <a:t>backend endpoint designed, built and deployed</a:t>
-            </a:r>
-            <a:endParaRPr lang="en-US" sz="1150" dirty="0"/>
-          </a:p>
-        </p:txBody>
-      </p:sp>
-      <p:sp>
-        <p:nvSpPr>
-          <p:cNvPr id="15" name="Shape 13"/>
-          <p:cNvSpPr/>
-          <p:nvPr/>
-        </p:nvSpPr>
-        <p:spPr>
-          <a:xfrm>
-            <a:off x="8997467" y="5010912"/>
-            <a:ext cx="2627300" cy="1143000"/>
-          </a:xfrm>
-          <a:prstGeom prst="roundRect">
-            <a:avLst>
-              <a:gd name="adj" fmla="val 6400"/>
-            </a:avLst>
-          </a:prstGeom>
           <a:solidFill>
-            <a:srgbClr val="E8F0F8"/>
+            <a:srgbClr val="0B5FA5"/>
           </a:solidFill>
           <a:ln w="12700">
             <a:solidFill>
-              <a:srgbClr val="E8F0F8"/>
+              <a:srgbClr val="0B5FA5"/>
             </a:solidFill>
             <a:prstDash val="solid"/>
           </a:ln>
@@ -3646,14 +4981,14 @@
       </p:sp>
       <p:sp>
         <p:nvSpPr>
-          <p:cNvPr id="16" name="Text 14"/>
-          <p:cNvSpPr/>
-          <p:nvPr/>
-        </p:nvSpPr>
-        <p:spPr>
-          <a:xfrm>
-            <a:off x="8997467" y="5138928"/>
-            <a:ext cx="2627300" cy="548640"/>
+          <p:cNvPr id="22" name="Text 20"/>
+          <p:cNvSpPr/>
+          <p:nvPr/>
+        </p:nvSpPr>
+        <p:spPr>
+          <a:xfrm>
+            <a:off x="9253499" y="1792224"/>
+            <a:ext cx="2170100" cy="475488"/>
           </a:xfrm>
           <a:prstGeom prst="rect">
             <a:avLst/>
@@ -3662,37 +4997,37 @@
           <a:ln/>
         </p:spPr>
         <p:txBody>
-          <a:bodyPr wrap="square" rtlCol="0" anchor="ctr"/>
-          <a:lstStyle/>
-          <a:p>
-            <a:pPr algn="ctr" indent="0" marL="0">
+          <a:bodyPr wrap="square" rtlCol="0" anchor="t"/>
+          <a:lstStyle/>
+          <a:p>
+            <a:pPr indent="0" marL="0">
               <a:buNone/>
             </a:pPr>
             <a:r>
-              <a:rPr lang="en-US" sz="3000" b="1" dirty="0">
-                <a:solidFill>
-                  <a:srgbClr val="0B5FA5"/>
-                </a:solidFill>
-                <a:latin typeface="Segoe UI" pitchFamily="34" charset="0"/>
-                <a:ea typeface="Segoe UI" pitchFamily="34" charset="-122"/>
-                <a:cs typeface="Segoe UI" pitchFamily="34" charset="-120"/>
-              </a:rPr>
-              <a:t>2 lines</a:t>
-            </a:r>
-            <a:endParaRPr lang="en-US" sz="3000" dirty="0"/>
-          </a:p>
-        </p:txBody>
-      </p:sp>
-      <p:sp>
-        <p:nvSpPr>
-          <p:cNvPr id="17" name="Text 15"/>
-          <p:cNvSpPr/>
-          <p:nvPr/>
-        </p:nvSpPr>
-        <p:spPr>
-          <a:xfrm>
-            <a:off x="9088907" y="5687568"/>
-            <a:ext cx="2444420" cy="384048"/>
+              <a:rPr lang="en-US" sz="1450" b="1" dirty="0">
+                <a:solidFill>
+                  <a:srgbClr val="1A1A1E"/>
+                </a:solidFill>
+                <a:latin typeface="Segoe UI" pitchFamily="34" charset="0"/>
+                <a:ea typeface="Segoe UI" pitchFamily="34" charset="-122"/>
+                <a:cs typeface="Segoe UI" pitchFamily="34" charset="-120"/>
+              </a:rPr>
+              <a:t>4. It writes it down as it goes</a:t>
+            </a:r>
+            <a:endParaRPr lang="en-US" sz="1450" dirty="0"/>
+          </a:p>
+        </p:txBody>
+      </p:sp>
+      <p:sp>
+        <p:nvSpPr>
+          <p:cNvPr id="23" name="Text 21"/>
+          <p:cNvSpPr/>
+          <p:nvPr/>
+        </p:nvSpPr>
+        <p:spPr>
+          <a:xfrm>
+            <a:off x="9253499" y="2322576"/>
+            <a:ext cx="2170100" cy="731520"/>
           </a:xfrm>
           <a:prstGeom prst="rect">
             <a:avLst/>
@@ -3701,24 +5036,179 @@
           <a:ln/>
         </p:spPr>
         <p:txBody>
+          <a:bodyPr wrap="square" rtlCol="0" anchor="t"/>
+          <a:lstStyle/>
+          <a:p>
+            <a:pPr indent="0" marL="0">
+              <a:buNone/>
+            </a:pPr>
+            <a:r>
+              <a:rPr lang="en-US" sz="1200" i="1" dirty="0">
+                <a:solidFill>
+                  <a:srgbClr val="71717A"/>
+                </a:solidFill>
+                <a:latin typeface="Segoe UI" pitchFamily="34" charset="0"/>
+                <a:ea typeface="Segoe UI" pitchFamily="34" charset="-122"/>
+                <a:cs typeface="Segoe UI" pitchFamily="34" charset="-120"/>
+              </a:rPr>
+              <a:t>Normally the last job, usually skipped.</a:t>
+            </a:r>
+            <a:endParaRPr lang="en-US" sz="1200" dirty="0"/>
+          </a:p>
+        </p:txBody>
+      </p:sp>
+      <p:sp>
+        <p:nvSpPr>
+          <p:cNvPr id="24" name="Text 22"/>
+          <p:cNvSpPr/>
+          <p:nvPr/>
+        </p:nvSpPr>
+        <p:spPr>
+          <a:xfrm>
+            <a:off x="9253499" y="3090672"/>
+            <a:ext cx="2170100" cy="2103120"/>
+          </a:xfrm>
+          <a:prstGeom prst="rect">
+            <a:avLst/>
+          </a:prstGeom>
+          <a:noFill/>
+          <a:ln/>
+        </p:spPr>
+        <p:txBody>
+          <a:bodyPr wrap="square" rtlCol="0" anchor="t"/>
+          <a:lstStyle/>
+          <a:p>
+            <a:pPr marL="342900" indent="-342900">
+              <a:spcAft>
+                <a:spcPts val="600"/>
+              </a:spcAft>
+              <a:buSzPct val="100000"/>
+              <a:buChar char="•"/>
+            </a:pPr>
+            <a:r>
+              <a:rPr lang="en-US" sz="1200" dirty="0">
+                <a:solidFill>
+                  <a:srgbClr val="3F3F46"/>
+                </a:solidFill>
+                <a:latin typeface="Segoe UI" pitchFamily="34" charset="0"/>
+                <a:ea typeface="Segoe UI" pitchFamily="34" charset="-122"/>
+                <a:cs typeface="Segoe UI" pitchFamily="34" charset="-120"/>
+              </a:rPr>
+              <a:t>Every dead end went into the README while it was fresh</a:t>
+            </a:r>
+            <a:endParaRPr lang="en-US" sz="1200" dirty="0"/>
+          </a:p>
+          <a:p>
+            <a:pPr marL="342900" indent="-342900">
+              <a:spcAft>
+                <a:spcPts val="600"/>
+              </a:spcAft>
+              <a:buSzPct val="100000"/>
+              <a:buChar char="•"/>
+            </a:pPr>
+            <a:r>
+              <a:rPr lang="en-US" sz="1200" dirty="0">
+                <a:solidFill>
+                  <a:srgbClr val="3F3F46"/>
+                </a:solidFill>
+                <a:latin typeface="Segoe UI" pitchFamily="34" charset="0"/>
+                <a:ea typeface="Segoe UI" pitchFamily="34" charset="-122"/>
+                <a:cs typeface="Segoe UI" pitchFamily="34" charset="-120"/>
+              </a:rPr>
+              <a:t>The next person does not repeat the same day of trial and error</a:t>
+            </a:r>
+            <a:endParaRPr lang="en-US" sz="1200" dirty="0"/>
+          </a:p>
+        </p:txBody>
+      </p:sp>
+      <p:sp>
+        <p:nvSpPr>
+          <p:cNvPr id="25" name="Shape 23"/>
+          <p:cNvSpPr/>
+          <p:nvPr/>
+        </p:nvSpPr>
+        <p:spPr>
+          <a:xfrm>
+            <a:off x="566928" y="5559552"/>
+            <a:ext cx="11057839" cy="685800"/>
+          </a:xfrm>
+          <a:prstGeom prst="roundRect">
+            <a:avLst>
+              <a:gd name="adj" fmla="val 8000"/>
+            </a:avLst>
+          </a:prstGeom>
+          <a:solidFill>
+            <a:srgbClr val="FDF6E7"/>
+          </a:solidFill>
+          <a:ln w="12700">
+            <a:solidFill>
+              <a:srgbClr val="EBD9AE"/>
+            </a:solidFill>
+            <a:prstDash val="solid"/>
+          </a:ln>
+        </p:spPr>
+      </p:sp>
+      <p:sp>
+        <p:nvSpPr>
+          <p:cNvPr id="26" name="Shape 24"/>
+          <p:cNvSpPr/>
+          <p:nvPr/>
+        </p:nvSpPr>
+        <p:spPr>
+          <a:xfrm>
+            <a:off x="566928" y="5559552"/>
+            <a:ext cx="64008" cy="685800"/>
+          </a:xfrm>
+          <a:prstGeom prst="rect">
+            <a:avLst/>
+          </a:prstGeom>
+          <a:solidFill>
+            <a:srgbClr val="B45309"/>
+          </a:solidFill>
+          <a:ln w="12700">
+            <a:solidFill>
+              <a:srgbClr val="B45309"/>
+            </a:solidFill>
+            <a:prstDash val="solid"/>
+          </a:ln>
+        </p:spPr>
+      </p:sp>
+      <p:sp>
+        <p:nvSpPr>
+          <p:cNvPr id="27" name="Text 25"/>
+          <p:cNvSpPr/>
+          <p:nvPr/>
+        </p:nvSpPr>
+        <p:spPr>
+          <a:xfrm>
+            <a:off x="822960" y="5559552"/>
+            <a:ext cx="10600639" cy="685800"/>
+          </a:xfrm>
+          <a:prstGeom prst="rect">
+            <a:avLst/>
+          </a:prstGeom>
+          <a:noFill/>
+          <a:ln/>
+        </p:spPr>
+        <p:txBody>
           <a:bodyPr wrap="square" rtlCol="0" anchor="ctr"/>
           <a:lstStyle/>
           <a:p>
-            <a:pPr algn="ctr" indent="0" marL="0">
+            <a:pPr indent="0" marL="0">
               <a:buNone/>
             </a:pPr>
             <a:r>
-              <a:rPr lang="en-US" sz="1150" dirty="0">
-                <a:solidFill>
-                  <a:srgbClr val="3F3F46"/>
-                </a:solidFill>
-                <a:latin typeface="Segoe UI" pitchFamily="34" charset="0"/>
-                <a:ea typeface="Segoe UI" pitchFamily="34" charset="-122"/>
-                <a:cs typeface="Segoe UI" pitchFamily="34" charset="-120"/>
-              </a:rPr>
-              <a:t>the app change that made selectors stable</a:t>
-            </a:r>
-            <a:endParaRPr lang="en-US" sz="1150" dirty="0"/>
+              <a:rPr lang="en-US" sz="1350" dirty="0">
+                <a:solidFill>
+                  <a:srgbClr val="1A1A1E"/>
+                </a:solidFill>
+                <a:latin typeface="Segoe UI" pitchFamily="34" charset="0"/>
+                <a:ea typeface="Segoe UI" pitchFamily="34" charset="-122"/>
+                <a:cs typeface="Segoe UI" pitchFamily="34" charset="-120"/>
+              </a:rPr>
+              <a:t>Put simply: a person is fast at deciding what matters and slow at everything around it. The agent is the other way round - which is why the pair is quicker than either alone.</a:t>
+            </a:r>
+            <a:endParaRPr lang="en-US" sz="1350" dirty="0"/>
           </a:p>
         </p:txBody>
       </p:sp>
@@ -3906,13 +5396,13 @@
             <a:r>
               <a:rPr lang="en-US" sz="1500" b="1" dirty="0">
                 <a:solidFill>
-                  <a:srgbClr val="0B5FA5"/>
-                </a:solidFill>
-                <a:latin typeface="Segoe UI" pitchFamily="34" charset="0"/>
-                <a:ea typeface="Segoe UI" pitchFamily="34" charset="-122"/>
-                <a:cs typeface="Segoe UI" pitchFamily="34" charset="-120"/>
-              </a:rPr>
-              <a:t>Decisions we kept</a:t>
+                  <a:srgbClr val="15803D"/>
+                </a:solidFill>
+                <a:latin typeface="Segoe UI" pitchFamily="34" charset="0"/>
+                <a:ea typeface="Segoe UI" pitchFamily="34" charset="-122"/>
+                <a:cs typeface="Segoe UI" pitchFamily="34" charset="-120"/>
+              </a:rPr>
+              <a:t>The agent does the work</a:t>
             </a:r>
             <a:endParaRPr lang="en-US" sz="1500" dirty="0"/>
           </a:p>
@@ -3955,7 +5445,7 @@
                 <a:ea typeface="Segoe UI" pitchFamily="34" charset="-122"/>
                 <a:cs typeface="Segoe UI" pitchFamily="34" charset="-120"/>
               </a:rPr>
-              <a:t>Which phone number may receive a real SMS on every run</a:t>
+              <a:t>Writes the tests and runs them on the device</a:t>
             </a:r>
             <a:endParaRPr lang="en-US" sz="1300" dirty="0"/>
           </a:p>
@@ -3976,7 +5466,7 @@
                 <a:ea typeface="Segoe UI" pitchFamily="34" charset="-122"/>
                 <a:cs typeface="Segoe UI" pitchFamily="34" charset="-120"/>
               </a:rPr>
-              <a:t>That the SMS endpoint is gated by a flag and never enabled on production</a:t>
+              <a:t>Reads what failed and fixes it</a:t>
             </a:r>
             <a:endParaRPr lang="en-US" sz="1300" dirty="0"/>
           </a:p>
@@ -3997,7 +5487,7 @@
                 <a:ea typeface="Segoe UI" pitchFamily="34" charset="-122"/>
                 <a:cs typeface="Segoe UI" pitchFamily="34" charset="-120"/>
               </a:rPr>
-              <a:t>Which account is safe to bind and re-bind on UAT</a:t>
+              <a:t>Works out why the environment misbehaves</a:t>
             </a:r>
             <a:endParaRPr lang="en-US" sz="1300" dirty="0"/>
           </a:p>
@@ -4018,28 +5508,7 @@
                 <a:ea typeface="Segoe UI" pitchFamily="34" charset="-122"/>
                 <a:cs typeface="Segoe UI" pitchFamily="34" charset="-120"/>
               </a:rPr>
-              <a:t>Whether a failure is the test, the app or the environment</a:t>
-            </a:r>
-            <a:endParaRPr lang="en-US" sz="1300" dirty="0"/>
-          </a:p>
-          <a:p>
-            <a:pPr marL="342900" indent="-342900">
-              <a:spcAft>
-                <a:spcPts val="700"/>
-              </a:spcAft>
-              <a:buSzPct val="100000"/>
-              <a:buChar char="•"/>
-            </a:pPr>
-            <a:r>
-              <a:rPr lang="en-US" sz="1300" dirty="0">
-                <a:solidFill>
-                  <a:srgbClr val="3F3F46"/>
-                </a:solidFill>
-                <a:latin typeface="Segoe UI" pitchFamily="34" charset="0"/>
-                <a:ea typeface="Segoe UI" pitchFamily="34" charset="-122"/>
-                <a:cs typeface="Segoe UI" pitchFamily="34" charset="-120"/>
-              </a:rPr>
-              <a:t>Code review before anything merges - it is application code</a:t>
+              <a:t>Writes down what it learned</a:t>
             </a:r>
             <a:endParaRPr lang="en-US" sz="1300" dirty="0"/>
           </a:p>
@@ -4099,13 +5568,13 @@
             <a:r>
               <a:rPr lang="en-US" sz="1500" b="1" dirty="0">
                 <a:solidFill>
-                  <a:srgbClr val="15803D"/>
-                </a:solidFill>
-                <a:latin typeface="Segoe UI" pitchFamily="34" charset="0"/>
-                <a:ea typeface="Segoe UI" pitchFamily="34" charset="-122"/>
-                <a:cs typeface="Segoe UI" pitchFamily="34" charset="-120"/>
-              </a:rPr>
-              <a:t>Guard rails that mattered</a:t>
+                  <a:srgbClr val="0B5FA5"/>
+                </a:solidFill>
+                <a:latin typeface="Segoe UI" pitchFamily="34" charset="0"/>
+                <a:ea typeface="Segoe UI" pitchFamily="34" charset="-122"/>
+                <a:cs typeface="Segoe UI" pitchFamily="34" charset="-120"/>
+              </a:rPr>
+              <a:t>We still decide</a:t>
             </a:r>
             <a:endParaRPr lang="en-US" sz="1500" dirty="0"/>
           </a:p>
@@ -4148,7 +5617,7 @@
                 <a:ea typeface="Segoe UI" pitchFamily="34" charset="-122"/>
                 <a:cs typeface="Segoe UI" pitchFamily="34" charset="-120"/>
               </a:rPr>
-              <a:t>No production writes, ever</a:t>
+              <a:t>Which phone number may receive a real SMS on every run</a:t>
             </a:r>
             <a:endParaRPr lang="en-US" sz="1300" dirty="0"/>
           </a:p>
@@ -4169,7 +5638,7 @@
                 <a:ea typeface="Segoe UI" pitchFamily="34" charset="-122"/>
                 <a:cs typeface="Segoe UI" pitchFamily="34" charset="-120"/>
               </a:rPr>
-              <a:t>Credentials only in a git-ignored .env</a:t>
+              <a:t>That the SMS endpoint stays switched off outside SIT and UAT</a:t>
             </a:r>
             <a:endParaRPr lang="en-US" sz="1300" dirty="0"/>
           </a:p>
@@ -4190,7 +5659,7 @@
                 <a:ea typeface="Segoe UI" pitchFamily="34" charset="-122"/>
                 <a:cs typeface="Segoe UI" pitchFamily="34" charset="-120"/>
               </a:rPr>
-              <a:t>Phone numbers masked in every log and report</a:t>
+              <a:t>Whether a failure is the test, the app or the environment</a:t>
             </a:r>
             <a:endParaRPr lang="en-US" sz="1300" dirty="0"/>
           </a:p>
@@ -4211,28 +5680,7 @@
                 <a:ea typeface="Segoe UI" pitchFamily="34" charset="-122"/>
                 <a:cs typeface="Segoe UI" pitchFamily="34" charset="-120"/>
               </a:rPr>
-              <a:t>Test data prefixed [AUTO-TEST] so it is obvious and cleanable</a:t>
-            </a:r>
-            <a:endParaRPr lang="en-US" sz="1300" dirty="0"/>
-          </a:p>
-          <a:p>
-            <a:pPr marL="342900" indent="-342900">
-              <a:spcAft>
-                <a:spcPts val="700"/>
-              </a:spcAft>
-              <a:buSzPct val="100000"/>
-              <a:buChar char="•"/>
-            </a:pPr>
-            <a:r>
-              <a:rPr lang="en-US" sz="1300" dirty="0">
-                <a:solidFill>
-                  <a:srgbClr val="3F3F46"/>
-                </a:solidFill>
-                <a:latin typeface="Segoe UI" pitchFamily="34" charset="0"/>
-                <a:ea typeface="Segoe UI" pitchFamily="34" charset="-122"/>
-                <a:cs typeface="Segoe UI" pitchFamily="34" charset="-120"/>
-              </a:rPr>
-              <a:t>Findings written into the README, not left in a chat log</a:t>
+              <a:t>Nothing merges without a review - it is application code</a:t>
             </a:r>
             <a:endParaRPr lang="en-US" sz="1300" dirty="0"/>
           </a:p>
@@ -8233,7 +9681,7 @@
                 <a:ea typeface="Segoe UI" pitchFamily="34" charset="-122"/>
                 <a:cs typeface="Segoe UI" pitchFamily="34" charset="-120"/>
               </a:rPr>
-              <a:t>The test speaks WebDriver; Appium translates it into Android automation on the device</a:t>
+              <a:t>Think of it as a tester holding the phone - tapping and typing on the real app, exactly as a driver would</a:t>
             </a:r>
             <a:endParaRPr lang="en-US" sz="1400" dirty="0"/>
           </a:p>
@@ -8261,41 +9709,14 @@
       </p:sp>
       <p:sp>
         <p:nvSpPr>
-          <p:cNvPr id="5" name="Shape 3"/>
+          <p:cNvPr id="5" name="Text 3"/>
           <p:cNvSpPr/>
           <p:nvPr/>
         </p:nvSpPr>
         <p:spPr>
           <a:xfrm>
             <a:off x="566928" y="1627632"/>
-            <a:ext cx="1962851" cy="960120"/>
-          </a:xfrm>
-          <a:prstGeom prst="roundRect">
-            <a:avLst>
-              <a:gd name="adj" fmla="val 7619"/>
-            </a:avLst>
-          </a:prstGeom>
-          <a:solidFill>
-            <a:srgbClr val="E8F0F8"/>
-          </a:solidFill>
-          <a:ln w="12700">
-            <a:solidFill>
-              <a:srgbClr val="C9DAEA"/>
-            </a:solidFill>
-            <a:prstDash val="solid"/>
-          </a:ln>
-        </p:spPr>
-      </p:sp>
-      <p:sp>
-        <p:nvSpPr>
-          <p:cNvPr id="6" name="Text 4"/>
-          <p:cNvSpPr/>
-          <p:nvPr/>
-        </p:nvSpPr>
-        <p:spPr>
-          <a:xfrm>
-            <a:off x="640080" y="1682496"/>
-            <a:ext cx="1816547" cy="850392"/>
+            <a:ext cx="4754880" cy="292608"/>
           </a:xfrm>
           <a:prstGeom prst="rect">
             <a:avLst/>
@@ -8307,11 +9728,11 @@
           <a:bodyPr wrap="square" rtlCol="0" anchor="ctr"/>
           <a:lstStyle/>
           <a:p>
-            <a:pPr algn="ctr" indent="0" marL="0">
+            <a:pPr indent="0" marL="0">
               <a:buNone/>
             </a:pPr>
             <a:r>
-              <a:rPr lang="en-US" sz="1200" b="1" dirty="0">
+              <a:rPr lang="en-US" sz="1500" b="1" dirty="0">
                 <a:solidFill>
                   <a:srgbClr val="1A1A1E"/>
                 </a:solidFill>
@@ -8319,205 +9740,25 @@
                 <a:ea typeface="Segoe UI" pitchFamily="34" charset="-122"/>
                 <a:cs typeface="Segoe UI" pitchFamily="34" charset="-120"/>
               </a:rPr>
-              <a:t>Spec file</a:t>
-            </a:r>
-            <a:endParaRPr lang="en-US" sz="1200" dirty="0"/>
-          </a:p>
-          <a:p>
-            <a:pPr algn="ctr" indent="0" marL="0">
-              <a:buNone/>
-            </a:pPr>
-            <a:r>
-              <a:rPr lang="en-US" sz="1200" b="1" dirty="0">
-                <a:solidFill>
-                  <a:srgbClr val="1A1A1E"/>
-                </a:solidFill>
-                <a:latin typeface="Segoe UI" pitchFamily="34" charset="0"/>
-                <a:ea typeface="Segoe UI" pitchFamily="34" charset="-122"/>
-                <a:cs typeface="Segoe UI" pitchFamily="34" charset="-120"/>
-              </a:rPr>
-              <a:t>(TypeScript)</a:t>
-            </a:r>
-            <a:endParaRPr lang="en-US" sz="1200" dirty="0"/>
-          </a:p>
-        </p:txBody>
-      </p:sp>
-      <p:sp>
-        <p:nvSpPr>
-          <p:cNvPr id="7" name="Text 5"/>
-          <p:cNvSpPr/>
-          <p:nvPr/>
-        </p:nvSpPr>
-        <p:spPr>
-          <a:xfrm>
-            <a:off x="2529779" y="1627632"/>
-            <a:ext cx="310896" cy="960120"/>
-          </a:xfrm>
-          <a:prstGeom prst="rect">
-            <a:avLst/>
-          </a:prstGeom>
-          <a:noFill/>
-          <a:ln/>
-        </p:spPr>
-        <p:txBody>
-          <a:bodyPr wrap="square" rtlCol="0" anchor="ctr"/>
-          <a:lstStyle/>
-          <a:p>
-            <a:pPr algn="ctr" indent="0" marL="0">
-              <a:buNone/>
-            </a:pPr>
-            <a:r>
-              <a:rPr lang="en-US" sz="1700" b="1" dirty="0">
-                <a:solidFill>
-                  <a:srgbClr val="71717A"/>
-                </a:solidFill>
-                <a:latin typeface="Segoe UI" pitchFamily="34" charset="0"/>
-                <a:ea typeface="Segoe UI" pitchFamily="34" charset="-122"/>
-                <a:cs typeface="Segoe UI" pitchFamily="34" charset="-120"/>
-              </a:rPr>
-              <a:t>→</a:t>
-            </a:r>
-            <a:endParaRPr lang="en-US" sz="1700" dirty="0"/>
-          </a:p>
-        </p:txBody>
-      </p:sp>
-      <p:sp>
-        <p:nvSpPr>
-          <p:cNvPr id="8" name="Shape 6"/>
-          <p:cNvSpPr/>
-          <p:nvPr/>
-        </p:nvSpPr>
-        <p:spPr>
-          <a:xfrm>
-            <a:off x="2840675" y="1627632"/>
-            <a:ext cx="1962851" cy="960120"/>
-          </a:xfrm>
-          <a:prstGeom prst="roundRect">
-            <a:avLst>
-              <a:gd name="adj" fmla="val 7619"/>
-            </a:avLst>
-          </a:prstGeom>
-          <a:solidFill>
-            <a:srgbClr val="E8F0F8"/>
-          </a:solidFill>
-          <a:ln w="12700">
-            <a:solidFill>
-              <a:srgbClr val="C9DAEA"/>
-            </a:solidFill>
-            <a:prstDash val="solid"/>
-          </a:ln>
-        </p:spPr>
-      </p:sp>
-      <p:sp>
-        <p:nvSpPr>
-          <p:cNvPr id="9" name="Text 7"/>
-          <p:cNvSpPr/>
-          <p:nvPr/>
-        </p:nvSpPr>
-        <p:spPr>
-          <a:xfrm>
-            <a:off x="2913827" y="1682496"/>
-            <a:ext cx="1816547" cy="850392"/>
-          </a:xfrm>
-          <a:prstGeom prst="rect">
-            <a:avLst/>
-          </a:prstGeom>
-          <a:noFill/>
-          <a:ln/>
-        </p:spPr>
-        <p:txBody>
-          <a:bodyPr wrap="square" rtlCol="0" anchor="ctr"/>
-          <a:lstStyle/>
-          <a:p>
-            <a:pPr algn="ctr" indent="0" marL="0">
-              <a:buNone/>
-            </a:pPr>
-            <a:r>
-              <a:rPr lang="en-US" sz="1200" b="1" dirty="0">
-                <a:solidFill>
-                  <a:srgbClr val="1A1A1E"/>
-                </a:solidFill>
-                <a:latin typeface="Segoe UI" pitchFamily="34" charset="0"/>
-                <a:ea typeface="Segoe UI" pitchFamily="34" charset="-122"/>
-                <a:cs typeface="Segoe UI" pitchFamily="34" charset="-120"/>
-              </a:rPr>
-              <a:t>WebdriverIO</a:t>
-            </a:r>
-            <a:endParaRPr lang="en-US" sz="1200" dirty="0"/>
-          </a:p>
-          <a:p>
-            <a:pPr algn="ctr" indent="0" marL="0">
-              <a:buNone/>
-            </a:pPr>
-            <a:r>
-              <a:rPr lang="en-US" sz="1200" b="1" dirty="0">
-                <a:solidFill>
-                  <a:srgbClr val="1A1A1E"/>
-                </a:solidFill>
-                <a:latin typeface="Segoe UI" pitchFamily="34" charset="0"/>
-                <a:ea typeface="Segoe UI" pitchFamily="34" charset="-122"/>
-                <a:cs typeface="Segoe UI" pitchFamily="34" charset="-120"/>
-              </a:rPr>
-              <a:t>runner</a:t>
-            </a:r>
-            <a:endParaRPr lang="en-US" sz="1200" dirty="0"/>
-          </a:p>
-        </p:txBody>
-      </p:sp>
-      <p:sp>
-        <p:nvSpPr>
-          <p:cNvPr id="10" name="Text 8"/>
-          <p:cNvSpPr/>
-          <p:nvPr/>
-        </p:nvSpPr>
-        <p:spPr>
-          <a:xfrm>
-            <a:off x="4803526" y="1627632"/>
-            <a:ext cx="310896" cy="960120"/>
-          </a:xfrm>
-          <a:prstGeom prst="rect">
-            <a:avLst/>
-          </a:prstGeom>
-          <a:noFill/>
-          <a:ln/>
-        </p:spPr>
-        <p:txBody>
-          <a:bodyPr wrap="square" rtlCol="0" anchor="ctr"/>
-          <a:lstStyle/>
-          <a:p>
-            <a:pPr algn="ctr" indent="0" marL="0">
-              <a:buNone/>
-            </a:pPr>
-            <a:r>
-              <a:rPr lang="en-US" sz="1700" b="1" dirty="0">
-                <a:solidFill>
-                  <a:srgbClr val="71717A"/>
-                </a:solidFill>
-                <a:latin typeface="Segoe UI" pitchFamily="34" charset="0"/>
-                <a:ea typeface="Segoe UI" pitchFamily="34" charset="-122"/>
-                <a:cs typeface="Segoe UI" pitchFamily="34" charset="-120"/>
-              </a:rPr>
-              <a:t>→</a:t>
-            </a:r>
-            <a:endParaRPr lang="en-US" sz="1700" dirty="0"/>
-          </a:p>
-        </p:txBody>
-      </p:sp>
-      <p:sp>
-        <p:nvSpPr>
-          <p:cNvPr id="11" name="Shape 9"/>
-          <p:cNvSpPr/>
-          <p:nvPr/>
-        </p:nvSpPr>
-        <p:spPr>
-          <a:xfrm>
-            <a:off x="5114422" y="1627632"/>
-            <a:ext cx="1962851" cy="960120"/>
-          </a:xfrm>
-          <a:prstGeom prst="roundRect">
-            <a:avLst>
-              <a:gd name="adj" fmla="val 7619"/>
-            </a:avLst>
+              <a:t>What we write down</a:t>
+            </a:r>
+            <a:endParaRPr lang="en-US" sz="1500" dirty="0"/>
+          </a:p>
+        </p:txBody>
+      </p:sp>
+      <p:sp>
+        <p:nvSpPr>
+          <p:cNvPr id="6" name="Shape 4"/>
+          <p:cNvSpPr/>
+          <p:nvPr/>
+        </p:nvSpPr>
+        <p:spPr>
+          <a:xfrm>
+            <a:off x="566928" y="2103120"/>
+            <a:ext cx="292608" cy="292608"/>
+          </a:xfrm>
+          <a:prstGeom prst="ellipse">
+            <a:avLst/>
           </a:prstGeom>
           <a:solidFill>
             <a:srgbClr val="0B5FA5"/>
@@ -8532,14 +9773,14 @@
       </p:sp>
       <p:sp>
         <p:nvSpPr>
-          <p:cNvPr id="12" name="Text 10"/>
-          <p:cNvSpPr/>
-          <p:nvPr/>
-        </p:nvSpPr>
-        <p:spPr>
-          <a:xfrm>
-            <a:off x="5187574" y="1682496"/>
-            <a:ext cx="1816547" cy="850392"/>
+          <p:cNvPr id="7" name="Text 5"/>
+          <p:cNvSpPr/>
+          <p:nvPr/>
+        </p:nvSpPr>
+        <p:spPr>
+          <a:xfrm>
+            <a:off x="566928" y="2103120"/>
+            <a:ext cx="292608" cy="292608"/>
           </a:xfrm>
           <a:prstGeom prst="rect">
             <a:avLst/>
@@ -8555,7 +9796,7 @@
               <a:buNone/>
             </a:pPr>
             <a:r>
-              <a:rPr lang="en-US" sz="1200" b="1" dirty="0">
+              <a:rPr lang="en-US" sz="1250" b="1" dirty="0">
                 <a:solidFill>
                   <a:srgbClr val="FFFFFF"/>
                 </a:solidFill>
@@ -8563,39 +9804,22 @@
                 <a:ea typeface="Segoe UI" pitchFamily="34" charset="-122"/>
                 <a:cs typeface="Segoe UI" pitchFamily="34" charset="-120"/>
               </a:rPr>
-              <a:t>Appium server</a:t>
-            </a:r>
-            <a:endParaRPr lang="en-US" sz="1200" dirty="0"/>
-          </a:p>
-          <a:p>
-            <a:pPr algn="ctr" indent="0" marL="0">
-              <a:buNone/>
-            </a:pPr>
-            <a:r>
-              <a:rPr lang="en-US" sz="1200" b="1" dirty="0">
-                <a:solidFill>
-                  <a:srgbClr val="FFFFFF"/>
-                </a:solidFill>
-                <a:latin typeface="Segoe UI" pitchFamily="34" charset="0"/>
-                <a:ea typeface="Segoe UI" pitchFamily="34" charset="-122"/>
-                <a:cs typeface="Segoe UI" pitchFamily="34" charset="-120"/>
-              </a:rPr>
-              <a:t>(HTTP, W3C)</a:t>
-            </a:r>
-            <a:endParaRPr lang="en-US" sz="1200" dirty="0"/>
-          </a:p>
-        </p:txBody>
-      </p:sp>
-      <p:sp>
-        <p:nvSpPr>
-          <p:cNvPr id="13" name="Text 11"/>
-          <p:cNvSpPr/>
-          <p:nvPr/>
-        </p:nvSpPr>
-        <p:spPr>
-          <a:xfrm>
-            <a:off x="7077273" y="1627632"/>
-            <a:ext cx="310896" cy="960120"/>
+              <a:t>1</a:t>
+            </a:r>
+            <a:endParaRPr lang="en-US" sz="1250" dirty="0"/>
+          </a:p>
+        </p:txBody>
+      </p:sp>
+      <p:sp>
+        <p:nvSpPr>
+          <p:cNvPr id="8" name="Text 6"/>
+          <p:cNvSpPr/>
+          <p:nvPr/>
+        </p:nvSpPr>
+        <p:spPr>
+          <a:xfrm>
+            <a:off x="969264" y="2084832"/>
+            <a:ext cx="4389120" cy="274320"/>
           </a:xfrm>
           <a:prstGeom prst="rect">
             <a:avLst/>
@@ -8607,46 +9831,46 @@
           <a:bodyPr wrap="square" rtlCol="0" anchor="ctr"/>
           <a:lstStyle/>
           <a:p>
-            <a:pPr algn="ctr" indent="0" marL="0">
+            <a:pPr indent="0" marL="0">
               <a:buNone/>
             </a:pPr>
             <a:r>
-              <a:rPr lang="en-US" sz="1700" b="1" dirty="0">
-                <a:solidFill>
-                  <a:srgbClr val="71717A"/>
-                </a:solidFill>
-                <a:latin typeface="Segoe UI" pitchFamily="34" charset="0"/>
-                <a:ea typeface="Segoe UI" pitchFamily="34" charset="-122"/>
-                <a:cs typeface="Segoe UI" pitchFamily="34" charset="-120"/>
-              </a:rPr>
-              <a:t>→</a:t>
-            </a:r>
-            <a:endParaRPr lang="en-US" sz="1700" dirty="0"/>
-          </a:p>
-        </p:txBody>
-      </p:sp>
-      <p:sp>
-        <p:nvSpPr>
-          <p:cNvPr id="14" name="Shape 12"/>
-          <p:cNvSpPr/>
-          <p:nvPr/>
-        </p:nvSpPr>
-        <p:spPr>
-          <a:xfrm>
-            <a:off x="7388169" y="1627632"/>
-            <a:ext cx="1962851" cy="960120"/>
+              <a:rPr lang="en-US" sz="1350" b="1" dirty="0">
+                <a:solidFill>
+                  <a:srgbClr val="1A1A1E"/>
+                </a:solidFill>
+                <a:latin typeface="Segoe UI" pitchFamily="34" charset="0"/>
+                <a:ea typeface="Segoe UI" pitchFamily="34" charset="-122"/>
+                <a:cs typeface="Segoe UI" pitchFamily="34" charset="-120"/>
+              </a:rPr>
+              <a:t>Type the user name</a:t>
+            </a:r>
+            <a:endParaRPr lang="en-US" sz="1350" dirty="0"/>
+          </a:p>
+        </p:txBody>
+      </p:sp>
+      <p:sp>
+        <p:nvSpPr>
+          <p:cNvPr id="9" name="Shape 7"/>
+          <p:cNvSpPr/>
+          <p:nvPr/>
+        </p:nvSpPr>
+        <p:spPr>
+          <a:xfrm>
+            <a:off x="969264" y="2395728"/>
+            <a:ext cx="4526280" cy="384048"/>
           </a:xfrm>
           <a:prstGeom prst="roundRect">
             <a:avLst>
-              <a:gd name="adj" fmla="val 7619"/>
+              <a:gd name="adj" fmla="val 11905"/>
             </a:avLst>
           </a:prstGeom>
           <a:solidFill>
-            <a:srgbClr val="E8F0F8"/>
+            <a:srgbClr val="1E1E24"/>
           </a:solidFill>
           <a:ln w="12700">
             <a:solidFill>
-              <a:srgbClr val="C9DAEA"/>
+              <a:srgbClr val="1E1E24"/>
             </a:solidFill>
             <a:prstDash val="solid"/>
           </a:ln>
@@ -8654,14 +9878,14 @@
       </p:sp>
       <p:sp>
         <p:nvSpPr>
-          <p:cNvPr id="15" name="Text 13"/>
-          <p:cNvSpPr/>
-          <p:nvPr/>
-        </p:nvSpPr>
-        <p:spPr>
-          <a:xfrm>
-            <a:off x="7461321" y="1682496"/>
-            <a:ext cx="1816547" cy="850392"/>
+          <p:cNvPr id="10" name="Text 8"/>
+          <p:cNvSpPr/>
+          <p:nvPr/>
+        </p:nvSpPr>
+        <p:spPr>
+          <a:xfrm>
+            <a:off x="1078992" y="2395728"/>
+            <a:ext cx="4343400" cy="384048"/>
           </a:xfrm>
           <a:prstGeom prst="rect">
             <a:avLst/>
@@ -8673,102 +9897,44 @@
           <a:bodyPr wrap="square" rtlCol="0" anchor="ctr"/>
           <a:lstStyle/>
           <a:p>
-            <a:pPr algn="ctr" indent="0" marL="0">
+            <a:pPr indent="0" marL="0">
               <a:buNone/>
             </a:pPr>
             <a:r>
-              <a:rPr lang="en-US" sz="1200" b="1" dirty="0">
-                <a:solidFill>
-                  <a:srgbClr val="1A1A1E"/>
-                </a:solidFill>
-                <a:latin typeface="Segoe UI" pitchFamily="34" charset="0"/>
-                <a:ea typeface="Segoe UI" pitchFamily="34" charset="-122"/>
-                <a:cs typeface="Segoe UI" pitchFamily="34" charset="-120"/>
-              </a:rPr>
-              <a:t>UiAutomator2</a:t>
-            </a:r>
-            <a:endParaRPr lang="en-US" sz="1200" dirty="0"/>
-          </a:p>
-          <a:p>
-            <a:pPr algn="ctr" indent="0" marL="0">
-              <a:buNone/>
-            </a:pPr>
-            <a:r>
-              <a:rPr lang="en-US" sz="1200" b="1" dirty="0">
-                <a:solidFill>
-                  <a:srgbClr val="1A1A1E"/>
-                </a:solidFill>
-                <a:latin typeface="Segoe UI" pitchFamily="34" charset="0"/>
-                <a:ea typeface="Segoe UI" pitchFamily="34" charset="-122"/>
-                <a:cs typeface="Segoe UI" pitchFamily="34" charset="-120"/>
-              </a:rPr>
-              <a:t>driver</a:t>
-            </a:r>
-            <a:endParaRPr lang="en-US" sz="1200" dirty="0"/>
-          </a:p>
-        </p:txBody>
-      </p:sp>
-      <p:sp>
-        <p:nvSpPr>
-          <p:cNvPr id="16" name="Text 14"/>
-          <p:cNvSpPr/>
-          <p:nvPr/>
-        </p:nvSpPr>
-        <p:spPr>
-          <a:xfrm>
-            <a:off x="9351020" y="1627632"/>
-            <a:ext cx="310896" cy="960120"/>
-          </a:xfrm>
-          <a:prstGeom prst="rect">
-            <a:avLst/>
-          </a:prstGeom>
-          <a:noFill/>
-          <a:ln/>
-        </p:spPr>
-        <p:txBody>
-          <a:bodyPr wrap="square" rtlCol="0" anchor="ctr"/>
-          <a:lstStyle/>
-          <a:p>
-            <a:pPr algn="ctr" indent="0" marL="0">
-              <a:buNone/>
-            </a:pPr>
-            <a:r>
-              <a:rPr lang="en-US" sz="1700" b="1" dirty="0">
-                <a:solidFill>
-                  <a:srgbClr val="71717A"/>
-                </a:solidFill>
-                <a:latin typeface="Segoe UI" pitchFamily="34" charset="0"/>
-                <a:ea typeface="Segoe UI" pitchFamily="34" charset="-122"/>
-                <a:cs typeface="Segoe UI" pitchFamily="34" charset="-120"/>
-              </a:rPr>
-              <a:t>→</a:t>
-            </a:r>
-            <a:endParaRPr lang="en-US" sz="1700" dirty="0"/>
-          </a:p>
-        </p:txBody>
-      </p:sp>
-      <p:sp>
-        <p:nvSpPr>
-          <p:cNvPr id="17" name="Shape 15"/>
-          <p:cNvSpPr/>
-          <p:nvPr/>
-        </p:nvSpPr>
-        <p:spPr>
-          <a:xfrm>
-            <a:off x="9661916" y="1627632"/>
-            <a:ext cx="1962851" cy="960120"/>
-          </a:xfrm>
-          <a:prstGeom prst="roundRect">
-            <a:avLst>
-              <a:gd name="adj" fmla="val 7619"/>
-            </a:avLst>
+              <a:rPr lang="en-US" sz="1000" dirty="0">
+                <a:solidFill>
+                  <a:srgbClr val="E8E8EC"/>
+                </a:solidFill>
+                <a:latin typeface="Consolas" pitchFamily="34" charset="0"/>
+                <a:ea typeface="Consolas" pitchFamily="34" charset="-122"/>
+                <a:cs typeface="Consolas" pitchFamily="34" charset="-120"/>
+              </a:rPr>
+              <a:t>$('login_email_input').setValue(user)</a:t>
+            </a:r>
+            <a:endParaRPr lang="en-US" sz="1000" dirty="0"/>
+          </a:p>
+        </p:txBody>
+      </p:sp>
+      <p:sp>
+        <p:nvSpPr>
+          <p:cNvPr id="11" name="Shape 9"/>
+          <p:cNvSpPr/>
+          <p:nvPr/>
+        </p:nvSpPr>
+        <p:spPr>
+          <a:xfrm>
+            <a:off x="566928" y="3035808"/>
+            <a:ext cx="292608" cy="292608"/>
+          </a:xfrm>
+          <a:prstGeom prst="ellipse">
+            <a:avLst/>
           </a:prstGeom>
           <a:solidFill>
-            <a:srgbClr val="E8F0F8"/>
+            <a:srgbClr val="0B5FA5"/>
           </a:solidFill>
           <a:ln w="12700">
             <a:solidFill>
-              <a:srgbClr val="C9DAEA"/>
+              <a:srgbClr val="0B5FA5"/>
             </a:solidFill>
             <a:prstDash val="solid"/>
           </a:ln>
@@ -8776,14 +9942,14 @@
       </p:sp>
       <p:sp>
         <p:nvSpPr>
-          <p:cNvPr id="18" name="Text 16"/>
-          <p:cNvSpPr/>
-          <p:nvPr/>
-        </p:nvSpPr>
-        <p:spPr>
-          <a:xfrm>
-            <a:off x="9735068" y="1682496"/>
-            <a:ext cx="1816547" cy="850392"/>
+          <p:cNvPr id="12" name="Text 10"/>
+          <p:cNvSpPr/>
+          <p:nvPr/>
+        </p:nvSpPr>
+        <p:spPr>
+          <a:xfrm>
+            <a:off x="566928" y="3035808"/>
+            <a:ext cx="292608" cy="292608"/>
           </a:xfrm>
           <a:prstGeom prst="rect">
             <a:avLst/>
@@ -8799,7 +9965,46 @@
               <a:buNone/>
             </a:pPr>
             <a:r>
-              <a:rPr lang="en-US" sz="1200" b="1" dirty="0">
+              <a:rPr lang="en-US" sz="1250" b="1" dirty="0">
+                <a:solidFill>
+                  <a:srgbClr val="FFFFFF"/>
+                </a:solidFill>
+                <a:latin typeface="Segoe UI" pitchFamily="34" charset="0"/>
+                <a:ea typeface="Segoe UI" pitchFamily="34" charset="-122"/>
+                <a:cs typeface="Segoe UI" pitchFamily="34" charset="-120"/>
+              </a:rPr>
+              <a:t>2</a:t>
+            </a:r>
+            <a:endParaRPr lang="en-US" sz="1250" dirty="0"/>
+          </a:p>
+        </p:txBody>
+      </p:sp>
+      <p:sp>
+        <p:nvSpPr>
+          <p:cNvPr id="13" name="Text 11"/>
+          <p:cNvSpPr/>
+          <p:nvPr/>
+        </p:nvSpPr>
+        <p:spPr>
+          <a:xfrm>
+            <a:off x="969264" y="3017520"/>
+            <a:ext cx="4389120" cy="274320"/>
+          </a:xfrm>
+          <a:prstGeom prst="rect">
+            <a:avLst/>
+          </a:prstGeom>
+          <a:noFill/>
+          <a:ln/>
+        </p:spPr>
+        <p:txBody>
+          <a:bodyPr wrap="square" rtlCol="0" anchor="ctr"/>
+          <a:lstStyle/>
+          <a:p>
+            <a:pPr indent="0" marL="0">
+              <a:buNone/>
+            </a:pPr>
+            <a:r>
+              <a:rPr lang="en-US" sz="1350" b="1" dirty="0">
                 <a:solidFill>
                   <a:srgbClr val="1A1A1E"/>
                 </a:solidFill>
@@ -8807,39 +10012,152 @@
                 <a:ea typeface="Segoe UI" pitchFamily="34" charset="-122"/>
                 <a:cs typeface="Segoe UI" pitchFamily="34" charset="-120"/>
               </a:rPr>
-              <a:t>Emulator or</a:t>
-            </a:r>
-            <a:endParaRPr lang="en-US" sz="1200" dirty="0"/>
-          </a:p>
+              <a:t>Type the password</a:t>
+            </a:r>
+            <a:endParaRPr lang="en-US" sz="1350" dirty="0"/>
+          </a:p>
+        </p:txBody>
+      </p:sp>
+      <p:sp>
+        <p:nvSpPr>
+          <p:cNvPr id="14" name="Shape 12"/>
+          <p:cNvSpPr/>
+          <p:nvPr/>
+        </p:nvSpPr>
+        <p:spPr>
+          <a:xfrm>
+            <a:off x="969264" y="3328416"/>
+            <a:ext cx="4526280" cy="384048"/>
+          </a:xfrm>
+          <a:prstGeom prst="roundRect">
+            <a:avLst>
+              <a:gd name="adj" fmla="val 11905"/>
+            </a:avLst>
+          </a:prstGeom>
+          <a:solidFill>
+            <a:srgbClr val="1E1E24"/>
+          </a:solidFill>
+          <a:ln w="12700">
+            <a:solidFill>
+              <a:srgbClr val="1E1E24"/>
+            </a:solidFill>
+            <a:prstDash val="solid"/>
+          </a:ln>
+        </p:spPr>
+      </p:sp>
+      <p:sp>
+        <p:nvSpPr>
+          <p:cNvPr id="15" name="Text 13"/>
+          <p:cNvSpPr/>
+          <p:nvPr/>
+        </p:nvSpPr>
+        <p:spPr>
+          <a:xfrm>
+            <a:off x="1078992" y="3328416"/>
+            <a:ext cx="4343400" cy="384048"/>
+          </a:xfrm>
+          <a:prstGeom prst="rect">
+            <a:avLst/>
+          </a:prstGeom>
+          <a:noFill/>
+          <a:ln/>
+        </p:spPr>
+        <p:txBody>
+          <a:bodyPr wrap="square" rtlCol="0" anchor="ctr"/>
+          <a:lstStyle/>
+          <a:p>
+            <a:pPr indent="0" marL="0">
+              <a:buNone/>
+            </a:pPr>
+            <a:r>
+              <a:rPr lang="en-US" sz="1000" dirty="0">
+                <a:solidFill>
+                  <a:srgbClr val="E8E8EC"/>
+                </a:solidFill>
+                <a:latin typeface="Consolas" pitchFamily="34" charset="0"/>
+                <a:ea typeface="Consolas" pitchFamily="34" charset="-122"/>
+                <a:cs typeface="Consolas" pitchFamily="34" charset="-120"/>
+              </a:rPr>
+              <a:t>$('login_password_input').setValue(pass)</a:t>
+            </a:r>
+            <a:endParaRPr lang="en-US" sz="1000" dirty="0"/>
+          </a:p>
+        </p:txBody>
+      </p:sp>
+      <p:sp>
+        <p:nvSpPr>
+          <p:cNvPr id="16" name="Shape 14"/>
+          <p:cNvSpPr/>
+          <p:nvPr/>
+        </p:nvSpPr>
+        <p:spPr>
+          <a:xfrm>
+            <a:off x="566928" y="3968496"/>
+            <a:ext cx="292608" cy="292608"/>
+          </a:xfrm>
+          <a:prstGeom prst="ellipse">
+            <a:avLst/>
+          </a:prstGeom>
+          <a:solidFill>
+            <a:srgbClr val="0B5FA5"/>
+          </a:solidFill>
+          <a:ln w="12700">
+            <a:solidFill>
+              <a:srgbClr val="0B5FA5"/>
+            </a:solidFill>
+            <a:prstDash val="solid"/>
+          </a:ln>
+        </p:spPr>
+      </p:sp>
+      <p:sp>
+        <p:nvSpPr>
+          <p:cNvPr id="17" name="Text 15"/>
+          <p:cNvSpPr/>
+          <p:nvPr/>
+        </p:nvSpPr>
+        <p:spPr>
+          <a:xfrm>
+            <a:off x="566928" y="3968496"/>
+            <a:ext cx="292608" cy="292608"/>
+          </a:xfrm>
+          <a:prstGeom prst="rect">
+            <a:avLst/>
+          </a:prstGeom>
+          <a:noFill/>
+          <a:ln/>
+        </p:spPr>
+        <p:txBody>
+          <a:bodyPr wrap="square" rtlCol="0" anchor="ctr"/>
+          <a:lstStyle/>
           <a:p>
             <a:pPr algn="ctr" indent="0" marL="0">
               <a:buNone/>
             </a:pPr>
             <a:r>
-              <a:rPr lang="en-US" sz="1200" b="1" dirty="0">
-                <a:solidFill>
-                  <a:srgbClr val="1A1A1E"/>
-                </a:solidFill>
-                <a:latin typeface="Segoe UI" pitchFamily="34" charset="0"/>
-                <a:ea typeface="Segoe UI" pitchFamily="34" charset="-122"/>
-                <a:cs typeface="Segoe UI" pitchFamily="34" charset="-120"/>
-              </a:rPr>
-              <a:t>real device</a:t>
-            </a:r>
-            <a:endParaRPr lang="en-US" sz="1200" dirty="0"/>
-          </a:p>
-        </p:txBody>
-      </p:sp>
-      <p:sp>
-        <p:nvSpPr>
-          <p:cNvPr id="19" name="Text 17"/>
-          <p:cNvSpPr/>
-          <p:nvPr/>
-        </p:nvSpPr>
-        <p:spPr>
-          <a:xfrm>
-            <a:off x="566928" y="2999232"/>
-            <a:ext cx="11057839" cy="4023360"/>
+              <a:rPr lang="en-US" sz="1250" b="1" dirty="0">
+                <a:solidFill>
+                  <a:srgbClr val="FFFFFF"/>
+                </a:solidFill>
+                <a:latin typeface="Segoe UI" pitchFamily="34" charset="0"/>
+                <a:ea typeface="Segoe UI" pitchFamily="34" charset="-122"/>
+                <a:cs typeface="Segoe UI" pitchFamily="34" charset="-120"/>
+              </a:rPr>
+              <a:t>3</a:t>
+            </a:r>
+            <a:endParaRPr lang="en-US" sz="1250" dirty="0"/>
+          </a:p>
+        </p:txBody>
+      </p:sp>
+      <p:sp>
+        <p:nvSpPr>
+          <p:cNvPr id="18" name="Text 16"/>
+          <p:cNvSpPr/>
+          <p:nvPr/>
+        </p:nvSpPr>
+        <p:spPr>
+          <a:xfrm>
+            <a:off x="969264" y="3950208"/>
+            <a:ext cx="4389120" cy="274320"/>
           </a:xfrm>
           <a:prstGeom prst="rect">
             <a:avLst/>
@@ -8848,21 +10166,14 @@
           <a:ln/>
         </p:spPr>
         <p:txBody>
-          <a:bodyPr wrap="square" rtlCol="0" anchor="t"/>
-          <a:lstStyle/>
-          <a:p>
-            <a:pPr marL="342900" indent="-342900">
-              <a:lnSpc>
-                <a:spcPct val="115000"/>
-              </a:lnSpc>
-              <a:spcAft>
-                <a:spcPts val="200"/>
-              </a:spcAft>
-              <a:buSzPct val="100000"/>
-              <a:buChar char="•"/>
-            </a:pPr>
-            <a:r>
-              <a:rPr lang="en-US" sz="1450" b="1" dirty="0">
+          <a:bodyPr wrap="square" rtlCol="0" anchor="ctr"/>
+          <a:lstStyle/>
+          <a:p>
+            <a:pPr indent="0" marL="0">
+              <a:buNone/>
+            </a:pPr>
+            <a:r>
+              <a:rPr lang="en-US" sz="1350" b="1" dirty="0">
                 <a:solidFill>
                   <a:srgbClr val="1A1A1E"/>
                 </a:solidFill>
@@ -8870,173 +10181,1351 @@
                 <a:ea typeface="Segoe UI" pitchFamily="34" charset="-122"/>
                 <a:cs typeface="Segoe UI" pitchFamily="34" charset="-120"/>
               </a:rPr>
-              <a:t>Appium is a server, not a library</a:t>
-            </a:r>
-            <a:endParaRPr lang="en-US" sz="1450" dirty="0"/>
-          </a:p>
-          <a:p>
-            <a:pPr lvl="1" indent="0" marL="0">
-              <a:lnSpc>
-                <a:spcPct val="115000"/>
-              </a:lnSpc>
-              <a:spcAft>
-                <a:spcPts val="1000"/>
-              </a:spcAft>
+              <a:t>Tap Sign In</a:t>
+            </a:r>
+            <a:endParaRPr lang="en-US" sz="1350" dirty="0"/>
+          </a:p>
+        </p:txBody>
+      </p:sp>
+      <p:sp>
+        <p:nvSpPr>
+          <p:cNvPr id="19" name="Shape 17"/>
+          <p:cNvSpPr/>
+          <p:nvPr/>
+        </p:nvSpPr>
+        <p:spPr>
+          <a:xfrm>
+            <a:off x="969264" y="4261104"/>
+            <a:ext cx="4526280" cy="384048"/>
+          </a:xfrm>
+          <a:prstGeom prst="roundRect">
+            <a:avLst>
+              <a:gd name="adj" fmla="val 11905"/>
+            </a:avLst>
+          </a:prstGeom>
+          <a:solidFill>
+            <a:srgbClr val="1E1E24"/>
+          </a:solidFill>
+          <a:ln w="12700">
+            <a:solidFill>
+              <a:srgbClr val="1E1E24"/>
+            </a:solidFill>
+            <a:prstDash val="solid"/>
+          </a:ln>
+        </p:spPr>
+      </p:sp>
+      <p:sp>
+        <p:nvSpPr>
+          <p:cNvPr id="20" name="Text 18"/>
+          <p:cNvSpPr/>
+          <p:nvPr/>
+        </p:nvSpPr>
+        <p:spPr>
+          <a:xfrm>
+            <a:off x="1078992" y="4261104"/>
+            <a:ext cx="4343400" cy="384048"/>
+          </a:xfrm>
+          <a:prstGeom prst="rect">
+            <a:avLst/>
+          </a:prstGeom>
+          <a:noFill/>
+          <a:ln/>
+        </p:spPr>
+        <p:txBody>
+          <a:bodyPr wrap="square" rtlCol="0" anchor="ctr"/>
+          <a:lstStyle/>
+          <a:p>
+            <a:pPr indent="0" marL="0">
               <a:buNone/>
             </a:pPr>
             <a:r>
+              <a:rPr lang="en-US" sz="1000" dirty="0">
+                <a:solidFill>
+                  <a:srgbClr val="E8E8EC"/>
+                </a:solidFill>
+                <a:latin typeface="Consolas" pitchFamily="34" charset="0"/>
+                <a:ea typeface="Consolas" pitchFamily="34" charset="-122"/>
+                <a:cs typeface="Consolas" pitchFamily="34" charset="-120"/>
+              </a:rPr>
+              <a:t>$('login_sign_in_button').click()</a:t>
+            </a:r>
+            <a:endParaRPr lang="en-US" sz="1000" dirty="0"/>
+          </a:p>
+        </p:txBody>
+      </p:sp>
+      <p:sp>
+        <p:nvSpPr>
+          <p:cNvPr id="21" name="Shape 19"/>
+          <p:cNvSpPr/>
+          <p:nvPr/>
+        </p:nvSpPr>
+        <p:spPr>
+          <a:xfrm>
+            <a:off x="566928" y="4901184"/>
+            <a:ext cx="292608" cy="292608"/>
+          </a:xfrm>
+          <a:prstGeom prst="ellipse">
+            <a:avLst/>
+          </a:prstGeom>
+          <a:solidFill>
+            <a:srgbClr val="0B5FA5"/>
+          </a:solidFill>
+          <a:ln w="12700">
+            <a:solidFill>
+              <a:srgbClr val="0B5FA5"/>
+            </a:solidFill>
+            <a:prstDash val="solid"/>
+          </a:ln>
+        </p:spPr>
+      </p:sp>
+      <p:sp>
+        <p:nvSpPr>
+          <p:cNvPr id="22" name="Text 20"/>
+          <p:cNvSpPr/>
+          <p:nvPr/>
+        </p:nvSpPr>
+        <p:spPr>
+          <a:xfrm>
+            <a:off x="566928" y="4901184"/>
+            <a:ext cx="292608" cy="292608"/>
+          </a:xfrm>
+          <a:prstGeom prst="rect">
+            <a:avLst/>
+          </a:prstGeom>
+          <a:noFill/>
+          <a:ln/>
+        </p:spPr>
+        <p:txBody>
+          <a:bodyPr wrap="square" rtlCol="0" anchor="ctr"/>
+          <a:lstStyle/>
+          <a:p>
+            <a:pPr algn="ctr" indent="0" marL="0">
+              <a:buNone/>
+            </a:pPr>
+            <a:r>
+              <a:rPr lang="en-US" sz="1250" b="1" dirty="0">
+                <a:solidFill>
+                  <a:srgbClr val="FFFFFF"/>
+                </a:solidFill>
+                <a:latin typeface="Segoe UI" pitchFamily="34" charset="0"/>
+                <a:ea typeface="Segoe UI" pitchFamily="34" charset="-122"/>
+                <a:cs typeface="Segoe UI" pitchFamily="34" charset="-120"/>
+              </a:rPr>
+              <a:t>4</a:t>
+            </a:r>
+            <a:endParaRPr lang="en-US" sz="1250" dirty="0"/>
+          </a:p>
+        </p:txBody>
+      </p:sp>
+      <p:sp>
+        <p:nvSpPr>
+          <p:cNvPr id="23" name="Text 21"/>
+          <p:cNvSpPr/>
+          <p:nvPr/>
+        </p:nvSpPr>
+        <p:spPr>
+          <a:xfrm>
+            <a:off x="969264" y="4882896"/>
+            <a:ext cx="4389120" cy="274320"/>
+          </a:xfrm>
+          <a:prstGeom prst="rect">
+            <a:avLst/>
+          </a:prstGeom>
+          <a:noFill/>
+          <a:ln/>
+        </p:spPr>
+        <p:txBody>
+          <a:bodyPr wrap="square" rtlCol="0" anchor="ctr"/>
+          <a:lstStyle/>
+          <a:p>
+            <a:pPr indent="0" marL="0">
+              <a:buNone/>
+            </a:pPr>
+            <a:r>
+              <a:rPr lang="en-US" sz="1350" b="1" dirty="0">
+                <a:solidFill>
+                  <a:srgbClr val="1A1A1E"/>
+                </a:solidFill>
+                <a:latin typeface="Segoe UI" pitchFamily="34" charset="0"/>
+                <a:ea typeface="Segoe UI" pitchFamily="34" charset="-122"/>
+                <a:cs typeface="Segoe UI" pitchFamily="34" charset="-120"/>
+              </a:rPr>
+              <a:t>Check we left the login screen</a:t>
+            </a:r>
+            <a:endParaRPr lang="en-US" sz="1350" dirty="0"/>
+          </a:p>
+        </p:txBody>
+      </p:sp>
+      <p:sp>
+        <p:nvSpPr>
+          <p:cNvPr id="24" name="Shape 22"/>
+          <p:cNvSpPr/>
+          <p:nvPr/>
+        </p:nvSpPr>
+        <p:spPr>
+          <a:xfrm>
+            <a:off x="969264" y="5193792"/>
+            <a:ext cx="4526280" cy="384048"/>
+          </a:xfrm>
+          <a:prstGeom prst="roundRect">
+            <a:avLst>
+              <a:gd name="adj" fmla="val 11905"/>
+            </a:avLst>
+          </a:prstGeom>
+          <a:solidFill>
+            <a:srgbClr val="1E1E24"/>
+          </a:solidFill>
+          <a:ln w="12700">
+            <a:solidFill>
+              <a:srgbClr val="1E1E24"/>
+            </a:solidFill>
+            <a:prstDash val="solid"/>
+          </a:ln>
+        </p:spPr>
+      </p:sp>
+      <p:sp>
+        <p:nvSpPr>
+          <p:cNvPr id="25" name="Text 23"/>
+          <p:cNvSpPr/>
+          <p:nvPr/>
+        </p:nvSpPr>
+        <p:spPr>
+          <a:xfrm>
+            <a:off x="1078992" y="5193792"/>
+            <a:ext cx="4343400" cy="384048"/>
+          </a:xfrm>
+          <a:prstGeom prst="rect">
+            <a:avLst/>
+          </a:prstGeom>
+          <a:noFill/>
+          <a:ln/>
+        </p:spPr>
+        <p:txBody>
+          <a:bodyPr wrap="square" rtlCol="0" anchor="ctr"/>
+          <a:lstStyle/>
+          <a:p>
+            <a:pPr indent="0" marL="0">
+              <a:buNone/>
+            </a:pPr>
+            <a:r>
+              <a:rPr lang="en-US" sz="1000" dirty="0">
+                <a:solidFill>
+                  <a:srgbClr val="E8E8EC"/>
+                </a:solidFill>
+                <a:latin typeface="Consolas" pitchFamily="34" charset="0"/>
+                <a:ea typeface="Consolas" pitchFamily="34" charset="-122"/>
+                <a:cs typeface="Consolas" pitchFamily="34" charset="-120"/>
+              </a:rPr>
+              <a:t>expect(currentScreen).not.toBe('Login')</a:t>
+            </a:r>
+            <a:endParaRPr lang="en-US" sz="1000" dirty="0"/>
+          </a:p>
+        </p:txBody>
+      </p:sp>
+      <p:sp>
+        <p:nvSpPr>
+          <p:cNvPr id="26" name="Text 24"/>
+          <p:cNvSpPr/>
+          <p:nvPr/>
+        </p:nvSpPr>
+        <p:spPr>
+          <a:xfrm>
+            <a:off x="5623560" y="1627632"/>
+            <a:ext cx="5943600" cy="292608"/>
+          </a:xfrm>
+          <a:prstGeom prst="rect">
+            <a:avLst/>
+          </a:prstGeom>
+          <a:noFill/>
+          <a:ln/>
+        </p:spPr>
+        <p:txBody>
+          <a:bodyPr wrap="square" rtlCol="0" anchor="ctr"/>
+          <a:lstStyle/>
+          <a:p>
+            <a:pPr indent="0" marL="0">
+              <a:buNone/>
+            </a:pPr>
+            <a:r>
+              <a:rPr lang="en-US" sz="1500" b="1" dirty="0">
+                <a:solidFill>
+                  <a:srgbClr val="1A1A1E"/>
+                </a:solidFill>
+                <a:latin typeface="Segoe UI" pitchFamily="34" charset="0"/>
+                <a:ea typeface="Segoe UI" pitchFamily="34" charset="-122"/>
+                <a:cs typeface="Segoe UI" pitchFamily="34" charset="-120"/>
+              </a:rPr>
+              <a:t>What happens on the phone</a:t>
+            </a:r>
+            <a:endParaRPr lang="en-US" sz="1500" dirty="0"/>
+          </a:p>
+        </p:txBody>
+      </p:sp>
+      <p:sp>
+        <p:nvSpPr>
+          <p:cNvPr id="27" name="Shape 25"/>
+          <p:cNvSpPr/>
+          <p:nvPr/>
+        </p:nvSpPr>
+        <p:spPr>
+          <a:xfrm>
+            <a:off x="5623560" y="2011680"/>
+            <a:ext cx="3566160" cy="4160520"/>
+          </a:xfrm>
+          <a:prstGeom prst="roundRect">
+            <a:avLst>
+              <a:gd name="adj" fmla="val 2564"/>
+            </a:avLst>
+          </a:prstGeom>
+          <a:solidFill>
+            <a:srgbClr val="FFFFFF"/>
+          </a:solidFill>
+          <a:ln w="19050">
+            <a:solidFill>
+              <a:srgbClr val="9AA0A8"/>
+            </a:solidFill>
+            <a:prstDash val="solid"/>
+          </a:ln>
+        </p:spPr>
+      </p:sp>
+      <p:sp>
+        <p:nvSpPr>
+          <p:cNvPr id="28" name="Shape 26"/>
+          <p:cNvSpPr/>
+          <p:nvPr/>
+        </p:nvSpPr>
+        <p:spPr>
+          <a:xfrm>
+            <a:off x="5660136" y="2048256"/>
+            <a:ext cx="3493008" cy="274320"/>
+          </a:xfrm>
+          <a:prstGeom prst="rect">
+            <a:avLst/>
+          </a:prstGeom>
+          <a:solidFill>
+            <a:srgbClr val="2B2F36"/>
+          </a:solidFill>
+          <a:ln w="12700">
+            <a:solidFill>
+              <a:srgbClr val="2B2F36"/>
+            </a:solidFill>
+            <a:prstDash val="solid"/>
+          </a:ln>
+        </p:spPr>
+      </p:sp>
+      <p:sp>
+        <p:nvSpPr>
+          <p:cNvPr id="29" name="Text 27"/>
+          <p:cNvSpPr/>
+          <p:nvPr/>
+        </p:nvSpPr>
+        <p:spPr>
+          <a:xfrm>
+            <a:off x="5769864" y="2048256"/>
+            <a:ext cx="640080" cy="274320"/>
+          </a:xfrm>
+          <a:prstGeom prst="rect">
+            <a:avLst/>
+          </a:prstGeom>
+          <a:noFill/>
+          <a:ln/>
+        </p:spPr>
+        <p:txBody>
+          <a:bodyPr wrap="square" rtlCol="0" anchor="ctr"/>
+          <a:lstStyle/>
+          <a:p>
+            <a:pPr indent="0" marL="0">
+              <a:buNone/>
+            </a:pPr>
+            <a:r>
+              <a:rPr lang="en-US" sz="850" dirty="0">
+                <a:solidFill>
+                  <a:srgbClr val="FFFFFF"/>
+                </a:solidFill>
+                <a:latin typeface="Segoe UI" pitchFamily="34" charset="0"/>
+                <a:ea typeface="Segoe UI" pitchFamily="34" charset="-122"/>
+                <a:cs typeface="Segoe UI" pitchFamily="34" charset="-120"/>
+              </a:rPr>
+              <a:t>9:41</a:t>
+            </a:r>
+            <a:endParaRPr lang="en-US" sz="850" dirty="0"/>
+          </a:p>
+        </p:txBody>
+      </p:sp>
+      <p:sp>
+        <p:nvSpPr>
+          <p:cNvPr id="30" name="Text 28"/>
+          <p:cNvSpPr/>
+          <p:nvPr/>
+        </p:nvSpPr>
+        <p:spPr>
+          <a:xfrm>
+            <a:off x="8275320" y="2048256"/>
+            <a:ext cx="768096" cy="274320"/>
+          </a:xfrm>
+          <a:prstGeom prst="rect">
+            <a:avLst/>
+          </a:prstGeom>
+          <a:noFill/>
+          <a:ln/>
+        </p:spPr>
+        <p:txBody>
+          <a:bodyPr wrap="square" rtlCol="0" anchor="ctr"/>
+          <a:lstStyle/>
+          <a:p>
+            <a:pPr algn="r" indent="0" marL="0">
+              <a:buNone/>
+            </a:pPr>
+            <a:r>
+              <a:rPr lang="en-US" sz="750" dirty="0">
+                <a:solidFill>
+                  <a:srgbClr val="FFFFFF"/>
+                </a:solidFill>
+                <a:latin typeface="Segoe UI" pitchFamily="34" charset="0"/>
+                <a:ea typeface="Segoe UI" pitchFamily="34" charset="-122"/>
+                <a:cs typeface="Segoe UI" pitchFamily="34" charset="-120"/>
+              </a:rPr>
+              <a:t>◼ ◼ ▮</a:t>
+            </a:r>
+            <a:endParaRPr lang="en-US" sz="750" dirty="0"/>
+          </a:p>
+        </p:txBody>
+      </p:sp>
+      <p:sp>
+        <p:nvSpPr>
+          <p:cNvPr id="31" name="Text 29"/>
+          <p:cNvSpPr/>
+          <p:nvPr/>
+        </p:nvSpPr>
+        <p:spPr>
+          <a:xfrm>
+            <a:off x="5769864" y="2359152"/>
+            <a:ext cx="3273552" cy="256032"/>
+          </a:xfrm>
+          <a:prstGeom prst="rect">
+            <a:avLst/>
+          </a:prstGeom>
+          <a:noFill/>
+          <a:ln/>
+        </p:spPr>
+        <p:txBody>
+          <a:bodyPr wrap="square" rtlCol="0" anchor="ctr"/>
+          <a:lstStyle/>
+          <a:p>
+            <a:pPr indent="0" marL="0">
+              <a:buNone/>
+            </a:pPr>
+            <a:r>
+              <a:rPr lang="en-US" sz="1050" b="1" dirty="0">
+                <a:solidFill>
+                  <a:srgbClr val="71717A"/>
+                </a:solidFill>
+                <a:latin typeface="Segoe UI" pitchFamily="34" charset="0"/>
+                <a:ea typeface="Segoe UI" pitchFamily="34" charset="-122"/>
+                <a:cs typeface="Segoe UI" pitchFamily="34" charset="-120"/>
+              </a:rPr>
+              <a:t>RS UAT</a:t>
+            </a:r>
+            <a:endParaRPr lang="en-US" sz="1050" dirty="0"/>
+          </a:p>
+        </p:txBody>
+      </p:sp>
+      <p:sp>
+        <p:nvSpPr>
+          <p:cNvPr id="32" name="Shape 30"/>
+          <p:cNvSpPr/>
+          <p:nvPr/>
+        </p:nvSpPr>
+        <p:spPr>
+          <a:xfrm>
+            <a:off x="5897880" y="3090672"/>
+            <a:ext cx="2542032" cy="402336"/>
+          </a:xfrm>
+          <a:prstGeom prst="roundRect">
+            <a:avLst>
+              <a:gd name="adj" fmla="val 11364"/>
+            </a:avLst>
+          </a:prstGeom>
+          <a:solidFill>
+            <a:srgbClr val="FBFBFC"/>
+          </a:solidFill>
+          <a:ln w="12700">
+            <a:solidFill>
+              <a:srgbClr val="C9CDD4"/>
+            </a:solidFill>
+            <a:prstDash val="solid"/>
+          </a:ln>
+        </p:spPr>
+      </p:sp>
+      <p:sp>
+        <p:nvSpPr>
+          <p:cNvPr id="33" name="Text 31"/>
+          <p:cNvSpPr/>
+          <p:nvPr/>
+        </p:nvSpPr>
+        <p:spPr>
+          <a:xfrm>
+            <a:off x="5897880" y="2871216"/>
+            <a:ext cx="2542032" cy="201168"/>
+          </a:xfrm>
+          <a:prstGeom prst="rect">
+            <a:avLst/>
+          </a:prstGeom>
+          <a:noFill/>
+          <a:ln/>
+        </p:spPr>
+        <p:txBody>
+          <a:bodyPr wrap="square" rtlCol="0" anchor="ctr"/>
+          <a:lstStyle/>
+          <a:p>
+            <a:pPr indent="0" marL="0">
+              <a:buNone/>
+            </a:pPr>
+            <a:r>
+              <a:rPr lang="en-US" sz="950" dirty="0">
+                <a:solidFill>
+                  <a:srgbClr val="71717A"/>
+                </a:solidFill>
+                <a:latin typeface="Segoe UI" pitchFamily="34" charset="0"/>
+                <a:ea typeface="Segoe UI" pitchFamily="34" charset="-122"/>
+                <a:cs typeface="Segoe UI" pitchFamily="34" charset="-120"/>
+              </a:rPr>
+              <a:t>Email / Username</a:t>
+            </a:r>
+            <a:endParaRPr lang="en-US" sz="950" dirty="0"/>
+          </a:p>
+        </p:txBody>
+      </p:sp>
+      <p:sp>
+        <p:nvSpPr>
+          <p:cNvPr id="34" name="Text 32"/>
+          <p:cNvSpPr/>
+          <p:nvPr/>
+        </p:nvSpPr>
+        <p:spPr>
+          <a:xfrm>
+            <a:off x="6025896" y="3090672"/>
+            <a:ext cx="2286000" cy="402336"/>
+          </a:xfrm>
+          <a:prstGeom prst="rect">
+            <a:avLst/>
+          </a:prstGeom>
+          <a:noFill/>
+          <a:ln/>
+        </p:spPr>
+        <p:txBody>
+          <a:bodyPr wrap="square" rtlCol="0" anchor="ctr"/>
+          <a:lstStyle/>
+          <a:p>
+            <a:pPr indent="0" marL="0">
+              <a:buNone/>
+            </a:pPr>
+            <a:r>
               <a:rPr lang="en-US" sz="1200" dirty="0">
                 <a:solidFill>
-                  <a:srgbClr val="3F3F46"/>
-                </a:solidFill>
-                <a:latin typeface="Segoe UI" pitchFamily="34" charset="0"/>
-                <a:ea typeface="Segoe UI" pitchFamily="34" charset="-122"/>
-                <a:cs typeface="Segoe UI" pitchFamily="34" charset="-120"/>
-              </a:rPr>
-              <a:t>The test sends WebDriver commands over HTTP; the uiautomator2 driver executes them through Android’s own instrumentation</a:t>
-            </a:r>
-            <a:endParaRPr lang="en-US" sz="1450" dirty="0"/>
-          </a:p>
-          <a:p>
-            <a:pPr marL="342900" indent="-342900">
-              <a:lnSpc>
-                <a:spcPct val="115000"/>
-              </a:lnSpc>
-              <a:spcAft>
-                <a:spcPts val="200"/>
-              </a:spcAft>
-              <a:buSzPct val="100000"/>
-              <a:buChar char="•"/>
-            </a:pPr>
-            <a:r>
-              <a:rPr lang="en-US" sz="1450" b="1" dirty="0">
-                <a:solidFill>
                   <a:srgbClr val="1A1A1E"/>
                 </a:solidFill>
                 <a:latin typeface="Segoe UI" pitchFamily="34" charset="0"/>
                 <a:ea typeface="Segoe UI" pitchFamily="34" charset="-122"/>
                 <a:cs typeface="Segoe UI" pitchFamily="34" charset="-120"/>
               </a:rPr>
-              <a:t>The app is installed, not rebuilt</a:t>
-            </a:r>
-            <a:endParaRPr lang="en-US" sz="1450" dirty="0"/>
-          </a:p>
-          <a:p>
-            <a:pPr lvl="1" indent="0" marL="0">
-              <a:lnSpc>
-                <a:spcPct val="115000"/>
-              </a:lnSpc>
-              <a:spcAft>
-                <a:spcPts val="1000"/>
-              </a:spcAft>
+              <a:t>banaprovider</a:t>
+            </a:r>
+            <a:endParaRPr lang="en-US" sz="1200" dirty="0"/>
+          </a:p>
+        </p:txBody>
+      </p:sp>
+      <p:sp>
+        <p:nvSpPr>
+          <p:cNvPr id="35" name="Shape 33"/>
+          <p:cNvSpPr/>
+          <p:nvPr/>
+        </p:nvSpPr>
+        <p:spPr>
+          <a:xfrm>
+            <a:off x="8641080" y="3154680"/>
+            <a:ext cx="274320" cy="274320"/>
+          </a:xfrm>
+          <a:prstGeom prst="ellipse">
+            <a:avLst/>
+          </a:prstGeom>
+          <a:solidFill>
+            <a:srgbClr val="0B5FA5"/>
+          </a:solidFill>
+          <a:ln w="12700">
+            <a:solidFill>
+              <a:srgbClr val="0B5FA5"/>
+            </a:solidFill>
+            <a:prstDash val="solid"/>
+          </a:ln>
+        </p:spPr>
+      </p:sp>
+      <p:sp>
+        <p:nvSpPr>
+          <p:cNvPr id="36" name="Text 34"/>
+          <p:cNvSpPr/>
+          <p:nvPr/>
+        </p:nvSpPr>
+        <p:spPr>
+          <a:xfrm>
+            <a:off x="8641080" y="3154680"/>
+            <a:ext cx="274320" cy="274320"/>
+          </a:xfrm>
+          <a:prstGeom prst="rect">
+            <a:avLst/>
+          </a:prstGeom>
+          <a:noFill/>
+          <a:ln/>
+        </p:spPr>
+        <p:txBody>
+          <a:bodyPr wrap="square" rtlCol="0" anchor="ctr"/>
+          <a:lstStyle/>
+          <a:p>
+            <a:pPr algn="ctr" indent="0" marL="0">
               <a:buNone/>
             </a:pPr>
             <a:r>
+              <a:rPr lang="en-US" sz="1250" b="1" dirty="0">
+                <a:solidFill>
+                  <a:srgbClr val="FFFFFF"/>
+                </a:solidFill>
+                <a:latin typeface="Segoe UI" pitchFamily="34" charset="0"/>
+                <a:ea typeface="Segoe UI" pitchFamily="34" charset="-122"/>
+                <a:cs typeface="Segoe UI" pitchFamily="34" charset="-120"/>
+              </a:rPr>
+              <a:t>1</a:t>
+            </a:r>
+            <a:endParaRPr lang="en-US" sz="1250" dirty="0"/>
+          </a:p>
+        </p:txBody>
+      </p:sp>
+      <p:sp>
+        <p:nvSpPr>
+          <p:cNvPr id="37" name="Shape 35"/>
+          <p:cNvSpPr/>
+          <p:nvPr/>
+        </p:nvSpPr>
+        <p:spPr>
+          <a:xfrm>
+            <a:off x="5897880" y="3803904"/>
+            <a:ext cx="2542032" cy="402336"/>
+          </a:xfrm>
+          <a:prstGeom prst="roundRect">
+            <a:avLst>
+              <a:gd name="adj" fmla="val 11364"/>
+            </a:avLst>
+          </a:prstGeom>
+          <a:solidFill>
+            <a:srgbClr val="FBFBFC"/>
+          </a:solidFill>
+          <a:ln w="12700">
+            <a:solidFill>
+              <a:srgbClr val="C9CDD4"/>
+            </a:solidFill>
+            <a:prstDash val="solid"/>
+          </a:ln>
+        </p:spPr>
+      </p:sp>
+      <p:sp>
+        <p:nvSpPr>
+          <p:cNvPr id="38" name="Text 36"/>
+          <p:cNvSpPr/>
+          <p:nvPr/>
+        </p:nvSpPr>
+        <p:spPr>
+          <a:xfrm>
+            <a:off x="5897880" y="3584448"/>
+            <a:ext cx="2542032" cy="201168"/>
+          </a:xfrm>
+          <a:prstGeom prst="rect">
+            <a:avLst/>
+          </a:prstGeom>
+          <a:noFill/>
+          <a:ln/>
+        </p:spPr>
+        <p:txBody>
+          <a:bodyPr wrap="square" rtlCol="0" anchor="ctr"/>
+          <a:lstStyle/>
+          <a:p>
+            <a:pPr indent="0" marL="0">
+              <a:buNone/>
+            </a:pPr>
+            <a:r>
+              <a:rPr lang="en-US" sz="950" dirty="0">
+                <a:solidFill>
+                  <a:srgbClr val="71717A"/>
+                </a:solidFill>
+                <a:latin typeface="Segoe UI" pitchFamily="34" charset="0"/>
+                <a:ea typeface="Segoe UI" pitchFamily="34" charset="-122"/>
+                <a:cs typeface="Segoe UI" pitchFamily="34" charset="-120"/>
+              </a:rPr>
+              <a:t>Password</a:t>
+            </a:r>
+            <a:endParaRPr lang="en-US" sz="950" dirty="0"/>
+          </a:p>
+        </p:txBody>
+      </p:sp>
+      <p:sp>
+        <p:nvSpPr>
+          <p:cNvPr id="39" name="Text 37"/>
+          <p:cNvSpPr/>
+          <p:nvPr/>
+        </p:nvSpPr>
+        <p:spPr>
+          <a:xfrm>
+            <a:off x="6025896" y="3803904"/>
+            <a:ext cx="2286000" cy="402336"/>
+          </a:xfrm>
+          <a:prstGeom prst="rect">
+            <a:avLst/>
+          </a:prstGeom>
+          <a:noFill/>
+          <a:ln/>
+        </p:spPr>
+        <p:txBody>
+          <a:bodyPr wrap="square" rtlCol="0" anchor="ctr"/>
+          <a:lstStyle/>
+          <a:p>
+            <a:pPr indent="0" marL="0">
+              <a:buNone/>
+            </a:pPr>
+            <a:r>
               <a:rPr lang="en-US" sz="1200" dirty="0">
                 <a:solidFill>
-                  <a:srgbClr val="3F3F46"/>
-                </a:solidFill>
-                <a:latin typeface="Segoe UI" pitchFamily="34" charset="0"/>
-                <a:ea typeface="Segoe UI" pitchFamily="34" charset="-122"/>
-                <a:cs typeface="Segoe UI" pitchFamily="34" charset="-120"/>
-              </a:rPr>
-              <a:t>Point it at an APK or a package name; the same spec runs on an emulator or a plugged-in handset with one env variable</a:t>
-            </a:r>
-            <a:endParaRPr lang="en-US" sz="1450" dirty="0"/>
-          </a:p>
-          <a:p>
-            <a:pPr marL="342900" indent="-342900">
-              <a:lnSpc>
-                <a:spcPct val="115000"/>
-              </a:lnSpc>
-              <a:spcAft>
-                <a:spcPts val="200"/>
-              </a:spcAft>
-              <a:buSzPct val="100000"/>
-              <a:buChar char="•"/>
-            </a:pPr>
-            <a:r>
-              <a:rPr lang="en-US" sz="1450" b="1" dirty="0">
-                <a:solidFill>
                   <a:srgbClr val="1A1A1E"/>
                 </a:solidFill>
                 <a:latin typeface="Segoe UI" pitchFamily="34" charset="0"/>
                 <a:ea typeface="Segoe UI" pitchFamily="34" charset="-122"/>
                 <a:cs typeface="Segoe UI" pitchFamily="34" charset="-120"/>
               </a:rPr>
-              <a:t>Everything is a capability</a:t>
-            </a:r>
-            <a:endParaRPr lang="en-US" sz="1450" dirty="0"/>
-          </a:p>
-          <a:p>
-            <a:pPr lvl="1" indent="0" marL="0">
-              <a:lnSpc>
-                <a:spcPct val="115000"/>
-              </a:lnSpc>
-              <a:spcAft>
-                <a:spcPts val="1000"/>
-              </a:spcAft>
+              <a:t>••••••</a:t>
+            </a:r>
+            <a:endParaRPr lang="en-US" sz="1200" dirty="0"/>
+          </a:p>
+        </p:txBody>
+      </p:sp>
+      <p:sp>
+        <p:nvSpPr>
+          <p:cNvPr id="40" name="Shape 38"/>
+          <p:cNvSpPr/>
+          <p:nvPr/>
+        </p:nvSpPr>
+        <p:spPr>
+          <a:xfrm>
+            <a:off x="8641080" y="3867912"/>
+            <a:ext cx="274320" cy="274320"/>
+          </a:xfrm>
+          <a:prstGeom prst="ellipse">
+            <a:avLst/>
+          </a:prstGeom>
+          <a:solidFill>
+            <a:srgbClr val="0B5FA5"/>
+          </a:solidFill>
+          <a:ln w="12700">
+            <a:solidFill>
+              <a:srgbClr val="0B5FA5"/>
+            </a:solidFill>
+            <a:prstDash val="solid"/>
+          </a:ln>
+        </p:spPr>
+      </p:sp>
+      <p:sp>
+        <p:nvSpPr>
+          <p:cNvPr id="41" name="Text 39"/>
+          <p:cNvSpPr/>
+          <p:nvPr/>
+        </p:nvSpPr>
+        <p:spPr>
+          <a:xfrm>
+            <a:off x="8641080" y="3867912"/>
+            <a:ext cx="274320" cy="274320"/>
+          </a:xfrm>
+          <a:prstGeom prst="rect">
+            <a:avLst/>
+          </a:prstGeom>
+          <a:noFill/>
+          <a:ln/>
+        </p:spPr>
+        <p:txBody>
+          <a:bodyPr wrap="square" rtlCol="0" anchor="ctr"/>
+          <a:lstStyle/>
+          <a:p>
+            <a:pPr algn="ctr" indent="0" marL="0">
               <a:buNone/>
             </a:pPr>
             <a:r>
-              <a:rPr lang="en-US" sz="1200" dirty="0">
-                <a:solidFill>
-                  <a:srgbClr val="3F3F46"/>
-                </a:solidFill>
-                <a:latin typeface="Segoe UI" pitchFamily="34" charset="0"/>
-                <a:ea typeface="Segoe UI" pitchFamily="34" charset="-122"/>
-                <a:cs typeface="Segoe UI" pitchFamily="34" charset="-120"/>
-              </a:rPr>
-              <a:t>autoGrantPermissions handles the location and notification prompts; clearApp resets state between tests</a:t>
-            </a:r>
-            <a:endParaRPr lang="en-US" sz="1450" dirty="0"/>
-          </a:p>
-          <a:p>
-            <a:pPr marL="342900" indent="-342900">
-              <a:lnSpc>
-                <a:spcPct val="115000"/>
-              </a:lnSpc>
-              <a:spcAft>
-                <a:spcPts val="200"/>
-              </a:spcAft>
-              <a:buSzPct val="100000"/>
-              <a:buChar char="•"/>
-            </a:pPr>
-            <a:r>
-              <a:rPr lang="en-US" sz="1450" b="1" dirty="0">
-                <a:solidFill>
-                  <a:srgbClr val="1A1A1E"/>
-                </a:solidFill>
-                <a:latin typeface="Segoe UI" pitchFamily="34" charset="0"/>
-                <a:ea typeface="Segoe UI" pitchFamily="34" charset="-122"/>
-                <a:cs typeface="Segoe UI" pitchFamily="34" charset="-120"/>
-              </a:rPr>
-              <a:t>It is the same mental model as the web suite</a:t>
-            </a:r>
-            <a:endParaRPr lang="en-US" sz="1450" dirty="0"/>
-          </a:p>
-          <a:p>
-            <a:pPr lvl="1" indent="0" marL="0">
-              <a:lnSpc>
-                <a:spcPct val="115000"/>
-              </a:lnSpc>
-              <a:spcAft>
-                <a:spcPts val="1000"/>
-              </a:spcAft>
+              <a:rPr lang="en-US" sz="1250" b="1" dirty="0">
+                <a:solidFill>
+                  <a:srgbClr val="FFFFFF"/>
+                </a:solidFill>
+                <a:latin typeface="Segoe UI" pitchFamily="34" charset="0"/>
+                <a:ea typeface="Segoe UI" pitchFamily="34" charset="-122"/>
+                <a:cs typeface="Segoe UI" pitchFamily="34" charset="-120"/>
+              </a:rPr>
+              <a:t>2</a:t>
+            </a:r>
+            <a:endParaRPr lang="en-US" sz="1250" dirty="0"/>
+          </a:p>
+        </p:txBody>
+      </p:sp>
+      <p:sp>
+        <p:nvSpPr>
+          <p:cNvPr id="42" name="Shape 40"/>
+          <p:cNvSpPr/>
+          <p:nvPr/>
+        </p:nvSpPr>
+        <p:spPr>
+          <a:xfrm>
+            <a:off x="5897880" y="4480560"/>
+            <a:ext cx="2542032" cy="457200"/>
+          </a:xfrm>
+          <a:prstGeom prst="roundRect">
+            <a:avLst>
+              <a:gd name="adj" fmla="val 12000"/>
+            </a:avLst>
+          </a:prstGeom>
+          <a:solidFill>
+            <a:srgbClr val="0B5FA5"/>
+          </a:solidFill>
+          <a:ln w="12700">
+            <a:solidFill>
+              <a:srgbClr val="0B5FA5"/>
+            </a:solidFill>
+            <a:prstDash val="solid"/>
+          </a:ln>
+        </p:spPr>
+      </p:sp>
+      <p:sp>
+        <p:nvSpPr>
+          <p:cNvPr id="43" name="Text 41"/>
+          <p:cNvSpPr/>
+          <p:nvPr/>
+        </p:nvSpPr>
+        <p:spPr>
+          <a:xfrm>
+            <a:off x="5897880" y="4480560"/>
+            <a:ext cx="2542032" cy="457200"/>
+          </a:xfrm>
+          <a:prstGeom prst="rect">
+            <a:avLst/>
+          </a:prstGeom>
+          <a:noFill/>
+          <a:ln/>
+        </p:spPr>
+        <p:txBody>
+          <a:bodyPr wrap="square" rtlCol="0" anchor="ctr"/>
+          <a:lstStyle/>
+          <a:p>
+            <a:pPr algn="ctr" indent="0" marL="0">
               <a:buNone/>
             </a:pPr>
             <a:r>
-              <a:rPr lang="en-US" sz="1200" dirty="0">
-                <a:solidFill>
-                  <a:srgbClr val="3F3F46"/>
-                </a:solidFill>
-                <a:latin typeface="Segoe UI" pitchFamily="34" charset="0"/>
-                <a:ea typeface="Segoe UI" pitchFamily="34" charset="-122"/>
-                <a:cs typeface="Segoe UI" pitchFamily="34" charset="-120"/>
-              </a:rPr>
-              <a:t>Page objects, locators, expect() with waiting - only the selector syntax changes</a:t>
-            </a:r>
-            <a:endParaRPr lang="en-US" sz="1450" dirty="0"/>
+              <a:rPr lang="en-US" sz="1250" b="1" dirty="0">
+                <a:solidFill>
+                  <a:srgbClr val="FFFFFF"/>
+                </a:solidFill>
+                <a:latin typeface="Segoe UI" pitchFamily="34" charset="0"/>
+                <a:ea typeface="Segoe UI" pitchFamily="34" charset="-122"/>
+                <a:cs typeface="Segoe UI" pitchFamily="34" charset="-120"/>
+              </a:rPr>
+              <a:t>Sign In</a:t>
+            </a:r>
+            <a:endParaRPr lang="en-US" sz="1250" dirty="0"/>
+          </a:p>
+        </p:txBody>
+      </p:sp>
+      <p:sp>
+        <p:nvSpPr>
+          <p:cNvPr id="44" name="Shape 42"/>
+          <p:cNvSpPr/>
+          <p:nvPr/>
+        </p:nvSpPr>
+        <p:spPr>
+          <a:xfrm>
+            <a:off x="8641080" y="4572000"/>
+            <a:ext cx="274320" cy="274320"/>
+          </a:xfrm>
+          <a:prstGeom prst="ellipse">
+            <a:avLst/>
+          </a:prstGeom>
+          <a:solidFill>
+            <a:srgbClr val="0B5FA5"/>
+          </a:solidFill>
+          <a:ln w="12700">
+            <a:solidFill>
+              <a:srgbClr val="0B5FA5"/>
+            </a:solidFill>
+            <a:prstDash val="solid"/>
+          </a:ln>
+        </p:spPr>
+      </p:sp>
+      <p:sp>
+        <p:nvSpPr>
+          <p:cNvPr id="45" name="Text 43"/>
+          <p:cNvSpPr/>
+          <p:nvPr/>
+        </p:nvSpPr>
+        <p:spPr>
+          <a:xfrm>
+            <a:off x="8641080" y="4572000"/>
+            <a:ext cx="274320" cy="274320"/>
+          </a:xfrm>
+          <a:prstGeom prst="rect">
+            <a:avLst/>
+          </a:prstGeom>
+          <a:noFill/>
+          <a:ln/>
+        </p:spPr>
+        <p:txBody>
+          <a:bodyPr wrap="square" rtlCol="0" anchor="ctr"/>
+          <a:lstStyle/>
+          <a:p>
+            <a:pPr algn="ctr" indent="0" marL="0">
+              <a:buNone/>
+            </a:pPr>
+            <a:r>
+              <a:rPr lang="en-US" sz="1250" b="1" dirty="0">
+                <a:solidFill>
+                  <a:srgbClr val="FFFFFF"/>
+                </a:solidFill>
+                <a:latin typeface="Segoe UI" pitchFamily="34" charset="0"/>
+                <a:ea typeface="Segoe UI" pitchFamily="34" charset="-122"/>
+                <a:cs typeface="Segoe UI" pitchFamily="34" charset="-120"/>
+              </a:rPr>
+              <a:t>3</a:t>
+            </a:r>
+            <a:endParaRPr lang="en-US" sz="1250" dirty="0"/>
+          </a:p>
+        </p:txBody>
+      </p:sp>
+      <p:sp>
+        <p:nvSpPr>
+          <p:cNvPr id="46" name="Text 44"/>
+          <p:cNvSpPr/>
+          <p:nvPr/>
+        </p:nvSpPr>
+        <p:spPr>
+          <a:xfrm>
+            <a:off x="9281160" y="3730752"/>
+            <a:ext cx="548640" cy="365760"/>
+          </a:xfrm>
+          <a:prstGeom prst="rect">
+            <a:avLst/>
+          </a:prstGeom>
+          <a:noFill/>
+          <a:ln/>
+        </p:spPr>
+        <p:txBody>
+          <a:bodyPr wrap="square" rtlCol="0" anchor="ctr"/>
+          <a:lstStyle/>
+          <a:p>
+            <a:pPr algn="ctr" indent="0" marL="0">
+              <a:buNone/>
+            </a:pPr>
+            <a:r>
+              <a:rPr lang="en-US" sz="2200" b="1" dirty="0">
+                <a:solidFill>
+                  <a:srgbClr val="71717A"/>
+                </a:solidFill>
+                <a:latin typeface="Segoe UI" pitchFamily="34" charset="0"/>
+                <a:ea typeface="Segoe UI" pitchFamily="34" charset="-122"/>
+                <a:cs typeface="Segoe UI" pitchFamily="34" charset="-120"/>
+              </a:rPr>
+              <a:t>→</a:t>
+            </a:r>
+            <a:endParaRPr lang="en-US" sz="2200" dirty="0"/>
+          </a:p>
+        </p:txBody>
+      </p:sp>
+      <p:sp>
+        <p:nvSpPr>
+          <p:cNvPr id="47" name="Shape 45"/>
+          <p:cNvSpPr/>
+          <p:nvPr/>
+        </p:nvSpPr>
+        <p:spPr>
+          <a:xfrm>
+            <a:off x="9875520" y="2011680"/>
+            <a:ext cx="1737360" cy="4160520"/>
+          </a:xfrm>
+          <a:prstGeom prst="roundRect">
+            <a:avLst>
+              <a:gd name="adj" fmla="val 5263"/>
+            </a:avLst>
+          </a:prstGeom>
+          <a:solidFill>
+            <a:srgbClr val="FFFFFF"/>
+          </a:solidFill>
+          <a:ln w="19050">
+            <a:solidFill>
+              <a:srgbClr val="9AA0A8"/>
+            </a:solidFill>
+            <a:prstDash val="solid"/>
+          </a:ln>
+        </p:spPr>
+      </p:sp>
+      <p:sp>
+        <p:nvSpPr>
+          <p:cNvPr id="48" name="Shape 46"/>
+          <p:cNvSpPr/>
+          <p:nvPr/>
+        </p:nvSpPr>
+        <p:spPr>
+          <a:xfrm>
+            <a:off x="9912096" y="2048256"/>
+            <a:ext cx="1664208" cy="274320"/>
+          </a:xfrm>
+          <a:prstGeom prst="rect">
+            <a:avLst/>
+          </a:prstGeom>
+          <a:solidFill>
+            <a:srgbClr val="2B2F36"/>
+          </a:solidFill>
+          <a:ln w="12700">
+            <a:solidFill>
+              <a:srgbClr val="2B2F36"/>
+            </a:solidFill>
+            <a:prstDash val="solid"/>
+          </a:ln>
+        </p:spPr>
+      </p:sp>
+      <p:sp>
+        <p:nvSpPr>
+          <p:cNvPr id="49" name="Text 47"/>
+          <p:cNvSpPr/>
+          <p:nvPr/>
+        </p:nvSpPr>
+        <p:spPr>
+          <a:xfrm>
+            <a:off x="10021824" y="2048256"/>
+            <a:ext cx="640080" cy="274320"/>
+          </a:xfrm>
+          <a:prstGeom prst="rect">
+            <a:avLst/>
+          </a:prstGeom>
+          <a:noFill/>
+          <a:ln/>
+        </p:spPr>
+        <p:txBody>
+          <a:bodyPr wrap="square" rtlCol="0" anchor="ctr"/>
+          <a:lstStyle/>
+          <a:p>
+            <a:pPr indent="0" marL="0">
+              <a:buNone/>
+            </a:pPr>
+            <a:r>
+              <a:rPr lang="en-US" sz="850" dirty="0">
+                <a:solidFill>
+                  <a:srgbClr val="FFFFFF"/>
+                </a:solidFill>
+                <a:latin typeface="Segoe UI" pitchFamily="34" charset="0"/>
+                <a:ea typeface="Segoe UI" pitchFamily="34" charset="-122"/>
+                <a:cs typeface="Segoe UI" pitchFamily="34" charset="-120"/>
+              </a:rPr>
+              <a:t>9:41</a:t>
+            </a:r>
+            <a:endParaRPr lang="en-US" sz="850" dirty="0"/>
+          </a:p>
+        </p:txBody>
+      </p:sp>
+      <p:sp>
+        <p:nvSpPr>
+          <p:cNvPr id="50" name="Text 48"/>
+          <p:cNvSpPr/>
+          <p:nvPr/>
+        </p:nvSpPr>
+        <p:spPr>
+          <a:xfrm>
+            <a:off x="10698480" y="2048256"/>
+            <a:ext cx="768096" cy="274320"/>
+          </a:xfrm>
+          <a:prstGeom prst="rect">
+            <a:avLst/>
+          </a:prstGeom>
+          <a:noFill/>
+          <a:ln/>
+        </p:spPr>
+        <p:txBody>
+          <a:bodyPr wrap="square" rtlCol="0" anchor="ctr"/>
+          <a:lstStyle/>
+          <a:p>
+            <a:pPr algn="r" indent="0" marL="0">
+              <a:buNone/>
+            </a:pPr>
+            <a:r>
+              <a:rPr lang="en-US" sz="750" dirty="0">
+                <a:solidFill>
+                  <a:srgbClr val="FFFFFF"/>
+                </a:solidFill>
+                <a:latin typeface="Segoe UI" pitchFamily="34" charset="0"/>
+                <a:ea typeface="Segoe UI" pitchFamily="34" charset="-122"/>
+                <a:cs typeface="Segoe UI" pitchFamily="34" charset="-120"/>
+              </a:rPr>
+              <a:t>◼ ◼ ▮</a:t>
+            </a:r>
+            <a:endParaRPr lang="en-US" sz="750" dirty="0"/>
+          </a:p>
+        </p:txBody>
+      </p:sp>
+      <p:sp>
+        <p:nvSpPr>
+          <p:cNvPr id="51" name="Text 49"/>
+          <p:cNvSpPr/>
+          <p:nvPr/>
+        </p:nvSpPr>
+        <p:spPr>
+          <a:xfrm>
+            <a:off x="10021824" y="2359152"/>
+            <a:ext cx="1444752" cy="256032"/>
+          </a:xfrm>
+          <a:prstGeom prst="rect">
+            <a:avLst/>
+          </a:prstGeom>
+          <a:noFill/>
+          <a:ln/>
+        </p:spPr>
+        <p:txBody>
+          <a:bodyPr wrap="square" rtlCol="0" anchor="ctr"/>
+          <a:lstStyle/>
+          <a:p>
+            <a:pPr indent="0" marL="0">
+              <a:buNone/>
+            </a:pPr>
+            <a:r>
+              <a:rPr lang="en-US" sz="1050" b="1" dirty="0">
+                <a:solidFill>
+                  <a:srgbClr val="71717A"/>
+                </a:solidFill>
+                <a:latin typeface="Segoe UI" pitchFamily="34" charset="0"/>
+                <a:ea typeface="Segoe UI" pitchFamily="34" charset="-122"/>
+                <a:cs typeface="Segoe UI" pitchFamily="34" charset="-120"/>
+              </a:rPr>
+              <a:t>Jobs</a:t>
+            </a:r>
+            <a:endParaRPr lang="en-US" sz="1050" dirty="0"/>
+          </a:p>
+        </p:txBody>
+      </p:sp>
+      <p:sp>
+        <p:nvSpPr>
+          <p:cNvPr id="52" name="Shape 50"/>
+          <p:cNvSpPr/>
+          <p:nvPr/>
+        </p:nvSpPr>
+        <p:spPr>
+          <a:xfrm>
+            <a:off x="10149840" y="2980944"/>
+            <a:ext cx="1188720" cy="438912"/>
+          </a:xfrm>
+          <a:prstGeom prst="roundRect">
+            <a:avLst>
+              <a:gd name="adj" fmla="val 10417"/>
+            </a:avLst>
+          </a:prstGeom>
+          <a:solidFill>
+            <a:srgbClr val="E4F2E8"/>
+          </a:solidFill>
+          <a:ln w="12700">
+            <a:solidFill>
+              <a:srgbClr val="7FB894"/>
+            </a:solidFill>
+            <a:prstDash val="solid"/>
+          </a:ln>
+        </p:spPr>
+      </p:sp>
+      <p:sp>
+        <p:nvSpPr>
+          <p:cNvPr id="53" name="Shape 51"/>
+          <p:cNvSpPr/>
+          <p:nvPr/>
+        </p:nvSpPr>
+        <p:spPr>
+          <a:xfrm>
+            <a:off x="10149840" y="3529584"/>
+            <a:ext cx="1188720" cy="438912"/>
+          </a:xfrm>
+          <a:prstGeom prst="roundRect">
+            <a:avLst>
+              <a:gd name="adj" fmla="val 10417"/>
+            </a:avLst>
+          </a:prstGeom>
+          <a:solidFill>
+            <a:srgbClr val="EFF1F4"/>
+          </a:solidFill>
+          <a:ln w="12700">
+            <a:solidFill>
+              <a:srgbClr val="E4E6EA"/>
+            </a:solidFill>
+            <a:prstDash val="solid"/>
+          </a:ln>
+        </p:spPr>
+      </p:sp>
+      <p:sp>
+        <p:nvSpPr>
+          <p:cNvPr id="54" name="Shape 52"/>
+          <p:cNvSpPr/>
+          <p:nvPr/>
+        </p:nvSpPr>
+        <p:spPr>
+          <a:xfrm>
+            <a:off x="10149840" y="4078224"/>
+            <a:ext cx="1188720" cy="438912"/>
+          </a:xfrm>
+          <a:prstGeom prst="roundRect">
+            <a:avLst>
+              <a:gd name="adj" fmla="val 10417"/>
+            </a:avLst>
+          </a:prstGeom>
+          <a:solidFill>
+            <a:srgbClr val="EFF1F4"/>
+          </a:solidFill>
+          <a:ln w="12700">
+            <a:solidFill>
+              <a:srgbClr val="E4E6EA"/>
+            </a:solidFill>
+            <a:prstDash val="solid"/>
+          </a:ln>
+        </p:spPr>
+      </p:sp>
+      <p:sp>
+        <p:nvSpPr>
+          <p:cNvPr id="55" name="Shape 53"/>
+          <p:cNvSpPr/>
+          <p:nvPr/>
+        </p:nvSpPr>
+        <p:spPr>
+          <a:xfrm>
+            <a:off x="10607040" y="4809744"/>
+            <a:ext cx="274320" cy="274320"/>
+          </a:xfrm>
+          <a:prstGeom prst="ellipse">
+            <a:avLst/>
+          </a:prstGeom>
+          <a:solidFill>
+            <a:srgbClr val="15803D"/>
+          </a:solidFill>
+          <a:ln w="12700">
+            <a:solidFill>
+              <a:srgbClr val="15803D"/>
+            </a:solidFill>
+            <a:prstDash val="solid"/>
+          </a:ln>
+        </p:spPr>
+      </p:sp>
+      <p:sp>
+        <p:nvSpPr>
+          <p:cNvPr id="56" name="Text 54"/>
+          <p:cNvSpPr/>
+          <p:nvPr/>
+        </p:nvSpPr>
+        <p:spPr>
+          <a:xfrm>
+            <a:off x="10607040" y="4809744"/>
+            <a:ext cx="274320" cy="274320"/>
+          </a:xfrm>
+          <a:prstGeom prst="rect">
+            <a:avLst/>
+          </a:prstGeom>
+          <a:noFill/>
+          <a:ln/>
+        </p:spPr>
+        <p:txBody>
+          <a:bodyPr wrap="square" rtlCol="0" anchor="ctr"/>
+          <a:lstStyle/>
+          <a:p>
+            <a:pPr algn="ctr" indent="0" marL="0">
+              <a:buNone/>
+            </a:pPr>
+            <a:r>
+              <a:rPr lang="en-US" sz="1250" b="1" dirty="0">
+                <a:solidFill>
+                  <a:srgbClr val="FFFFFF"/>
+                </a:solidFill>
+                <a:latin typeface="Segoe UI" pitchFamily="34" charset="0"/>
+                <a:ea typeface="Segoe UI" pitchFamily="34" charset="-122"/>
+                <a:cs typeface="Segoe UI" pitchFamily="34" charset="-120"/>
+              </a:rPr>
+              <a:t>4</a:t>
+            </a:r>
+            <a:endParaRPr lang="en-US" sz="1250" dirty="0"/>
+          </a:p>
+        </p:txBody>
+      </p:sp>
+      <p:sp>
+        <p:nvSpPr>
+          <p:cNvPr id="57" name="Text 55"/>
+          <p:cNvSpPr/>
+          <p:nvPr/>
+        </p:nvSpPr>
+        <p:spPr>
+          <a:xfrm>
+            <a:off x="10058400" y="5193792"/>
+            <a:ext cx="1371600" cy="274320"/>
+          </a:xfrm>
+          <a:prstGeom prst="rect">
+            <a:avLst/>
+          </a:prstGeom>
+          <a:noFill/>
+          <a:ln/>
+        </p:spPr>
+        <p:txBody>
+          <a:bodyPr wrap="square" rtlCol="0" anchor="ctr"/>
+          <a:lstStyle/>
+          <a:p>
+            <a:pPr algn="ctr" indent="0" marL="0">
+              <a:buNone/>
+            </a:pPr>
+            <a:r>
+              <a:rPr lang="en-US" sz="1050" b="1" dirty="0">
+                <a:solidFill>
+                  <a:srgbClr val="15803D"/>
+                </a:solidFill>
+                <a:latin typeface="Segoe UI" pitchFamily="34" charset="0"/>
+                <a:ea typeface="Segoe UI" pitchFamily="34" charset="-122"/>
+                <a:cs typeface="Segoe UI" pitchFamily="34" charset="-120"/>
+              </a:rPr>
+              <a:t>Signed in</a:t>
+            </a:r>
+            <a:endParaRPr lang="en-US" sz="1050" dirty="0"/>
+          </a:p>
+        </p:txBody>
+      </p:sp>
+      <p:sp>
+        <p:nvSpPr>
+          <p:cNvPr id="58" name="Text 56"/>
+          <p:cNvSpPr/>
+          <p:nvPr/>
+        </p:nvSpPr>
+        <p:spPr>
+          <a:xfrm>
+            <a:off x="566928" y="6291072"/>
+            <a:ext cx="11057839" cy="320040"/>
+          </a:xfrm>
+          <a:prstGeom prst="rect">
+            <a:avLst/>
+          </a:prstGeom>
+          <a:noFill/>
+          <a:ln/>
+        </p:spPr>
+        <p:txBody>
+          <a:bodyPr wrap="square" rtlCol="0" anchor="ctr"/>
+          <a:lstStyle/>
+          <a:p>
+            <a:pPr indent="0" marL="0">
+              <a:buNone/>
+            </a:pPr>
+            <a:r>
+              <a:rPr lang="en-US" sz="1250" i="1" dirty="0">
+                <a:solidFill>
+                  <a:srgbClr val="71717A"/>
+                </a:solidFill>
+                <a:latin typeface="Segoe UI" pitchFamily="34" charset="0"/>
+                <a:ea typeface="Segoe UI" pitchFamily="34" charset="-122"/>
+                <a:cs typeface="Segoe UI" pitchFamily="34" charset="-120"/>
+              </a:rPr>
+              <a:t>The app is the one QA installs - we do not rebuild it for testing. The same four steps run on this emulator or on a phone plugged in by USB.</a:t>
+            </a:r>
+            <a:endParaRPr lang="en-US" sz="1250" dirty="0"/>
           </a:p>
         </p:txBody>
       </p:sp>

--- a/presentations/Mobile_Test_Automation_Appium.pptx
+++ b/presentations/Mobile_Test_Automation_Appium.pptx
@@ -4164,7 +4164,7 @@
         <p:spPr>
           <a:xfrm>
             <a:off x="566928" y="5925312"/>
-            <a:ext cx="11057839" cy="274320"/>
+            <a:ext cx="11057839" cy="365760"/>
           </a:xfrm>
           <a:prstGeom prst="rect">
             <a:avLst/>
@@ -4188,7 +4188,7 @@
                 <a:ea typeface="Segoe UI" pitchFamily="34" charset="-122"/>
                 <a:cs typeface="Segoe UI" pitchFamily="34" charset="-120"/>
               </a:rPr>
-              <a:t>"By hand" is an estimate built from those five lines. "With the agent" was measured during the session.</a:t>
+              <a:t>"By hand" is an estimate built from those five lines. "With the agent" was measured during the session - and excludes the team’s own time: adding the test ids to the app, reviewing the code and deploying it.</a:t>
             </a:r>
             <a:endParaRPr lang="en-US" sz="1150" dirty="0"/>
           </a:p>
@@ -4333,7 +4333,7 @@
         <p:spPr>
           <a:xfrm>
             <a:off x="566928" y="1627632"/>
-            <a:ext cx="2572436" cy="3703320"/>
+            <a:ext cx="2572436" cy="3886200"/>
           </a:xfrm>
           <a:prstGeom prst="roundRect">
             <a:avLst>
@@ -4409,7 +4409,7 @@
                 <a:ea typeface="Segoe UI" pitchFamily="34" charset="-122"/>
                 <a:cs typeface="Segoe UI" pitchFamily="34" charset="-120"/>
               </a:rPr>
-              <a:t>1. It read the app to find the truth</a:t>
+              <a:t>1. It read the app instead of guessing</a:t>
             </a:r>
             <a:endParaRPr lang="en-US" sz="1450" dirty="0"/>
           </a:p>
@@ -4448,7 +4448,7 @@
                 <a:ea typeface="Segoe UI" pitchFamily="34" charset="-122"/>
                 <a:cs typeface="Segoe UI" pitchFamily="34" charset="-120"/>
               </a:rPr>
-              <a:t>Not trial and error.</a:t>
+              <a:t>After the first failure, not before.</a:t>
             </a:r>
             <a:endParaRPr lang="en-US" sz="1200" dirty="0"/>
           </a:p>
@@ -4463,7 +4463,7 @@
         <p:spPr>
           <a:xfrm>
             <a:off x="768096" y="3090672"/>
-            <a:ext cx="2170100" cy="2103120"/>
+            <a:ext cx="2170100" cy="2286000"/>
           </a:xfrm>
           <a:prstGeom prst="rect">
             <a:avLst/>
@@ -4491,7 +4491,7 @@
                 <a:ea typeface="Segoe UI" pitchFamily="34" charset="-122"/>
                 <a:cs typeface="Segoe UI" pitchFamily="34" charset="-120"/>
               </a:rPr>
-              <a:t>The phone number must be exactly 10 digits - a rule buried in the app’s code</a:t>
+              <a:t>Tapping Sign In did nothing - the phone number must be exactly 10 digits, a rule buried in the code</a:t>
             </a:r>
             <a:endParaRPr lang="en-US" sz="1200" dirty="0"/>
           </a:p>
@@ -4512,7 +4512,7 @@
                 <a:ea typeface="Segoe UI" pitchFamily="34" charset="-122"/>
                 <a:cs typeface="Segoe UI" pitchFamily="34" charset="-120"/>
               </a:rPr>
-              <a:t>Get it wrong and the button silently does nothing, which is a long afternoon of confusion</a:t>
+              <a:t>It found that rule instead of trying numbers until one worked</a:t>
             </a:r>
             <a:endParaRPr lang="en-US" sz="1200" dirty="0"/>
           </a:p>
@@ -4533,7 +4533,7 @@
                 <a:ea typeface="Segoe UI" pitchFamily="34" charset="-122"/>
                 <a:cs typeface="Segoe UI" pitchFamily="34" charset="-120"/>
               </a:rPr>
-              <a:t>It found the rule, and made the test say so out loud</a:t>
+              <a:t>The test now fails in a second, with a clear reason</a:t>
             </a:r>
             <a:endParaRPr lang="en-US" sz="1200" dirty="0"/>
           </a:p>
@@ -4548,7 +4548,7 @@
         <p:spPr>
           <a:xfrm>
             <a:off x="3395396" y="1627632"/>
-            <a:ext cx="2572436" cy="3703320"/>
+            <a:ext cx="2572436" cy="3886200"/>
           </a:xfrm>
           <a:prstGeom prst="roundRect">
             <a:avLst>
@@ -4624,7 +4624,7 @@
                 <a:ea typeface="Segoe UI" pitchFamily="34" charset="-122"/>
                 <a:cs typeface="Segoe UI" pitchFamily="34" charset="-120"/>
               </a:rPr>
-              <a:t>2. It worked across three systems at once</a:t>
+              <a:t>2. One agent, three languages</a:t>
             </a:r>
             <a:endParaRPr lang="en-US" sz="1450" dirty="0"/>
           </a:p>
@@ -4663,7 +4663,7 @@
                 <a:ea typeface="Segoe UI" pitchFamily="34" charset="-122"/>
                 <a:cs typeface="Segoe UI" pitchFamily="34" charset="-120"/>
               </a:rPr>
-              <a:t>App, backend and test suite together.</a:t>
+              <a:t>Android app, backend, tests.</a:t>
             </a:r>
             <a:endParaRPr lang="en-US" sz="1200" dirty="0"/>
           </a:p>
@@ -4678,7 +4678,7 @@
         <p:spPr>
           <a:xfrm>
             <a:off x="3596564" y="3090672"/>
-            <a:ext cx="2170100" cy="2103120"/>
+            <a:ext cx="2170100" cy="2286000"/>
           </a:xfrm>
           <a:prstGeom prst="rect">
             <a:avLst/>
@@ -4706,7 +4706,7 @@
                 <a:ea typeface="Segoe UI" pitchFamily="34" charset="-122"/>
                 <a:cs typeface="Segoe UI" pitchFamily="34" charset="-120"/>
               </a:rPr>
-              <a:t>The OTP fix needed a change in the RoadSide backend, a deploy, and a helper in the test</a:t>
+              <a:t>Reading the login meant Kotlin; the endpoint that reads the SMS back meant C#; the test meant TypeScript</a:t>
             </a:r>
             <a:endParaRPr lang="en-US" sz="1200" dirty="0"/>
           </a:p>
@@ -4727,7 +4727,7 @@
                 <a:ea typeface="Segoe UI" pitchFamily="34" charset="-122"/>
                 <a:cs typeface="Segoe UI" pitchFamily="34" charset="-120"/>
               </a:rPr>
-              <a:t>Normally three people, three tickets and a week of waiting on each other</a:t>
+              <a:t>No handover between people, and nobody waiting to be told what the other half does</a:t>
             </a:r>
             <a:endParaRPr lang="en-US" sz="1200" dirty="0"/>
           </a:p>
@@ -4742,7 +4742,7 @@
         <p:spPr>
           <a:xfrm>
             <a:off x="6223864" y="1627632"/>
-            <a:ext cx="2572436" cy="3703320"/>
+            <a:ext cx="2572436" cy="3886200"/>
           </a:xfrm>
           <a:prstGeom prst="roundRect">
             <a:avLst>
@@ -4818,7 +4818,7 @@
                 <a:ea typeface="Segoe UI" pitchFamily="34" charset="-122"/>
                 <a:cs typeface="Segoe UI" pitchFamily="34" charset="-120"/>
               </a:rPr>
-              <a:t>3. It debugged what looked hopeless</a:t>
+              <a:t>3. It kept testing until it was right</a:t>
             </a:r>
             <a:endParaRPr lang="en-US" sz="1450" dirty="0"/>
           </a:p>
@@ -4857,7 +4857,7 @@
                 <a:ea typeface="Segoe UI" pitchFamily="34" charset="-122"/>
                 <a:cs typeface="Segoe UI" pitchFamily="34" charset="-120"/>
               </a:rPr>
-              <a:t>"The emulator has no internet."</a:t>
+              <a:t>It got this one wrong first.</a:t>
             </a:r>
             <a:endParaRPr lang="en-US" sz="1200" dirty="0"/>
           </a:p>
@@ -4872,7 +4872,7 @@
         <p:spPr>
           <a:xfrm>
             <a:off x="6425032" y="3090672"/>
-            <a:ext cx="2170100" cy="2103120"/>
+            <a:ext cx="2170100" cy="2286000"/>
           </a:xfrm>
           <a:prstGeom prst="rect">
             <a:avLst/>
@@ -4900,7 +4900,7 @@
                 <a:ea typeface="Segoe UI" pitchFamily="34" charset="-122"/>
                 <a:cs typeface="Segoe UI" pitchFamily="34" charset="-120"/>
               </a:rPr>
-              <a:t>It checked what actually worked and what did not, and proved only name lookup was blocked</a:t>
+              <a:t>It said the emulator’s network card was dead and suggested using a real phone. That was wrong</a:t>
             </a:r>
             <a:endParaRPr lang="en-US" sz="1200" dirty="0"/>
           </a:p>
@@ -4921,10 +4921,31 @@
                 <a:ea typeface="Segoe UI" pitchFamily="34" charset="-122"/>
                 <a:cs typeface="Segoe UI" pitchFamily="34" charset="-120"/>
               </a:rPr>
-              <a:t>Then it built the small workaround that fixed it - about an hour, instead of giving up and buying handsets</a:t>
+              <a:t>It went back, proved only name lookup was blocked, and fixed it in about an hour</a:t>
             </a:r>
             <a:endParaRPr lang="en-US" sz="1200" dirty="0"/>
           </a:p>
+          <a:p>
+            <a:pPr marL="342900" indent="-342900">
+              <a:spcAft>
+                <a:spcPts val="600"/>
+              </a:spcAft>
+              <a:buSzPct val="100000"/>
+              <a:buChar char="•"/>
+            </a:pPr>
+            <a:r>
+              <a:rPr lang="en-US" sz="1200" dirty="0">
+                <a:solidFill>
+                  <a:srgbClr val="3F3F46"/>
+                </a:solidFill>
+                <a:latin typeface="Segoe UI" pitchFamily="34" charset="0"/>
+                <a:ea typeface="Segoe UI" pitchFamily="34" charset="-122"/>
+                <a:cs typeface="Segoe UI" pitchFamily="34" charset="-120"/>
+              </a:rPr>
+              <a:t>Fast at trying things - not immune to being wrong</a:t>
+            </a:r>
+            <a:endParaRPr lang="en-US" sz="1200" dirty="0"/>
+          </a:p>
         </p:txBody>
       </p:sp>
       <p:sp>
@@ -4936,7 +4957,7 @@
         <p:spPr>
           <a:xfrm>
             <a:off x="9052331" y="1627632"/>
-            <a:ext cx="2572436" cy="3703320"/>
+            <a:ext cx="2572436" cy="3886200"/>
           </a:xfrm>
           <a:prstGeom prst="roundRect">
             <a:avLst>
@@ -5066,7 +5087,7 @@
         <p:spPr>
           <a:xfrm>
             <a:off x="9253499" y="3090672"/>
-            <a:ext cx="2170100" cy="2103120"/>
+            <a:ext cx="2170100" cy="2286000"/>
           </a:xfrm>
           <a:prstGeom prst="rect">
             <a:avLst/>
@@ -5094,7 +5115,7 @@
                 <a:ea typeface="Segoe UI" pitchFamily="34" charset="-122"/>
                 <a:cs typeface="Segoe UI" pitchFamily="34" charset="-120"/>
               </a:rPr>
-              <a:t>Every dead end went into the README while it was fresh</a:t>
+              <a:t>Every dead end went into the README while it was fresh - including the wrong turn above</a:t>
             </a:r>
             <a:endParaRPr lang="en-US" sz="1200" dirty="0"/>
           </a:p>
@@ -5115,7 +5136,7 @@
                 <a:ea typeface="Segoe UI" pitchFamily="34" charset="-122"/>
                 <a:cs typeface="Segoe UI" pitchFamily="34" charset="-120"/>
               </a:rPr>
-              <a:t>The next person does not repeat the same day of trial and error</a:t>
+              <a:t>The next person does not lose the same afternoon</a:t>
             </a:r>
             <a:endParaRPr lang="en-US" sz="1200" dirty="0"/>
           </a:p>
@@ -5129,12 +5150,12 @@
         </p:nvSpPr>
         <p:spPr>
           <a:xfrm>
-            <a:off x="566928" y="5559552"/>
-            <a:ext cx="11057839" cy="685800"/>
+            <a:off x="566928" y="5696712"/>
+            <a:ext cx="11057839" cy="658368"/>
           </a:xfrm>
           <a:prstGeom prst="roundRect">
             <a:avLst>
-              <a:gd name="adj" fmla="val 8000"/>
+              <a:gd name="adj" fmla="val 8333"/>
             </a:avLst>
           </a:prstGeom>
           <a:solidFill>
@@ -5156,8 +5177,8 @@
         </p:nvSpPr>
         <p:spPr>
           <a:xfrm>
-            <a:off x="566928" y="5559552"/>
-            <a:ext cx="64008" cy="685800"/>
+            <a:off x="566928" y="5696712"/>
+            <a:ext cx="64008" cy="658368"/>
           </a:xfrm>
           <a:prstGeom prst="rect">
             <a:avLst/>
@@ -5181,8 +5202,8 @@
         </p:nvSpPr>
         <p:spPr>
           <a:xfrm>
-            <a:off x="822960" y="5559552"/>
-            <a:ext cx="10600639" cy="685800"/>
+            <a:off x="822960" y="5696712"/>
+            <a:ext cx="10600639" cy="658368"/>
           </a:xfrm>
           <a:prstGeom prst="rect">
             <a:avLst/>
@@ -5206,7 +5227,7 @@
                 <a:ea typeface="Segoe UI" pitchFamily="34" charset="-122"/>
                 <a:cs typeface="Segoe UI" pitchFamily="34" charset="-120"/>
               </a:rPr>
-              <a:t>Put simply: a person is fast at deciding what matters and slow at everything around it. The agent is the other way round - which is why the pair is quicker than either alone.</a:t>
+              <a:t>The honest split: the test ids in the app, the code review and every deploy were done by the team. The agent wrote the tests, the backend endpoint and the debugging - and was still the fastest part of the day.</a:t>
             </a:r>
             <a:endParaRPr lang="en-US" sz="1350" dirty="0"/>
           </a:p>

--- a/presentations/Mobile_Test_Automation_Appium.pptx
+++ b/presentations/Mobile_Test_Automation_Appium.pptx
@@ -4409,7 +4409,7 @@
                 <a:ea typeface="Segoe UI" pitchFamily="34" charset="-122"/>
                 <a:cs typeface="Segoe UI" pitchFamily="34" charset="-120"/>
               </a:rPr>
-              <a:t>1. It read the app instead of guessing</a:t>
+              <a:t>1. It reads the whole system at once</a:t>
             </a:r>
             <a:endParaRPr lang="en-US" sz="1450" dirty="0"/>
           </a:p>
@@ -4448,7 +4448,7 @@
                 <a:ea typeface="Segoe UI" pitchFamily="34" charset="-122"/>
                 <a:cs typeface="Segoe UI" pitchFamily="34" charset="-120"/>
               </a:rPr>
-              <a:t>After the first failure, not before.</a:t>
+              <a:t>A person opens one file at a time.</a:t>
             </a:r>
             <a:endParaRPr lang="en-US" sz="1200" dirty="0"/>
           </a:p>
@@ -4491,7 +4491,7 @@
                 <a:ea typeface="Segoe UI" pitchFamily="34" charset="-122"/>
                 <a:cs typeface="Segoe UI" pitchFamily="34" charset="-120"/>
               </a:rPr>
-              <a:t>Tapping Sign In did nothing - the phone number must be exactly 10 digits, a rule buried in the code</a:t>
+              <a:t>To write a test you have to know exactly what each field and button is called</a:t>
             </a:r>
             <a:endParaRPr lang="en-US" sz="1200" dirty="0"/>
           </a:p>
@@ -4512,7 +4512,7 @@
                 <a:ea typeface="Segoe UI" pitchFamily="34" charset="-122"/>
                 <a:cs typeface="Segoe UI" pitchFamily="34" charset="-120"/>
               </a:rPr>
-              <a:t>It found that rule instead of trying numbers until one worked</a:t>
+              <a:t>A person clicks around and guesses, or searches the code by hand</a:t>
             </a:r>
             <a:endParaRPr lang="en-US" sz="1200" dirty="0"/>
           </a:p>
@@ -4533,7 +4533,7 @@
                 <a:ea typeface="Segoe UI" pitchFamily="34" charset="-122"/>
                 <a:cs typeface="Segoe UI" pitchFamily="34" charset="-120"/>
               </a:rPr>
-              <a:t>The test now fails in a second, with a clear reason</a:t>
+              <a:t>The agent reads the source and takes the real names straight from it</a:t>
             </a:r>
             <a:endParaRPr lang="en-US" sz="1200" dirty="0"/>
           </a:p>
@@ -4624,7 +4624,7 @@
                 <a:ea typeface="Segoe UI" pitchFamily="34" charset="-122"/>
                 <a:cs typeface="Segoe UI" pitchFamily="34" charset="-120"/>
               </a:rPr>
-              <a:t>2. One agent, three languages</a:t>
+              <a:t>2. It works without stopping</a:t>
             </a:r>
             <a:endParaRPr lang="en-US" sz="1450" dirty="0"/>
           </a:p>
@@ -4663,7 +4663,7 @@
                 <a:ea typeface="Segoe UI" pitchFamily="34" charset="-122"/>
                 <a:cs typeface="Segoe UI" pitchFamily="34" charset="-120"/>
               </a:rPr>
-              <a:t>Android app, backend, tests.</a:t>
+              <a:t>No meetings, no context switching.</a:t>
             </a:r>
             <a:endParaRPr lang="en-US" sz="1200" dirty="0"/>
           </a:p>
@@ -4706,7 +4706,7 @@
                 <a:ea typeface="Segoe UI" pitchFamily="34" charset="-122"/>
                 <a:cs typeface="Segoe UI" pitchFamily="34" charset="-120"/>
               </a:rPr>
-              <a:t>Reading the login meant Kotlin; the endpoint that reads the SMS back meant C#; the test meant TypeScript</a:t>
+              <a:t>Work like this is normally spread over days, and part of every day goes on remembering where you were</a:t>
             </a:r>
             <a:endParaRPr lang="en-US" sz="1200" dirty="0"/>
           </a:p>
@@ -4727,7 +4727,7 @@
                 <a:ea typeface="Segoe UI" pitchFamily="34" charset="-122"/>
                 <a:cs typeface="Segoe UI" pitchFamily="34" charset="-120"/>
               </a:rPr>
-              <a:t>No handover between people, and nobody waiting to be told what the other half does</a:t>
+              <a:t>The agent does it as one continuous job</a:t>
             </a:r>
             <a:endParaRPr lang="en-US" sz="1200" dirty="0"/>
           </a:p>
@@ -4818,7 +4818,7 @@
                 <a:ea typeface="Segoe UI" pitchFamily="34" charset="-122"/>
                 <a:cs typeface="Segoe UI" pitchFamily="34" charset="-120"/>
               </a:rPr>
-              <a:t>3. It kept testing until it was right</a:t>
+              <a:t>3. Try, fail, fix - in seconds</a:t>
             </a:r>
             <a:endParaRPr lang="en-US" sz="1450" dirty="0"/>
           </a:p>
@@ -4857,7 +4857,7 @@
                 <a:ea typeface="Segoe UI" pitchFamily="34" charset="-122"/>
                 <a:cs typeface="Segoe UI" pitchFamily="34" charset="-120"/>
               </a:rPr>
-              <a:t>It got this one wrong first.</a:t>
+              <a:t>That loop is where the time really goes.</a:t>
             </a:r>
             <a:endParaRPr lang="en-US" sz="1200" dirty="0"/>
           </a:p>
@@ -4900,7 +4900,7 @@
                 <a:ea typeface="Segoe UI" pitchFamily="34" charset="-122"/>
                 <a:cs typeface="Segoe UI" pitchFamily="34" charset="-120"/>
               </a:rPr>
-              <a:t>It said the emulator’s network card was dead and suggested using a real phone. That was wrong</a:t>
+              <a:t>Automation is mostly: run it, see what broke, fix it, run it again</a:t>
             </a:r>
             <a:endParaRPr lang="en-US" sz="1200" dirty="0"/>
           </a:p>
@@ -4921,28 +4921,7 @@
                 <a:ea typeface="Segoe UI" pitchFamily="34" charset="-122"/>
                 <a:cs typeface="Segoe UI" pitchFamily="34" charset="-120"/>
               </a:rPr>
-              <a:t>It went back, proved only name lookup was blocked, and fixed it in about an hour</a:t>
-            </a:r>
-            <a:endParaRPr lang="en-US" sz="1200" dirty="0"/>
-          </a:p>
-          <a:p>
-            <a:pPr marL="342900" indent="-342900">
-              <a:spcAft>
-                <a:spcPts val="600"/>
-              </a:spcAft>
-              <a:buSzPct val="100000"/>
-              <a:buChar char="•"/>
-            </a:pPr>
-            <a:r>
-              <a:rPr lang="en-US" sz="1200" dirty="0">
-                <a:solidFill>
-                  <a:srgbClr val="3F3F46"/>
-                </a:solidFill>
-                <a:latin typeface="Segoe UI" pitchFamily="34" charset="0"/>
-                <a:ea typeface="Segoe UI" pitchFamily="34" charset="-122"/>
-                <a:cs typeface="Segoe UI" pitchFamily="34" charset="-120"/>
-              </a:rPr>
-              <a:t>Fast at trying things - not immune to being wrong</a:t>
+              <a:t>For a person each turn of that loop costs minutes and patience; here it is seconds, repeated without fatigue</a:t>
             </a:r>
             <a:endParaRPr lang="en-US" sz="1200" dirty="0"/>
           </a:p>
@@ -5033,7 +5012,7 @@
                 <a:ea typeface="Segoe UI" pitchFamily="34" charset="-122"/>
                 <a:cs typeface="Segoe UI" pitchFamily="34" charset="-120"/>
               </a:rPr>
-              <a:t>4. It writes it down as it goes</a:t>
+              <a:t>4. It does the parts we skip</a:t>
             </a:r>
             <a:endParaRPr lang="en-US" sz="1450" dirty="0"/>
           </a:p>
@@ -5072,7 +5051,7 @@
                 <a:ea typeface="Segoe UI" pitchFamily="34" charset="-122"/>
                 <a:cs typeface="Segoe UI" pitchFamily="34" charset="-120"/>
               </a:rPr>
-              <a:t>Normally the last job, usually skipped.</a:t>
+              <a:t>Structure, evidence, documentation.</a:t>
             </a:r>
             <a:endParaRPr lang="en-US" sz="1200" dirty="0"/>
           </a:p>
@@ -5115,7 +5094,7 @@
                 <a:ea typeface="Segoe UI" pitchFamily="34" charset="-122"/>
                 <a:cs typeface="Segoe UI" pitchFamily="34" charset="-120"/>
               </a:rPr>
-              <a:t>Every dead end went into the README while it was fresh - including the wrong turn above</a:t>
+              <a:t>Consistent naming, a README, screenshots and reports come as standard</a:t>
             </a:r>
             <a:endParaRPr lang="en-US" sz="1200" dirty="0"/>
           </a:p>
@@ -5136,7 +5115,7 @@
                 <a:ea typeface="Segoe UI" pitchFamily="34" charset="-122"/>
                 <a:cs typeface="Segoe UI" pitchFamily="34" charset="-120"/>
               </a:rPr>
-              <a:t>The next person does not lose the same afternoon</a:t>
+              <a:t>These are the first things dropped when a deadline is close - and the reason the next person starts from nothing</a:t>
             </a:r>
             <a:endParaRPr lang="en-US" sz="1200" dirty="0"/>
           </a:p>
@@ -5227,7 +5206,7 @@
                 <a:ea typeface="Segoe UI" pitchFamily="34" charset="-122"/>
                 <a:cs typeface="Segoe UI" pitchFamily="34" charset="-120"/>
               </a:rPr>
-              <a:t>The honest split: the test ids in the app, the code review and every deploy were done by the team. The agent wrote the tests, the backend endpoint and the debugging - and was still the fastest part of the day.</a:t>
+              <a:t>A person is fast at deciding what matters. The agent is fast at everything around it. That is why the pair beats either one alone.</a:t>
             </a:r>
             <a:endParaRPr lang="en-US" sz="1350" dirty="0"/>
           </a:p>
